--- a/docs/youjie_goai_pitch.pptx
+++ b/docs/youjie_goai_pitch.pptx
@@ -2,23 +2,23 @@
 <file path=ppt/presentation.xml><?xml version="1.0" encoding="utf-8"?>
 <p:presentation xmlns:p="http://schemas.openxmlformats.org/presentationml/2006/main">
   <p:sldMasterIdLst>
-    <p:sldMasterId xmlns:r="http://schemas.openxmlformats.org/officeDocument/2006/relationships" id="2147483648" r:id="Rc7a111e5854a4d59"/>
+    <p:sldMasterId xmlns:r="http://schemas.openxmlformats.org/officeDocument/2006/relationships" id="2147483648" r:id="Rd40964d97c214496"/>
   </p:sldMasterIdLst>
   <p:notesMasterIdLst>
-    <p:notesMasterId xmlns:r="http://schemas.openxmlformats.org/officeDocument/2006/relationships" r:id="Rec704d4dc0154c03"/>
+    <p:notesMasterId xmlns:r="http://schemas.openxmlformats.org/officeDocument/2006/relationships" r:id="R0fef9b4f80224a7a"/>
   </p:notesMasterIdLst>
   <p:sldIdLst>
-    <p:sldId xmlns:r="http://schemas.openxmlformats.org/officeDocument/2006/relationships" id="256" r:id="Rc8143d20e23b47c3"/>
-    <p:sldId xmlns:r="http://schemas.openxmlformats.org/officeDocument/2006/relationships" id="257" r:id="R0d09de2e608b4aa7"/>
-    <p:sldId xmlns:r="http://schemas.openxmlformats.org/officeDocument/2006/relationships" id="258" r:id="R565701ceef8f42f6"/>
-    <p:sldId xmlns:r="http://schemas.openxmlformats.org/officeDocument/2006/relationships" id="259" r:id="Rddff402b6a81416f"/>
-    <p:sldId xmlns:r="http://schemas.openxmlformats.org/officeDocument/2006/relationships" id="260" r:id="R6aabcf6b2302451f"/>
-    <p:sldId xmlns:r="http://schemas.openxmlformats.org/officeDocument/2006/relationships" id="261" r:id="R2e1ab338a8344ee7"/>
-    <p:sldId xmlns:r="http://schemas.openxmlformats.org/officeDocument/2006/relationships" id="262" r:id="R2337fc88c6d14d58"/>
-    <p:sldId xmlns:r="http://schemas.openxmlformats.org/officeDocument/2006/relationships" id="263" r:id="R5a18b55a076a4e6b"/>
-    <p:sldId xmlns:r="http://schemas.openxmlformats.org/officeDocument/2006/relationships" id="264" r:id="R86d51c8120d84a84"/>
-    <p:sldId xmlns:r="http://schemas.openxmlformats.org/officeDocument/2006/relationships" id="265" r:id="R4461eb5dbfc54a12"/>
-    <p:sldId xmlns:r="http://schemas.openxmlformats.org/officeDocument/2006/relationships" id="266" r:id="R93acd9faa48f46d3"/>
+    <p:sldId xmlns:r="http://schemas.openxmlformats.org/officeDocument/2006/relationships" id="256" r:id="R8175842298ec4ac6"/>
+    <p:sldId xmlns:r="http://schemas.openxmlformats.org/officeDocument/2006/relationships" id="257" r:id="R776923547bff43c6"/>
+    <p:sldId xmlns:r="http://schemas.openxmlformats.org/officeDocument/2006/relationships" id="258" r:id="Re7ba5942ddff40aa"/>
+    <p:sldId xmlns:r="http://schemas.openxmlformats.org/officeDocument/2006/relationships" id="259" r:id="R9f64136f1296458e"/>
+    <p:sldId xmlns:r="http://schemas.openxmlformats.org/officeDocument/2006/relationships" id="260" r:id="R051fd9ed90884bc2"/>
+    <p:sldId xmlns:r="http://schemas.openxmlformats.org/officeDocument/2006/relationships" id="261" r:id="R16cca54be80642e4"/>
+    <p:sldId xmlns:r="http://schemas.openxmlformats.org/officeDocument/2006/relationships" id="262" r:id="Reea97c1e88db4ebe"/>
+    <p:sldId xmlns:r="http://schemas.openxmlformats.org/officeDocument/2006/relationships" id="263" r:id="R247185b27b0645be"/>
+    <p:sldId xmlns:r="http://schemas.openxmlformats.org/officeDocument/2006/relationships" id="264" r:id="Rb5daa09ad82a40df"/>
+    <p:sldId xmlns:r="http://schemas.openxmlformats.org/officeDocument/2006/relationships" id="265" r:id="Re434c082d6a34964"/>
+    <p:sldId xmlns:r="http://schemas.openxmlformats.org/officeDocument/2006/relationships" id="266" r:id="R094158e13c434260"/>
   </p:sldIdLst>
   <p:sldSz cx="12192000" cy="6858000"/>
   <p:notesSz cx="6858000" cy="9144000"/>
@@ -624,7 +624,7 @@
               <a:buNone/>
             </a:pPr>
             <a:r>
-              <a:t>有界不打算重做 ERP 或 APS，它要成为这些成熟系统上方可审计的异常处置决策层。输入可以不确定，方案必须可复算；建议可以自动生成，决定必须由人承担。请打开在线 Demo，换一个 seed，比较三套方案，再亲自试一次驳回，看系统是否真的守住边界。</a:t>
+              <a:t>有界不打算重做 ERP 或 APS，它要成为这些成熟系统上方可审计的异常处置决策层。输入可以不确定，方案必须可复算；建议可以自动生成，决定必须由人承担。请扫描二维码打开在线 Demo，换一个 seed，比较三套方案，再亲自试一次驳回，看系统是否真的守住边界。源码和完整演示视频已公开在 github.com/RexKing6/youjie-agent。</a:t>
             </a:r>
           </a:p>
         </p:txBody>
@@ -1255,7 +1255,7 @@
           <p:cNvPr id="2" name="Date Placeholder 1">
             <a:extLst xmlns:a="http://schemas.openxmlformats.org/drawingml/2006/main">
               <a:ext uri="{FF2B5EF4-FFF2-40B4-BE49-F238E27FC236}">
-                <a16:creationId xmlns:a16="http://schemas.microsoft.com/office/drawing/2014/main" id="{5C476390-E0C4-4BC6-B3BC-52459B5B63A3}"/>
+                <a16:creationId xmlns:a16="http://schemas.microsoft.com/office/drawing/2014/main" id="{3313CFF8-A59D-4C9B-8935-828220566CE4}"/>
               </a:ext>
             </a:extLst>
           </p:cNvPr>
@@ -1283,7 +1283,7 @@
           <p:cNvPr id="3" name="Footer Placeholder 2">
             <a:extLst xmlns:a="http://schemas.openxmlformats.org/drawingml/2006/main">
               <a:ext uri="{FF2B5EF4-FFF2-40B4-BE49-F238E27FC236}">
-                <a16:creationId xmlns:a16="http://schemas.microsoft.com/office/drawing/2014/main" id="{FFB60FE5-AA54-4FA4-901B-AC319B68A40E}"/>
+                <a16:creationId xmlns:a16="http://schemas.microsoft.com/office/drawing/2014/main" id="{D90B41D1-F88E-4D2A-96CA-356F2AE0A91B}"/>
               </a:ext>
             </a:extLst>
           </p:cNvPr>
@@ -1308,7 +1308,7 @@
           <p:cNvPr id="4" name="Slide Number Placeholder 3">
             <a:extLst xmlns:a="http://schemas.openxmlformats.org/drawingml/2006/main">
               <a:ext uri="{FF2B5EF4-FFF2-40B4-BE49-F238E27FC236}">
-                <a16:creationId xmlns:a16="http://schemas.microsoft.com/office/drawing/2014/main" id="{BF3DACD9-7B1C-4CBA-8394-9BEF894066E3}"/>
+                <a16:creationId xmlns:a16="http://schemas.microsoft.com/office/drawing/2014/main" id="{4E1206E2-D665-4AD6-ACF7-A9D4C323673B}"/>
               </a:ext>
             </a:extLst>
           </p:cNvPr>
@@ -1358,7 +1358,7 @@
           <p:cNvPr id="4" name="Date Placeholder 3">
             <a:extLst xmlns:a="http://schemas.openxmlformats.org/drawingml/2006/main">
               <a:ext uri="{FF2B5EF4-FFF2-40B4-BE49-F238E27FC236}">
-                <a16:creationId xmlns:a16="http://schemas.microsoft.com/office/drawing/2014/main" id="{6817AB8F-0B34-4179-A412-B70ABB77F041}"/>
+                <a16:creationId xmlns:a16="http://schemas.microsoft.com/office/drawing/2014/main" id="{0ADC5183-7EC0-439B-9DF8-229D05DB5615}"/>
               </a:ext>
             </a:extLst>
           </p:cNvPr>
@@ -1405,7 +1405,7 @@
           <p:cNvPr id="5" name="Footer Placeholder 4">
             <a:extLst xmlns:a="http://schemas.openxmlformats.org/drawingml/2006/main">
               <a:ext uri="{FF2B5EF4-FFF2-40B4-BE49-F238E27FC236}">
-                <a16:creationId xmlns:a16="http://schemas.microsoft.com/office/drawing/2014/main" id="{02478781-87B9-4F43-9788-F837E8DBA343}"/>
+                <a16:creationId xmlns:a16="http://schemas.microsoft.com/office/drawing/2014/main" id="{1F60DD84-1FE8-4125-9838-D76830AAF9FF}"/>
               </a:ext>
             </a:extLst>
           </p:cNvPr>
@@ -1449,7 +1449,7 @@
           <p:cNvPr id="6" name="Slide Number Placeholder 5">
             <a:extLst xmlns:a="http://schemas.openxmlformats.org/drawingml/2006/main">
               <a:ext uri="{FF2B5EF4-FFF2-40B4-BE49-F238E27FC236}">
-                <a16:creationId xmlns:a16="http://schemas.microsoft.com/office/drawing/2014/main" id="{AE01331C-2DA8-4FEF-8768-E5524EA8CA15}"/>
+                <a16:creationId xmlns:a16="http://schemas.microsoft.com/office/drawing/2014/main" id="{DE235AEB-9829-44AF-88AF-B9CB55840DD2}"/>
               </a:ext>
             </a:extLst>
           </p:cNvPr>
@@ -1495,7 +1495,7 @@
   </p:cSld>
   <p:clrMap bg1="lt1" tx1="dk1" bg2="lt2" tx2="dk2" accent1="accent1" accent2="accent2" accent3="accent3" accent4="accent4" accent5="accent5" accent6="accent6" hlink="hlink" folHlink="folHlink"/>
   <p:sldLayoutIdLst>
-    <p:sldLayoutId xmlns:r="http://schemas.openxmlformats.org/officeDocument/2006/relationships" id="2147483649" r:id="R20ef7459ea664efe"/>
+    <p:sldLayoutId xmlns:r="http://schemas.openxmlformats.org/officeDocument/2006/relationships" id="2147483649" r:id="Rae6b90c91caa4d1f"/>
   </p:sldLayoutIdLst>
   <p:txStyles>
     <p:titleStyle>
@@ -2048,7 +2048,7 @@
           <p:cNvPr id="2" name="Freeform 2">
             <a:extLst xmlns:a="http://schemas.openxmlformats.org/drawingml/2006/main">
               <a:ext uri="{FF2B5EF4-FFF2-40B4-BE49-F238E27FC236}">
-                <a16:creationId xmlns:a16="http://schemas.microsoft.com/office/drawing/2014/main" id="{A5701E09-C4BF-49F8-B5A5-D1D52233F441}"/>
+                <a16:creationId xmlns:a16="http://schemas.microsoft.com/office/drawing/2014/main" id="{828F6B00-F4AB-4774-83DA-02F739276C33}"/>
               </a:ext>
             </a:extLst>
           </p:cNvPr>
@@ -2096,7 +2096,7 @@
           <p:cNvPr id="3" name="Freeform 3">
             <a:extLst xmlns:a="http://schemas.openxmlformats.org/drawingml/2006/main">
               <a:ext uri="{FF2B5EF4-FFF2-40B4-BE49-F238E27FC236}">
-                <a16:creationId xmlns:a16="http://schemas.microsoft.com/office/drawing/2014/main" id="{E109E612-EAC1-4159-81B3-A20DD3588565}"/>
+                <a16:creationId xmlns:a16="http://schemas.microsoft.com/office/drawing/2014/main" id="{12592819-E464-434F-A129-6F099D80C9F9}"/>
               </a:ext>
             </a:extLst>
           </p:cNvPr>
@@ -2144,7 +2144,7 @@
           <p:cNvPr id="4" name="Freeform 4">
             <a:extLst xmlns:a="http://schemas.openxmlformats.org/drawingml/2006/main">
               <a:ext uri="{FF2B5EF4-FFF2-40B4-BE49-F238E27FC236}">
-                <a16:creationId xmlns:a16="http://schemas.microsoft.com/office/drawing/2014/main" id="{084F7894-3C41-46CB-8904-8AEB7FC90A87}"/>
+                <a16:creationId xmlns:a16="http://schemas.microsoft.com/office/drawing/2014/main" id="{1BD92784-8E31-4185-871F-6D806C3E58CF}"/>
               </a:ext>
             </a:extLst>
           </p:cNvPr>
@@ -2194,7 +2194,7 @@
           <p:cNvPr id="6" name="TextBox 6">
             <a:extLst xmlns:a="http://schemas.openxmlformats.org/drawingml/2006/main">
               <a:ext uri="{FF2B5EF4-FFF2-40B4-BE49-F238E27FC236}">
-                <a16:creationId xmlns:a16="http://schemas.microsoft.com/office/drawing/2014/main" id="{9CF5BB28-92B4-4B3F-9F6E-AC0FA68F49D7}"/>
+                <a16:creationId xmlns:a16="http://schemas.microsoft.com/office/drawing/2014/main" id="{4B72B8B2-5DE3-496C-8FD7-707DC824B647}"/>
               </a:ext>
             </a:extLst>
           </p:cNvPr>
@@ -2244,7 +2244,7 @@
           <p:cNvPr id="7" name="TextBox 7">
             <a:extLst xmlns:a="http://schemas.openxmlformats.org/drawingml/2006/main">
               <a:ext uri="{FF2B5EF4-FFF2-40B4-BE49-F238E27FC236}">
-                <a16:creationId xmlns:a16="http://schemas.microsoft.com/office/drawing/2014/main" id="{E843C3D6-418C-4138-BA15-6001652068B1}"/>
+                <a16:creationId xmlns:a16="http://schemas.microsoft.com/office/drawing/2014/main" id="{A80AC355-4BA2-4644-BD50-7D0548E4FF04}"/>
               </a:ext>
             </a:extLst>
           </p:cNvPr>
@@ -2294,7 +2294,7 @@
           <p:cNvPr id="8" name="Rectangle 8">
             <a:extLst xmlns:a="http://schemas.openxmlformats.org/drawingml/2006/main">
               <a:ext uri="{FF2B5EF4-FFF2-40B4-BE49-F238E27FC236}">
-                <a16:creationId xmlns:a16="http://schemas.microsoft.com/office/drawing/2014/main" id="{85F906C3-8797-497E-94C8-FF448E7F045E}"/>
+                <a16:creationId xmlns:a16="http://schemas.microsoft.com/office/drawing/2014/main" id="{8213445D-FB66-4144-9507-505D4A5409F1}"/>
               </a:ext>
             </a:extLst>
           </p:cNvPr>
@@ -2326,7 +2326,7 @@
           <p:cNvPr id="9" name="TextBox 9">
             <a:extLst xmlns:a="http://schemas.openxmlformats.org/drawingml/2006/main">
               <a:ext uri="{FF2B5EF4-FFF2-40B4-BE49-F238E27FC236}">
-                <a16:creationId xmlns:a16="http://schemas.microsoft.com/office/drawing/2014/main" id="{53B5DC55-F0B5-45FF-93F1-CE5A6AC7DB98}"/>
+                <a16:creationId xmlns:a16="http://schemas.microsoft.com/office/drawing/2014/main" id="{4BCE214B-1E56-4E2F-9067-211B70FDB782}"/>
               </a:ext>
             </a:extLst>
           </p:cNvPr>
@@ -2391,7 +2391,7 @@
           <p:cNvPr id="10" name="TextBox 10">
             <a:extLst xmlns:a="http://schemas.openxmlformats.org/drawingml/2006/main">
               <a:ext uri="{FF2B5EF4-FFF2-40B4-BE49-F238E27FC236}">
-                <a16:creationId xmlns:a16="http://schemas.microsoft.com/office/drawing/2014/main" id="{8295A5D1-3129-4DB8-9488-79EE6D61C91A}"/>
+                <a16:creationId xmlns:a16="http://schemas.microsoft.com/office/drawing/2014/main" id="{95FA8DC7-074E-40A3-A81B-9393749CAC9C}"/>
               </a:ext>
             </a:extLst>
           </p:cNvPr>
@@ -2441,7 +2441,7 @@
           <p:cNvPr id="12" name="Freeform 12">
             <a:extLst xmlns:a="http://schemas.openxmlformats.org/drawingml/2006/main">
               <a:ext uri="{FF2B5EF4-FFF2-40B4-BE49-F238E27FC236}">
-                <a16:creationId xmlns:a16="http://schemas.microsoft.com/office/drawing/2014/main" id="{EA329262-9BF0-4708-BB8A-B371AF335996}"/>
+                <a16:creationId xmlns:a16="http://schemas.microsoft.com/office/drawing/2014/main" id="{4EA9DCBF-B7AC-437A-8475-1F6518B4F025}"/>
               </a:ext>
             </a:extLst>
           </p:cNvPr>
@@ -2511,7 +2511,7 @@
           <p:cNvPr id="13" name="Freeform 13">
             <a:extLst xmlns:a="http://schemas.openxmlformats.org/drawingml/2006/main">
               <a:ext uri="{FF2B5EF4-FFF2-40B4-BE49-F238E27FC236}">
-                <a16:creationId xmlns:a16="http://schemas.microsoft.com/office/drawing/2014/main" id="{77F2C66A-05BE-4DD4-8928-B1FCCFFDDBC9}"/>
+                <a16:creationId xmlns:a16="http://schemas.microsoft.com/office/drawing/2014/main" id="{D6F7D831-D671-4D51-A687-FB9F508B39F2}"/>
               </a:ext>
             </a:extLst>
           </p:cNvPr>
@@ -2553,7 +2553,7 @@
           <p:cNvPr id="14" name="Ellipse 14">
             <a:extLst xmlns:a="http://schemas.openxmlformats.org/drawingml/2006/main">
               <a:ext uri="{FF2B5EF4-FFF2-40B4-BE49-F238E27FC236}">
-                <a16:creationId xmlns:a16="http://schemas.microsoft.com/office/drawing/2014/main" id="{2AEE2D69-0A22-45E2-B242-14D4160DCE85}"/>
+                <a16:creationId xmlns:a16="http://schemas.microsoft.com/office/drawing/2014/main" id="{3B299936-6F77-4549-A6FF-DB3397869E6A}"/>
               </a:ext>
             </a:extLst>
           </p:cNvPr>
@@ -2585,7 +2585,7 @@
           <p:cNvPr id="15" name="Freeform 15">
             <a:extLst xmlns:a="http://schemas.openxmlformats.org/drawingml/2006/main">
               <a:ext uri="{FF2B5EF4-FFF2-40B4-BE49-F238E27FC236}">
-                <a16:creationId xmlns:a16="http://schemas.microsoft.com/office/drawing/2014/main" id="{9F8B30A8-0BC1-44B4-9BD1-55C6184ECD59}"/>
+                <a16:creationId xmlns:a16="http://schemas.microsoft.com/office/drawing/2014/main" id="{E09BBE61-8248-4862-8C2E-59C8AAEC6B91}"/>
               </a:ext>
             </a:extLst>
           </p:cNvPr>
@@ -2654,7 +2654,7 @@
           <p:cNvPr id="16" name="Freeform 16">
             <a:extLst xmlns:a="http://schemas.openxmlformats.org/drawingml/2006/main">
               <a:ext uri="{FF2B5EF4-FFF2-40B4-BE49-F238E27FC236}">
-                <a16:creationId xmlns:a16="http://schemas.microsoft.com/office/drawing/2014/main" id="{334EEE92-81C4-4359-954A-07C6AC2D0E44}"/>
+                <a16:creationId xmlns:a16="http://schemas.microsoft.com/office/drawing/2014/main" id="{62F4595D-6733-46D9-BD7D-EDC8BA078DF9}"/>
               </a:ext>
             </a:extLst>
           </p:cNvPr>
@@ -2697,7 +2697,7 @@
           <p:cNvPr id="18" name="TextBox 18">
             <a:extLst xmlns:a="http://schemas.openxmlformats.org/drawingml/2006/main">
               <a:ext uri="{FF2B5EF4-FFF2-40B4-BE49-F238E27FC236}">
-                <a16:creationId xmlns:a16="http://schemas.microsoft.com/office/drawing/2014/main" id="{599383C0-7126-4085-A1F1-6690C047F8D6}"/>
+                <a16:creationId xmlns:a16="http://schemas.microsoft.com/office/drawing/2014/main" id="{B936ECEB-D173-4EBD-8397-3BDB5826A621}"/>
               </a:ext>
             </a:extLst>
           </p:cNvPr>
@@ -2747,7 +2747,7 @@
           <p:cNvPr id="19" name="Ellipse 19">
             <a:extLst xmlns:a="http://schemas.openxmlformats.org/drawingml/2006/main">
               <a:ext uri="{FF2B5EF4-FFF2-40B4-BE49-F238E27FC236}">
-                <a16:creationId xmlns:a16="http://schemas.microsoft.com/office/drawing/2014/main" id="{B5C722D6-D0FE-4AC4-A713-26E7A8C0A091}"/>
+                <a16:creationId xmlns:a16="http://schemas.microsoft.com/office/drawing/2014/main" id="{437A4974-D230-4B98-B5B5-9C1E3F9E4D8F}"/>
               </a:ext>
             </a:extLst>
           </p:cNvPr>
@@ -2779,7 +2779,7 @@
           <p:cNvPr id="20" name="Freeform 20">
             <a:extLst xmlns:a="http://schemas.openxmlformats.org/drawingml/2006/main">
               <a:ext uri="{FF2B5EF4-FFF2-40B4-BE49-F238E27FC236}">
-                <a16:creationId xmlns:a16="http://schemas.microsoft.com/office/drawing/2014/main" id="{6352F257-E701-4132-9FC1-73F0E8A5CC79}"/>
+                <a16:creationId xmlns:a16="http://schemas.microsoft.com/office/drawing/2014/main" id="{2ABE9591-AD93-4F67-93CC-0460C9F904AC}"/>
               </a:ext>
             </a:extLst>
           </p:cNvPr>
@@ -2836,7 +2836,7 @@
           <p:cNvPr id="21" name="Freeform 21">
             <a:extLst xmlns:a="http://schemas.openxmlformats.org/drawingml/2006/main">
               <a:ext uri="{FF2B5EF4-FFF2-40B4-BE49-F238E27FC236}">
-                <a16:creationId xmlns:a16="http://schemas.microsoft.com/office/drawing/2014/main" id="{07BA34FF-5A5B-4EDE-A03D-29CC00235C5F}"/>
+                <a16:creationId xmlns:a16="http://schemas.microsoft.com/office/drawing/2014/main" id="{3660BE36-D91F-4303-BDA0-BAEDCF1D5C5A}"/>
               </a:ext>
             </a:extLst>
           </p:cNvPr>
@@ -2893,7 +2893,7 @@
           <p:cNvPr id="22" name="Freeform 22">
             <a:extLst xmlns:a="http://schemas.openxmlformats.org/drawingml/2006/main">
               <a:ext uri="{FF2B5EF4-FFF2-40B4-BE49-F238E27FC236}">
-                <a16:creationId xmlns:a16="http://schemas.microsoft.com/office/drawing/2014/main" id="{6A623B34-6EEC-4460-BBB2-3B5961CE6A22}"/>
+                <a16:creationId xmlns:a16="http://schemas.microsoft.com/office/drawing/2014/main" id="{1143780F-411A-4132-B858-2F843D38D3F2}"/>
               </a:ext>
             </a:extLst>
           </p:cNvPr>
@@ -2959,7 +2959,7 @@
           <p:cNvPr id="24" name="TextBox 24">
             <a:extLst xmlns:a="http://schemas.openxmlformats.org/drawingml/2006/main">
               <a:ext uri="{FF2B5EF4-FFF2-40B4-BE49-F238E27FC236}">
-                <a16:creationId xmlns:a16="http://schemas.microsoft.com/office/drawing/2014/main" id="{EF031068-3650-433E-B89E-C0FD38389EF0}"/>
+                <a16:creationId xmlns:a16="http://schemas.microsoft.com/office/drawing/2014/main" id="{569F7F69-4D26-4D17-87C0-12DC8841EAC9}"/>
               </a:ext>
             </a:extLst>
           </p:cNvPr>
@@ -3009,7 +3009,7 @@
           <p:cNvPr id="25" name="Ellipse 25">
             <a:extLst xmlns:a="http://schemas.openxmlformats.org/drawingml/2006/main">
               <a:ext uri="{FF2B5EF4-FFF2-40B4-BE49-F238E27FC236}">
-                <a16:creationId xmlns:a16="http://schemas.microsoft.com/office/drawing/2014/main" id="{4FA71DEB-3036-4EB0-B804-8078B3A1FDC0}"/>
+                <a16:creationId xmlns:a16="http://schemas.microsoft.com/office/drawing/2014/main" id="{9A1A97A8-0DF6-46A3-988D-5F1DF3608C12}"/>
               </a:ext>
             </a:extLst>
           </p:cNvPr>
@@ -3041,7 +3041,7 @@
           <p:cNvPr id="26" name="Freeform 26">
             <a:extLst xmlns:a="http://schemas.openxmlformats.org/drawingml/2006/main">
               <a:ext uri="{FF2B5EF4-FFF2-40B4-BE49-F238E27FC236}">
-                <a16:creationId xmlns:a16="http://schemas.microsoft.com/office/drawing/2014/main" id="{CAF2C333-CB7A-4D9D-8525-C4E13A73B0B1}"/>
+                <a16:creationId xmlns:a16="http://schemas.microsoft.com/office/drawing/2014/main" id="{5529B7C0-6F77-4056-8880-6A67FAAA2347}"/>
               </a:ext>
             </a:extLst>
           </p:cNvPr>
@@ -3098,7 +3098,7 @@
           <p:cNvPr id="27" name="Freeform 27">
             <a:extLst xmlns:a="http://schemas.openxmlformats.org/drawingml/2006/main">
               <a:ext uri="{FF2B5EF4-FFF2-40B4-BE49-F238E27FC236}">
-                <a16:creationId xmlns:a16="http://schemas.microsoft.com/office/drawing/2014/main" id="{442E1E0B-7004-4779-8643-A1672507E36C}"/>
+                <a16:creationId xmlns:a16="http://schemas.microsoft.com/office/drawing/2014/main" id="{86586235-1C8E-4463-A375-5023544C7E71}"/>
               </a:ext>
             </a:extLst>
           </p:cNvPr>
@@ -3141,7 +3141,7 @@
           <p:cNvPr id="29" name="TextBox 29">
             <a:extLst xmlns:a="http://schemas.openxmlformats.org/drawingml/2006/main">
               <a:ext uri="{FF2B5EF4-FFF2-40B4-BE49-F238E27FC236}">
-                <a16:creationId xmlns:a16="http://schemas.microsoft.com/office/drawing/2014/main" id="{9BECBE63-1B52-4E94-8D40-9B5B530B756E}"/>
+                <a16:creationId xmlns:a16="http://schemas.microsoft.com/office/drawing/2014/main" id="{39F5C676-596B-496A-BEF2-674BABF2AB4F}"/>
               </a:ext>
             </a:extLst>
           </p:cNvPr>
@@ -3191,7 +3191,7 @@
           <p:cNvPr id="30" name="Ellipse 30">
             <a:extLst xmlns:a="http://schemas.openxmlformats.org/drawingml/2006/main">
               <a:ext uri="{FF2B5EF4-FFF2-40B4-BE49-F238E27FC236}">
-                <a16:creationId xmlns:a16="http://schemas.microsoft.com/office/drawing/2014/main" id="{52724FF2-5FAA-4CB0-9189-75C9CA9EC82A}"/>
+                <a16:creationId xmlns:a16="http://schemas.microsoft.com/office/drawing/2014/main" id="{762D9335-C721-4031-AD10-CF9B18632690}"/>
               </a:ext>
             </a:extLst>
           </p:cNvPr>
@@ -3223,7 +3223,7 @@
           <p:cNvPr id="31" name="Freeform 31">
             <a:extLst xmlns:a="http://schemas.openxmlformats.org/drawingml/2006/main">
               <a:ext uri="{FF2B5EF4-FFF2-40B4-BE49-F238E27FC236}">
-                <a16:creationId xmlns:a16="http://schemas.microsoft.com/office/drawing/2014/main" id="{91713A77-28DB-45D8-8EB1-3075D7408F55}"/>
+                <a16:creationId xmlns:a16="http://schemas.microsoft.com/office/drawing/2014/main" id="{89B536D6-0968-4E13-959C-C70461F7839A}"/>
               </a:ext>
             </a:extLst>
           </p:cNvPr>
@@ -3280,7 +3280,7 @@
           <p:cNvPr id="32" name="Freeform 32">
             <a:extLst xmlns:a="http://schemas.openxmlformats.org/drawingml/2006/main">
               <a:ext uri="{FF2B5EF4-FFF2-40B4-BE49-F238E27FC236}">
-                <a16:creationId xmlns:a16="http://schemas.microsoft.com/office/drawing/2014/main" id="{F7061B5B-AFA6-4CA1-9D89-97DC12C8DC3E}"/>
+                <a16:creationId xmlns:a16="http://schemas.microsoft.com/office/drawing/2014/main" id="{D1A023D5-AAE6-4127-88B7-9BC2D6A85994}"/>
               </a:ext>
             </a:extLst>
           </p:cNvPr>
@@ -3328,7 +3328,7 @@
           <p:cNvPr id="33" name="Freeform 33">
             <a:extLst xmlns:a="http://schemas.openxmlformats.org/drawingml/2006/main">
               <a:ext uri="{FF2B5EF4-FFF2-40B4-BE49-F238E27FC236}">
-                <a16:creationId xmlns:a16="http://schemas.microsoft.com/office/drawing/2014/main" id="{FAD007F2-04BC-46AB-A889-74613B890BC7}"/>
+                <a16:creationId xmlns:a16="http://schemas.microsoft.com/office/drawing/2014/main" id="{9BB2C926-26ED-474C-AB95-C8DCD77E3AF8}"/>
               </a:ext>
             </a:extLst>
           </p:cNvPr>
@@ -3371,7 +3371,7 @@
           <p:cNvPr id="35" name="TextBox 35">
             <a:extLst xmlns:a="http://schemas.openxmlformats.org/drawingml/2006/main">
               <a:ext uri="{FF2B5EF4-FFF2-40B4-BE49-F238E27FC236}">
-                <a16:creationId xmlns:a16="http://schemas.microsoft.com/office/drawing/2014/main" id="{B7BAE8E6-5D78-4095-827F-B1BA9D8A1F6C}"/>
+                <a16:creationId xmlns:a16="http://schemas.microsoft.com/office/drawing/2014/main" id="{9D01BD93-7BC0-4BCB-BBAB-08D78AD6850C}"/>
               </a:ext>
             </a:extLst>
           </p:cNvPr>
@@ -3421,7 +3421,7 @@
           <p:cNvPr id="36" name="Freeform 36">
             <a:extLst xmlns:a="http://schemas.openxmlformats.org/drawingml/2006/main">
               <a:ext uri="{FF2B5EF4-FFF2-40B4-BE49-F238E27FC236}">
-                <a16:creationId xmlns:a16="http://schemas.microsoft.com/office/drawing/2014/main" id="{49B5CF7C-F706-40C5-B522-F4CB61C731DD}"/>
+                <a16:creationId xmlns:a16="http://schemas.microsoft.com/office/drawing/2014/main" id="{03DA4009-B04F-4E32-A811-EDC87B6EDCF3}"/>
               </a:ext>
             </a:extLst>
           </p:cNvPr>
@@ -3461,7 +3461,7 @@
           <p:cNvPr id="37" name="TextBox 37">
             <a:extLst xmlns:a="http://schemas.openxmlformats.org/drawingml/2006/main">
               <a:ext uri="{FF2B5EF4-FFF2-40B4-BE49-F238E27FC236}">
-                <a16:creationId xmlns:a16="http://schemas.microsoft.com/office/drawing/2014/main" id="{E54FB384-5CB0-4118-A451-B70DA785643A}"/>
+                <a16:creationId xmlns:a16="http://schemas.microsoft.com/office/drawing/2014/main" id="{1B86FADC-56EE-42B9-9ADC-5F135527647B}"/>
               </a:ext>
             </a:extLst>
           </p:cNvPr>
@@ -3511,7 +3511,7 @@
           <p:cNvPr id="39" name="TextBox 39">
             <a:extLst xmlns:a="http://schemas.openxmlformats.org/drawingml/2006/main">
               <a:ext uri="{FF2B5EF4-FFF2-40B4-BE49-F238E27FC236}">
-                <a16:creationId xmlns:a16="http://schemas.microsoft.com/office/drawing/2014/main" id="{9CA87615-DBD4-49EC-BF9B-0724DCC4E200}"/>
+                <a16:creationId xmlns:a16="http://schemas.microsoft.com/office/drawing/2014/main" id="{0F0EE97E-9C34-4E77-AAB5-E88E9FDA9550}"/>
               </a:ext>
             </a:extLst>
           </p:cNvPr>
@@ -3561,7 +3561,7 @@
           <p:cNvPr id="40" name="TextBox 40">
             <a:extLst xmlns:a="http://schemas.openxmlformats.org/drawingml/2006/main">
               <a:ext uri="{FF2B5EF4-FFF2-40B4-BE49-F238E27FC236}">
-                <a16:creationId xmlns:a16="http://schemas.microsoft.com/office/drawing/2014/main" id="{FA863147-6744-4BD2-96D3-C44A83675194}"/>
+                <a16:creationId xmlns:a16="http://schemas.microsoft.com/office/drawing/2014/main" id="{4609F553-E718-41B2-B478-2AD335881E02}"/>
               </a:ext>
             </a:extLst>
           </p:cNvPr>
@@ -3609,7 +3609,7 @@
     </p:spTree>
     <p:extLst>
       <p:ext uri="{BB962C8B-B14F-4D97-AF65-F5344CB8AC3E}">
-        <p14:creationId xmlns:p14="http://schemas.microsoft.com/office/powerpoint/2010/main" val="1976491253"/>
+        <p14:creationId xmlns:p14="http://schemas.microsoft.com/office/powerpoint/2010/main" val="796916262"/>
       </p:ext>
     </p:extLst>
   </p:cSld>
@@ -3640,7 +3640,7 @@
           <p:cNvPr id="2" name="TextBox 2">
             <a:extLst xmlns:a="http://schemas.openxmlformats.org/drawingml/2006/main">
               <a:ext uri="{FF2B5EF4-FFF2-40B4-BE49-F238E27FC236}">
-                <a16:creationId xmlns:a16="http://schemas.microsoft.com/office/drawing/2014/main" id="{6836EB1E-7CE5-4CB5-9CE1-47CE2F930AF1}"/>
+                <a16:creationId xmlns:a16="http://schemas.microsoft.com/office/drawing/2014/main" id="{96FB94A1-BA9B-45A7-94FC-1633A32156FB}"/>
               </a:ext>
             </a:extLst>
           </p:cNvPr>
@@ -3690,7 +3690,7 @@
           <p:cNvPr id="3" name="TextBox 3">
             <a:extLst xmlns:a="http://schemas.openxmlformats.org/drawingml/2006/main">
               <a:ext uri="{FF2B5EF4-FFF2-40B4-BE49-F238E27FC236}">
-                <a16:creationId xmlns:a16="http://schemas.microsoft.com/office/drawing/2014/main" id="{E4C6DC89-093E-47A4-8FA8-2B668D5504C7}"/>
+                <a16:creationId xmlns:a16="http://schemas.microsoft.com/office/drawing/2014/main" id="{F272DC16-C443-4B1D-829C-7C47FD9E73D5}"/>
               </a:ext>
             </a:extLst>
           </p:cNvPr>
@@ -3740,7 +3740,7 @@
           <p:cNvPr id="4" name="Freeform 4">
             <a:extLst xmlns:a="http://schemas.openxmlformats.org/drawingml/2006/main">
               <a:ext uri="{FF2B5EF4-FFF2-40B4-BE49-F238E27FC236}">
-                <a16:creationId xmlns:a16="http://schemas.microsoft.com/office/drawing/2014/main" id="{18F094D9-90F9-43CB-BFE2-7AC062D52410}"/>
+                <a16:creationId xmlns:a16="http://schemas.microsoft.com/office/drawing/2014/main" id="{5359E73F-62DA-4EAE-9372-DC872B561429}"/>
               </a:ext>
             </a:extLst>
           </p:cNvPr>
@@ -3786,7 +3786,7 @@
           <p:cNvPr id="5" name="Ellipse 5">
             <a:extLst xmlns:a="http://schemas.openxmlformats.org/drawingml/2006/main">
               <a:ext uri="{FF2B5EF4-FFF2-40B4-BE49-F238E27FC236}">
-                <a16:creationId xmlns:a16="http://schemas.microsoft.com/office/drawing/2014/main" id="{0247FAD3-B10B-4EF4-A2C4-559F4F80CEDF}"/>
+                <a16:creationId xmlns:a16="http://schemas.microsoft.com/office/drawing/2014/main" id="{37B8343C-5C61-4E32-9C2F-24C3C038AAAB}"/>
               </a:ext>
             </a:extLst>
           </p:cNvPr>
@@ -3818,7 +3818,7 @@
           <p:cNvPr id="6" name="TextBox 6">
             <a:extLst xmlns:a="http://schemas.openxmlformats.org/drawingml/2006/main">
               <a:ext uri="{FF2B5EF4-FFF2-40B4-BE49-F238E27FC236}">
-                <a16:creationId xmlns:a16="http://schemas.microsoft.com/office/drawing/2014/main" id="{B5F10C43-F64D-4843-B01E-54AFC40F646E}"/>
+                <a16:creationId xmlns:a16="http://schemas.microsoft.com/office/drawing/2014/main" id="{8D0E95C8-4BA3-4ECA-A329-84C7F19677F4}"/>
               </a:ext>
             </a:extLst>
           </p:cNvPr>
@@ -3868,7 +3868,7 @@
           <p:cNvPr id="7" name="TextBox 7">
             <a:extLst xmlns:a="http://schemas.openxmlformats.org/drawingml/2006/main">
               <a:ext uri="{FF2B5EF4-FFF2-40B4-BE49-F238E27FC236}">
-                <a16:creationId xmlns:a16="http://schemas.microsoft.com/office/drawing/2014/main" id="{43779C09-A254-43A7-ACF4-572C8A2BB4D3}"/>
+                <a16:creationId xmlns:a16="http://schemas.microsoft.com/office/drawing/2014/main" id="{831B5529-C40C-4D76-BD28-E241D23DB8FC}"/>
               </a:ext>
             </a:extLst>
           </p:cNvPr>
@@ -3918,7 +3918,7 @@
           <p:cNvPr id="8" name="TextBox 8">
             <a:extLst xmlns:a="http://schemas.openxmlformats.org/drawingml/2006/main">
               <a:ext uri="{FF2B5EF4-FFF2-40B4-BE49-F238E27FC236}">
-                <a16:creationId xmlns:a16="http://schemas.microsoft.com/office/drawing/2014/main" id="{4E1763F2-6F0B-4027-817A-64E9E7766C7C}"/>
+                <a16:creationId xmlns:a16="http://schemas.microsoft.com/office/drawing/2014/main" id="{03279AA2-339B-4E46-8615-CB33CCB1E56C}"/>
               </a:ext>
             </a:extLst>
           </p:cNvPr>
@@ -3968,7 +3968,7 @@
           <p:cNvPr id="9" name="Freeform 9">
             <a:extLst xmlns:a="http://schemas.openxmlformats.org/drawingml/2006/main">
               <a:ext uri="{FF2B5EF4-FFF2-40B4-BE49-F238E27FC236}">
-                <a16:creationId xmlns:a16="http://schemas.microsoft.com/office/drawing/2014/main" id="{661D724D-69D1-4C96-ACA5-CE230FDFE4DF}"/>
+                <a16:creationId xmlns:a16="http://schemas.microsoft.com/office/drawing/2014/main" id="{8D937B86-9491-48F4-8284-9894BC0824F5}"/>
               </a:ext>
             </a:extLst>
           </p:cNvPr>
@@ -4014,7 +4014,7 @@
           <p:cNvPr id="10" name="Freeform 10">
             <a:extLst xmlns:a="http://schemas.openxmlformats.org/drawingml/2006/main">
               <a:ext uri="{FF2B5EF4-FFF2-40B4-BE49-F238E27FC236}">
-                <a16:creationId xmlns:a16="http://schemas.microsoft.com/office/drawing/2014/main" id="{F4015017-961B-4B75-B255-987E25B9ACAE}"/>
+                <a16:creationId xmlns:a16="http://schemas.microsoft.com/office/drawing/2014/main" id="{E3FE784B-AB2D-4047-B28A-03711F7128F6}"/>
               </a:ext>
             </a:extLst>
           </p:cNvPr>
@@ -4073,7 +4073,7 @@
           <p:cNvPr id="11" name="TextBox 11">
             <a:extLst xmlns:a="http://schemas.openxmlformats.org/drawingml/2006/main">
               <a:ext uri="{FF2B5EF4-FFF2-40B4-BE49-F238E27FC236}">
-                <a16:creationId xmlns:a16="http://schemas.microsoft.com/office/drawing/2014/main" id="{2C793BE9-0209-4BDB-83E3-9929362FBDE0}"/>
+                <a16:creationId xmlns:a16="http://schemas.microsoft.com/office/drawing/2014/main" id="{1E63ACE8-9426-4030-8DE2-AC6F5A218154}"/>
               </a:ext>
             </a:extLst>
           </p:cNvPr>
@@ -4123,7 +4123,7 @@
           <p:cNvPr id="12" name="TextBox 12">
             <a:extLst xmlns:a="http://schemas.openxmlformats.org/drawingml/2006/main">
               <a:ext uri="{FF2B5EF4-FFF2-40B4-BE49-F238E27FC236}">
-                <a16:creationId xmlns:a16="http://schemas.microsoft.com/office/drawing/2014/main" id="{B60C3188-2E7B-461F-8C87-7C7BC354CFAC}"/>
+                <a16:creationId xmlns:a16="http://schemas.microsoft.com/office/drawing/2014/main" id="{F6FE1C62-035A-46A0-BF70-5AC8FC570F02}"/>
               </a:ext>
             </a:extLst>
           </p:cNvPr>
@@ -4173,7 +4173,7 @@
           <p:cNvPr id="13" name="TextBox 13">
             <a:extLst xmlns:a="http://schemas.openxmlformats.org/drawingml/2006/main">
               <a:ext uri="{FF2B5EF4-FFF2-40B4-BE49-F238E27FC236}">
-                <a16:creationId xmlns:a16="http://schemas.microsoft.com/office/drawing/2014/main" id="{B4B86F62-30BB-486B-82F0-E7BD9075A4FB}"/>
+                <a16:creationId xmlns:a16="http://schemas.microsoft.com/office/drawing/2014/main" id="{9FEE772C-B604-44FA-89D4-47A584046C3C}"/>
               </a:ext>
             </a:extLst>
           </p:cNvPr>
@@ -4223,7 +4223,7 @@
           <p:cNvPr id="14" name="Freeform 14">
             <a:extLst xmlns:a="http://schemas.openxmlformats.org/drawingml/2006/main">
               <a:ext uri="{FF2B5EF4-FFF2-40B4-BE49-F238E27FC236}">
-                <a16:creationId xmlns:a16="http://schemas.microsoft.com/office/drawing/2014/main" id="{ACE654E7-A95E-493C-A073-7EF5CA481B4D}"/>
+                <a16:creationId xmlns:a16="http://schemas.microsoft.com/office/drawing/2014/main" id="{00A0E44C-89C0-4311-832A-A905D84CEE4D}"/>
               </a:ext>
             </a:extLst>
           </p:cNvPr>
@@ -4269,7 +4269,7 @@
           <p:cNvPr id="15" name="Freeform 15">
             <a:extLst xmlns:a="http://schemas.openxmlformats.org/drawingml/2006/main">
               <a:ext uri="{FF2B5EF4-FFF2-40B4-BE49-F238E27FC236}">
-                <a16:creationId xmlns:a16="http://schemas.microsoft.com/office/drawing/2014/main" id="{D74AB44D-FB38-4AF7-811A-2BD03BDDD52F}"/>
+                <a16:creationId xmlns:a16="http://schemas.microsoft.com/office/drawing/2014/main" id="{716E2FD9-E040-4896-AF61-04D19CF3CA3F}"/>
               </a:ext>
             </a:extLst>
           </p:cNvPr>
@@ -4318,7 +4318,7 @@
           <p:cNvPr id="16" name="Freeform 16">
             <a:extLst xmlns:a="http://schemas.openxmlformats.org/drawingml/2006/main">
               <a:ext uri="{FF2B5EF4-FFF2-40B4-BE49-F238E27FC236}">
-                <a16:creationId xmlns:a16="http://schemas.microsoft.com/office/drawing/2014/main" id="{3523F146-3DEB-4C6C-9172-F1FC0FA59DA6}"/>
+                <a16:creationId xmlns:a16="http://schemas.microsoft.com/office/drawing/2014/main" id="{A029DB3F-FBFB-4683-A2FE-F5A7D295523A}"/>
               </a:ext>
             </a:extLst>
           </p:cNvPr>
@@ -4363,7 +4363,7 @@
           <p:cNvPr id="17" name="TextBox 17">
             <a:extLst xmlns:a="http://schemas.openxmlformats.org/drawingml/2006/main">
               <a:ext uri="{FF2B5EF4-FFF2-40B4-BE49-F238E27FC236}">
-                <a16:creationId xmlns:a16="http://schemas.microsoft.com/office/drawing/2014/main" id="{4279D86D-8B00-4FDE-A5C1-8EF15C0A08F5}"/>
+                <a16:creationId xmlns:a16="http://schemas.microsoft.com/office/drawing/2014/main" id="{EA5BF888-AB56-4ADF-839C-2A9883E9CF18}"/>
               </a:ext>
             </a:extLst>
           </p:cNvPr>
@@ -4413,7 +4413,7 @@
           <p:cNvPr id="18" name="TextBox 18">
             <a:extLst xmlns:a="http://schemas.openxmlformats.org/drawingml/2006/main">
               <a:ext uri="{FF2B5EF4-FFF2-40B4-BE49-F238E27FC236}">
-                <a16:creationId xmlns:a16="http://schemas.microsoft.com/office/drawing/2014/main" id="{65C97D4B-01F5-4A2F-A95A-A3D3ECFCD064}"/>
+                <a16:creationId xmlns:a16="http://schemas.microsoft.com/office/drawing/2014/main" id="{A5AFB951-DBDB-4B1F-BA5A-723214D5F439}"/>
               </a:ext>
             </a:extLst>
           </p:cNvPr>
@@ -4463,7 +4463,7 @@
           <p:cNvPr id="19" name="TextBox 19">
             <a:extLst xmlns:a="http://schemas.openxmlformats.org/drawingml/2006/main">
               <a:ext uri="{FF2B5EF4-FFF2-40B4-BE49-F238E27FC236}">
-                <a16:creationId xmlns:a16="http://schemas.microsoft.com/office/drawing/2014/main" id="{02A323AA-5AB2-4448-9D4D-EB65CCA0714D}"/>
+                <a16:creationId xmlns:a16="http://schemas.microsoft.com/office/drawing/2014/main" id="{86087B6E-3AD3-4837-904D-5983A3421B10}"/>
               </a:ext>
             </a:extLst>
           </p:cNvPr>
@@ -4513,7 +4513,7 @@
           <p:cNvPr id="21" name="Line 21">
             <a:extLst xmlns:a="http://schemas.openxmlformats.org/drawingml/2006/main">
               <a:ext uri="{FF2B5EF4-FFF2-40B4-BE49-F238E27FC236}">
-                <a16:creationId xmlns:a16="http://schemas.microsoft.com/office/drawing/2014/main" id="{395C0D21-7E63-4E1F-95F9-6F4C7506892F}"/>
+                <a16:creationId xmlns:a16="http://schemas.microsoft.com/office/drawing/2014/main" id="{9FB94BEC-B23A-4785-96F4-E3C89A5E81F5}"/>
               </a:ext>
             </a:extLst>
           </p:cNvPr>
@@ -4553,7 +4553,7 @@
           <p:cNvPr id="22" name="Freeform 22">
             <a:extLst xmlns:a="http://schemas.openxmlformats.org/drawingml/2006/main">
               <a:ext uri="{FF2B5EF4-FFF2-40B4-BE49-F238E27FC236}">
-                <a16:creationId xmlns:a16="http://schemas.microsoft.com/office/drawing/2014/main" id="{C7F54E98-A853-4DE5-823E-D976875E2B41}"/>
+                <a16:creationId xmlns:a16="http://schemas.microsoft.com/office/drawing/2014/main" id="{421EAD5F-A453-4CF3-8570-5C749C14F97C}"/>
               </a:ext>
             </a:extLst>
           </p:cNvPr>
@@ -4593,7 +4593,7 @@
           <p:cNvPr id="23" name="Freeform 23">
             <a:extLst xmlns:a="http://schemas.openxmlformats.org/drawingml/2006/main">
               <a:ext uri="{FF2B5EF4-FFF2-40B4-BE49-F238E27FC236}">
-                <a16:creationId xmlns:a16="http://schemas.microsoft.com/office/drawing/2014/main" id="{52EB3F6C-92F1-452E-8B36-96F834E78391}"/>
+                <a16:creationId xmlns:a16="http://schemas.microsoft.com/office/drawing/2014/main" id="{51A127CA-EE88-4638-A1E9-032FA930C507}"/>
               </a:ext>
             </a:extLst>
           </p:cNvPr>
@@ -4669,7 +4669,7 @@
           <p:cNvPr id="24" name="Freeform 24">
             <a:extLst xmlns:a="http://schemas.openxmlformats.org/drawingml/2006/main">
               <a:ext uri="{FF2B5EF4-FFF2-40B4-BE49-F238E27FC236}">
-                <a16:creationId xmlns:a16="http://schemas.microsoft.com/office/drawing/2014/main" id="{6536D05B-5F50-4FEC-80A4-F36D4E232AF3}"/>
+                <a16:creationId xmlns:a16="http://schemas.microsoft.com/office/drawing/2014/main" id="{A95F2326-3271-46D1-B7E4-84EAA258A7BD}"/>
               </a:ext>
             </a:extLst>
           </p:cNvPr>
@@ -4709,7 +4709,7 @@
           <p:cNvPr id="26" name="TextBox 26">
             <a:extLst xmlns:a="http://schemas.openxmlformats.org/drawingml/2006/main">
               <a:ext uri="{FF2B5EF4-FFF2-40B4-BE49-F238E27FC236}">
-                <a16:creationId xmlns:a16="http://schemas.microsoft.com/office/drawing/2014/main" id="{4FBFD856-D4F5-4A3D-A6F9-E5DE3EAB46FE}"/>
+                <a16:creationId xmlns:a16="http://schemas.microsoft.com/office/drawing/2014/main" id="{0390BC06-7671-4DF1-9B51-8F38AE137C1F}"/>
               </a:ext>
             </a:extLst>
           </p:cNvPr>
@@ -4759,7 +4759,7 @@
           <p:cNvPr id="27" name="TextBox 27">
             <a:extLst xmlns:a="http://schemas.openxmlformats.org/drawingml/2006/main">
               <a:ext uri="{FF2B5EF4-FFF2-40B4-BE49-F238E27FC236}">
-                <a16:creationId xmlns:a16="http://schemas.microsoft.com/office/drawing/2014/main" id="{13BDB0C9-DF3E-4EE5-9CD8-C69CC8C31FA5}"/>
+                <a16:creationId xmlns:a16="http://schemas.microsoft.com/office/drawing/2014/main" id="{B87FA4DA-EEAC-4D53-8443-19BC64D8FEBB}"/>
               </a:ext>
             </a:extLst>
           </p:cNvPr>
@@ -4809,7 +4809,7 @@
           <p:cNvPr id="29" name="TextBox 29">
             <a:extLst xmlns:a="http://schemas.openxmlformats.org/drawingml/2006/main">
               <a:ext uri="{FF2B5EF4-FFF2-40B4-BE49-F238E27FC236}">
-                <a16:creationId xmlns:a16="http://schemas.microsoft.com/office/drawing/2014/main" id="{BC2642D3-00F9-4571-8ECF-F3AF1D4636B8}"/>
+                <a16:creationId xmlns:a16="http://schemas.microsoft.com/office/drawing/2014/main" id="{0D4E4C56-969B-42B8-A98F-428A3711866B}"/>
               </a:ext>
             </a:extLst>
           </p:cNvPr>
@@ -4857,7 +4857,7 @@
     </p:spTree>
     <p:extLst>
       <p:ext uri="{BB962C8B-B14F-4D97-AF65-F5344CB8AC3E}">
-        <p14:creationId xmlns:p14="http://schemas.microsoft.com/office/powerpoint/2010/main" val="1195083188"/>
+        <p14:creationId xmlns:p14="http://schemas.microsoft.com/office/powerpoint/2010/main" val="2039102525"/>
       </p:ext>
     </p:extLst>
   </p:cSld>
@@ -4888,7 +4888,7 @@
           <p:cNvPr id="2" name="TextBox 2">
             <a:extLst xmlns:a="http://schemas.openxmlformats.org/drawingml/2006/main">
               <a:ext uri="{FF2B5EF4-FFF2-40B4-BE49-F238E27FC236}">
-                <a16:creationId xmlns:a16="http://schemas.microsoft.com/office/drawing/2014/main" id="{2DC96DCE-DD35-49CA-B013-63081E25C102}"/>
+                <a16:creationId xmlns:a16="http://schemas.microsoft.com/office/drawing/2014/main" id="{7E1AD788-3638-4F95-97FA-DC464EDE0BD2}"/>
               </a:ext>
             </a:extLst>
           </p:cNvPr>
@@ -4938,7 +4938,7 @@
           <p:cNvPr id="3" name="TextBox 3">
             <a:extLst xmlns:a="http://schemas.openxmlformats.org/drawingml/2006/main">
               <a:ext uri="{FF2B5EF4-FFF2-40B4-BE49-F238E27FC236}">
-                <a16:creationId xmlns:a16="http://schemas.microsoft.com/office/drawing/2014/main" id="{338BB6CB-1CFB-4231-940A-B20079E1A65C}"/>
+                <a16:creationId xmlns:a16="http://schemas.microsoft.com/office/drawing/2014/main" id="{B1666FAB-70B9-49A0-B9CD-E9330CE6B510}"/>
               </a:ext>
             </a:extLst>
           </p:cNvPr>
@@ -4988,7 +4988,7 @@
           <p:cNvPr id="4" name="Freeform 4">
             <a:extLst xmlns:a="http://schemas.openxmlformats.org/drawingml/2006/main">
               <a:ext uri="{FF2B5EF4-FFF2-40B4-BE49-F238E27FC236}">
-                <a16:creationId xmlns:a16="http://schemas.microsoft.com/office/drawing/2014/main" id="{870A83F1-0849-43AA-974D-3BBA225C1368}"/>
+                <a16:creationId xmlns:a16="http://schemas.microsoft.com/office/drawing/2014/main" id="{74384D29-AA85-405D-A2C1-43500807ADDB}"/>
               </a:ext>
             </a:extLst>
           </p:cNvPr>
@@ -5034,7 +5034,7 @@
           <p:cNvPr id="5" name="TextBox 5">
             <a:extLst xmlns:a="http://schemas.openxmlformats.org/drawingml/2006/main">
               <a:ext uri="{FF2B5EF4-FFF2-40B4-BE49-F238E27FC236}">
-                <a16:creationId xmlns:a16="http://schemas.microsoft.com/office/drawing/2014/main" id="{6488B9B7-D347-4919-8249-B63C6022BD55}"/>
+                <a16:creationId xmlns:a16="http://schemas.microsoft.com/office/drawing/2014/main" id="{347631C7-136A-4868-A248-4AD8DA787968}"/>
               </a:ext>
             </a:extLst>
           </p:cNvPr>
@@ -5084,7 +5084,7 @@
           <p:cNvPr id="6" name="Freeform 6">
             <a:extLst xmlns:a="http://schemas.openxmlformats.org/drawingml/2006/main">
               <a:ext uri="{FF2B5EF4-FFF2-40B4-BE49-F238E27FC236}">
-                <a16:creationId xmlns:a16="http://schemas.microsoft.com/office/drawing/2014/main" id="{44A00C5C-6AE7-4285-BE0A-80884465BCEF}"/>
+                <a16:creationId xmlns:a16="http://schemas.microsoft.com/office/drawing/2014/main" id="{BBDE1487-5C3D-4517-B3D9-7F61B8CCBE57}"/>
               </a:ext>
             </a:extLst>
           </p:cNvPr>
@@ -5124,7 +5124,7 @@
           <p:cNvPr id="7" name="TextBox 7">
             <a:extLst xmlns:a="http://schemas.openxmlformats.org/drawingml/2006/main">
               <a:ext uri="{FF2B5EF4-FFF2-40B4-BE49-F238E27FC236}">
-                <a16:creationId xmlns:a16="http://schemas.microsoft.com/office/drawing/2014/main" id="{0F737DF4-E026-4A95-BE5C-938F36D306BC}"/>
+                <a16:creationId xmlns:a16="http://schemas.microsoft.com/office/drawing/2014/main" id="{2E7C4431-9A55-49D6-BA57-8CB2BA1F63DC}"/>
               </a:ext>
             </a:extLst>
           </p:cNvPr>
@@ -5174,7 +5174,7 @@
           <p:cNvPr id="8" name="Freeform 8">
             <a:extLst xmlns:a="http://schemas.openxmlformats.org/drawingml/2006/main">
               <a:ext uri="{FF2B5EF4-FFF2-40B4-BE49-F238E27FC236}">
-                <a16:creationId xmlns:a16="http://schemas.microsoft.com/office/drawing/2014/main" id="{4E5A1664-4621-4559-ADC4-D5E2096666FF}"/>
+                <a16:creationId xmlns:a16="http://schemas.microsoft.com/office/drawing/2014/main" id="{E031A9F3-94BB-46EE-B6D8-BBD613A50F0A}"/>
               </a:ext>
             </a:extLst>
           </p:cNvPr>
@@ -5214,7 +5214,7 @@
           <p:cNvPr id="9" name="TextBox 9">
             <a:extLst xmlns:a="http://schemas.openxmlformats.org/drawingml/2006/main">
               <a:ext uri="{FF2B5EF4-FFF2-40B4-BE49-F238E27FC236}">
-                <a16:creationId xmlns:a16="http://schemas.microsoft.com/office/drawing/2014/main" id="{CF9245A4-B719-4D6C-B815-F970F65781C0}"/>
+                <a16:creationId xmlns:a16="http://schemas.microsoft.com/office/drawing/2014/main" id="{6D4FD7D6-ED4C-4E5A-A910-20BEC1BC8D6C}"/>
               </a:ext>
             </a:extLst>
           </p:cNvPr>
@@ -5264,7 +5264,7 @@
           <p:cNvPr id="10" name="Freeform 10">
             <a:extLst xmlns:a="http://schemas.openxmlformats.org/drawingml/2006/main">
               <a:ext uri="{FF2B5EF4-FFF2-40B4-BE49-F238E27FC236}">
-                <a16:creationId xmlns:a16="http://schemas.microsoft.com/office/drawing/2014/main" id="{EB570D59-7C59-48BA-91CA-2B19384F8CF6}"/>
+                <a16:creationId xmlns:a16="http://schemas.microsoft.com/office/drawing/2014/main" id="{850B1FB3-9BAB-41D4-877D-56358F82391F}"/>
               </a:ext>
             </a:extLst>
           </p:cNvPr>
@@ -5304,7 +5304,7 @@
           <p:cNvPr id="12" name="Ellipse 12">
             <a:extLst xmlns:a="http://schemas.openxmlformats.org/drawingml/2006/main">
               <a:ext uri="{FF2B5EF4-FFF2-40B4-BE49-F238E27FC236}">
-                <a16:creationId xmlns:a16="http://schemas.microsoft.com/office/drawing/2014/main" id="{AB176CB3-DB17-4BC9-9463-A96FB8E59FCA}"/>
+                <a16:creationId xmlns:a16="http://schemas.microsoft.com/office/drawing/2014/main" id="{9D3B3B6E-D1F1-442B-9EF7-BA46A86A5BD6}"/>
               </a:ext>
             </a:extLst>
           </p:cNvPr>
@@ -5336,7 +5336,7 @@
           <p:cNvPr id="13" name="Ellipse 13">
             <a:extLst xmlns:a="http://schemas.openxmlformats.org/drawingml/2006/main">
               <a:ext uri="{FF2B5EF4-FFF2-40B4-BE49-F238E27FC236}">
-                <a16:creationId xmlns:a16="http://schemas.microsoft.com/office/drawing/2014/main" id="{1BF274E0-B475-447A-94F5-781A1DF17C19}"/>
+                <a16:creationId xmlns:a16="http://schemas.microsoft.com/office/drawing/2014/main" id="{858C506C-4F2B-4559-B532-B75D175CF4EA}"/>
               </a:ext>
             </a:extLst>
           </p:cNvPr>
@@ -5366,7 +5366,7 @@
           <p:cNvPr id="14" name="TextBox 14">
             <a:extLst xmlns:a="http://schemas.openxmlformats.org/drawingml/2006/main">
               <a:ext uri="{FF2B5EF4-FFF2-40B4-BE49-F238E27FC236}">
-                <a16:creationId xmlns:a16="http://schemas.microsoft.com/office/drawing/2014/main" id="{67C27E83-9AB6-43FA-8D31-6E401F4B8012}"/>
+                <a16:creationId xmlns:a16="http://schemas.microsoft.com/office/drawing/2014/main" id="{88BE6035-F5F6-42AD-8F37-2C23D63E5C15}"/>
               </a:ext>
             </a:extLst>
           </p:cNvPr>
@@ -5416,7 +5416,7 @@
           <p:cNvPr id="15" name="TextBox 15">
             <a:extLst xmlns:a="http://schemas.openxmlformats.org/drawingml/2006/main">
               <a:ext uri="{FF2B5EF4-FFF2-40B4-BE49-F238E27FC236}">
-                <a16:creationId xmlns:a16="http://schemas.microsoft.com/office/drawing/2014/main" id="{8C4753A0-A978-4A51-966C-AD855C8E846F}"/>
+                <a16:creationId xmlns:a16="http://schemas.microsoft.com/office/drawing/2014/main" id="{82F9FA97-517F-4189-9964-8CFBDACE670F}"/>
               </a:ext>
             </a:extLst>
           </p:cNvPr>
@@ -5466,7 +5466,7 @@
           <p:cNvPr id="16" name="TextBox 16">
             <a:extLst xmlns:a="http://schemas.openxmlformats.org/drawingml/2006/main">
               <a:ext uri="{FF2B5EF4-FFF2-40B4-BE49-F238E27FC236}">
-                <a16:creationId xmlns:a16="http://schemas.microsoft.com/office/drawing/2014/main" id="{B8258711-1A37-486F-AD70-8B5223D19C5A}"/>
+                <a16:creationId xmlns:a16="http://schemas.microsoft.com/office/drawing/2014/main" id="{B31614B3-8A40-4C9C-8134-476D591783F1}"/>
               </a:ext>
             </a:extLst>
           </p:cNvPr>
@@ -5516,7 +5516,7 @@
           <p:cNvPr id="17" name="TextBox 17">
             <a:extLst xmlns:a="http://schemas.openxmlformats.org/drawingml/2006/main">
               <a:ext uri="{FF2B5EF4-FFF2-40B4-BE49-F238E27FC236}">
-                <a16:creationId xmlns:a16="http://schemas.microsoft.com/office/drawing/2014/main" id="{6A20D636-D846-4A2A-87AB-A4DD90240177}"/>
+                <a16:creationId xmlns:a16="http://schemas.microsoft.com/office/drawing/2014/main" id="{D9E39330-3B12-42C5-A37F-F21D0EAB288D}"/>
               </a:ext>
             </a:extLst>
           </p:cNvPr>
@@ -5566,7 +5566,7 @@
           <p:cNvPr id="18" name="Freeform 18">
             <a:extLst xmlns:a="http://schemas.openxmlformats.org/drawingml/2006/main">
               <a:ext uri="{FF2B5EF4-FFF2-40B4-BE49-F238E27FC236}">
-                <a16:creationId xmlns:a16="http://schemas.microsoft.com/office/drawing/2014/main" id="{8CFFC690-6AAA-4CD2-8E95-76BB9139A21B}"/>
+                <a16:creationId xmlns:a16="http://schemas.microsoft.com/office/drawing/2014/main" id="{E7EEBAF3-65A1-4410-BF72-9EF4F6C49180}"/>
               </a:ext>
             </a:extLst>
           </p:cNvPr>
@@ -5609,7 +5609,7 @@
           <p:cNvPr id="19" name="Freeform 19">
             <a:extLst xmlns:a="http://schemas.openxmlformats.org/drawingml/2006/main">
               <a:ext uri="{FF2B5EF4-FFF2-40B4-BE49-F238E27FC236}">
-                <a16:creationId xmlns:a16="http://schemas.microsoft.com/office/drawing/2014/main" id="{5422EE61-1555-49D1-886F-BC530CA1E222}"/>
+                <a16:creationId xmlns:a16="http://schemas.microsoft.com/office/drawing/2014/main" id="{CAD5090F-4C97-4D03-95CC-DE4F578B8EB4}"/>
               </a:ext>
             </a:extLst>
           </p:cNvPr>
@@ -5652,7 +5652,7 @@
           <p:cNvPr id="21" name="Freeform 21">
             <a:extLst xmlns:a="http://schemas.openxmlformats.org/drawingml/2006/main">
               <a:ext uri="{FF2B5EF4-FFF2-40B4-BE49-F238E27FC236}">
-                <a16:creationId xmlns:a16="http://schemas.microsoft.com/office/drawing/2014/main" id="{E0A606C7-8186-4C54-9FB9-D36188D31D96}"/>
+                <a16:creationId xmlns:a16="http://schemas.microsoft.com/office/drawing/2014/main" id="{187E0C10-C286-4C94-BA25-34C9781DEB68}"/>
               </a:ext>
             </a:extLst>
           </p:cNvPr>
@@ -5698,7 +5698,7 @@
           <p:cNvPr id="22" name="TextBox 22">
             <a:extLst xmlns:a="http://schemas.openxmlformats.org/drawingml/2006/main">
               <a:ext uri="{FF2B5EF4-FFF2-40B4-BE49-F238E27FC236}">
-                <a16:creationId xmlns:a16="http://schemas.microsoft.com/office/drawing/2014/main" id="{4042E8E4-C5BE-46DE-9F83-4EA528CD01F1}"/>
+                <a16:creationId xmlns:a16="http://schemas.microsoft.com/office/drawing/2014/main" id="{934F93C1-AE0A-4D23-B5CD-99ED356E88FB}"/>
               </a:ext>
             </a:extLst>
           </p:cNvPr>
@@ -5748,19 +5748,19 @@
           <p:cNvPr id="23" name="TextBox 23">
             <a:extLst xmlns:a="http://schemas.openxmlformats.org/drawingml/2006/main">
               <a:ext uri="{FF2B5EF4-FFF2-40B4-BE49-F238E27FC236}">
-                <a16:creationId xmlns:a16="http://schemas.microsoft.com/office/drawing/2014/main" id="{1559C4F0-30FD-438E-8D88-EA9CC50A00CF}"/>
-              </a:ext>
-            </a:extLst>
-          </p:cNvPr>
-          <p:cNvSpPr>
-            <a:spLocks xmlns:a="http://schemas.openxmlformats.org/drawingml/2006/main" noGrp="1"/>
-          </p:cNvSpPr>
-          <p:nvPr/>
-        </p:nvSpPr>
-        <p:spPr>
-          <a:xfrm xmlns:a="http://schemas.openxmlformats.org/drawingml/2006/main" rot="0" flipH="0" flipV="0">
-            <a:off x="8241792" y="5321618"/>
-            <a:ext cx="2012823" cy="264033"/>
+                <a16:creationId xmlns:a16="http://schemas.microsoft.com/office/drawing/2014/main" id="{08F5EE5B-FDC7-4349-A406-808B076780D7}"/>
+              </a:ext>
+            </a:extLst>
+          </p:cNvPr>
+          <p:cNvSpPr>
+            <a:spLocks xmlns:a="http://schemas.openxmlformats.org/drawingml/2006/main" noGrp="1"/>
+          </p:cNvSpPr>
+          <p:nvPr/>
+        </p:nvSpPr>
+        <p:spPr>
+          <a:xfrm xmlns:a="http://schemas.openxmlformats.org/drawingml/2006/main" rot="0" flipH="0" flipV="0">
+            <a:off x="8243316" y="5354002"/>
+            <a:ext cx="2194541" cy="205359"/>
           </a:xfrm>
           <a:prstGeom xmlns:a="http://schemas.openxmlformats.org/drawingml/2006/main" prst="rect">
             <a:avLst/>
@@ -5780,7 +5780,7 @@
               <a:buNone/>
             </a:pPr>
             <a:r>
-              <a:rPr sz="1350">
+              <a:rPr sz="1050">
                 <a:solidFill>
                   <a:srgbClr val="5B7388"/>
                 </a:solidFill>
@@ -5788,17 +5788,75 @@
                 <a:ea typeface="+mn-lt"/>
                 <a:cs typeface="+mn-lt"/>
               </a:rPr>
-              <a:t>上线后写入链接与二维码</a:t>
+              <a:t>youjie-goai-2026.streamlit.app</a:t>
             </a:r>
           </a:p>
         </p:txBody>
       </p:sp>
       <p:sp>
         <p:nvSpPr>
-          <p:cNvPr id="24" name="Freeform 24">
-            <a:extLst xmlns:a="http://schemas.openxmlformats.org/drawingml/2006/main">
-              <a:ext uri="{FF2B5EF4-FFF2-40B4-BE49-F238E27FC236}">
-                <a16:creationId xmlns:a16="http://schemas.microsoft.com/office/drawing/2014/main" id="{47F15B4C-288B-4DDB-965F-0F461D8688AF}"/>
+          <p:cNvPr id="24" name="Rectangle 24">
+            <a:extLst xmlns:a="http://schemas.openxmlformats.org/drawingml/2006/main">
+              <a:ext uri="{FF2B5EF4-FFF2-40B4-BE49-F238E27FC236}">
+                <a16:creationId xmlns:a16="http://schemas.microsoft.com/office/drawing/2014/main" id="{74C6D5B8-E6A0-4B15-A1EA-467F611C0EF6}"/>
+              </a:ext>
+            </a:extLst>
+          </p:cNvPr>
+          <p:cNvSpPr>
+            <a:spLocks xmlns:a="http://schemas.openxmlformats.org/drawingml/2006/main" noGrp="1"/>
+          </p:cNvSpPr>
+          <p:nvPr/>
+        </p:nvSpPr>
+        <p:spPr>
+          <a:xfrm xmlns:a="http://schemas.openxmlformats.org/drawingml/2006/main" rot="0" flipH="0" flipV="0">
+            <a:off x="10382250" y="5048250"/>
+            <a:ext cx="1066800" cy="1066800"/>
+          </a:xfrm>
+          <a:prstGeom xmlns:a="http://schemas.openxmlformats.org/drawingml/2006/main" prst="roundRect">
+            <a:avLst>
+              <a:gd name="adj" fmla="val 8929"/>
+            </a:avLst>
+          </a:prstGeom>
+          <a:solidFill xmlns:a="http://schemas.openxmlformats.org/drawingml/2006/main">
+            <a:srgbClr val="FFFFFF"/>
+          </a:solidFill>
+          <a:ln xmlns:a="http://schemas.openxmlformats.org/drawingml/2006/main" w="19050">
+            <a:solidFill>
+              <a:schemeClr val="accent5"/>
+            </a:solidFill>
+          </a:ln>
+        </p:spPr>
+      </p:sp>
+      <p:pic>
+        <p:nvPicPr>
+          <p:cNvPr id="58" name="Image 25"/>
+          <p:cNvPicPr>
+            <a:picLocks xmlns:a="http://schemas.openxmlformats.org/drawingml/2006/main" noChangeAspect="1"/>
+          </p:cNvPicPr>
+          <p:nvPr/>
+        </p:nvPicPr>
+        <p:blipFill>
+          <a:blip xmlns:r="http://schemas.openxmlformats.org/officeDocument/2006/relationships" xmlns:a="http://schemas.openxmlformats.org/drawingml/2006/main" r:embed="R4e12f5ab99bf48e1"/>
+          <a:stretch xmlns:a="http://schemas.openxmlformats.org/drawingml/2006/main">
+            <a:fillRect l="0" t="0" r="0" b="0"/>
+          </a:stretch>
+        </p:blipFill>
+        <p:spPr>
+          <a:xfrm xmlns:a="http://schemas.openxmlformats.org/drawingml/2006/main" rot="0" flipH="0" flipV="0">
+            <a:off x="10458450" y="5124450"/>
+            <a:ext cx="914400" cy="914400"/>
+          </a:xfrm>
+          <a:prstGeom xmlns:a="http://schemas.openxmlformats.org/drawingml/2006/main" prst="rect">
+            <a:avLst/>
+          </a:prstGeom>
+        </p:spPr>
+      </p:pic>
+      <p:sp>
+        <p:nvSpPr>
+          <p:cNvPr id="26" name="Freeform 26">
+            <a:extLst xmlns:a="http://schemas.openxmlformats.org/drawingml/2006/main">
+              <a:ext uri="{FF2B5EF4-FFF2-40B4-BE49-F238E27FC236}">
+                <a16:creationId xmlns:a16="http://schemas.microsoft.com/office/drawing/2014/main" id="{7B28CF2F-6B2D-4047-9789-C52EBE6FE916}"/>
               </a:ext>
             </a:extLst>
           </p:cNvPr>
@@ -5843,10 +5901,10 @@
       </p:sp>
       <p:sp>
         <p:nvSpPr>
-          <p:cNvPr id="25" name="Freeform 25">
-            <a:extLst xmlns:a="http://schemas.openxmlformats.org/drawingml/2006/main">
-              <a:ext uri="{FF2B5EF4-FFF2-40B4-BE49-F238E27FC236}">
-                <a16:creationId xmlns:a16="http://schemas.microsoft.com/office/drawing/2014/main" id="{B5415B7C-A8B9-4B90-B748-314F9094AFDB}"/>
+          <p:cNvPr id="27" name="Freeform 27">
+            <a:extLst xmlns:a="http://schemas.openxmlformats.org/drawingml/2006/main">
+              <a:ext uri="{FF2B5EF4-FFF2-40B4-BE49-F238E27FC236}">
+                <a16:creationId xmlns:a16="http://schemas.microsoft.com/office/drawing/2014/main" id="{F5741550-7A37-43CC-B2F5-559276A4F19D}"/>
               </a:ext>
             </a:extLst>
           </p:cNvPr>
@@ -5910,10 +5968,10 @@
       </p:sp>
       <p:sp>
         <p:nvSpPr>
-          <p:cNvPr id="26" name="Freeform 26">
-            <a:extLst xmlns:a="http://schemas.openxmlformats.org/drawingml/2006/main">
-              <a:ext uri="{FF2B5EF4-FFF2-40B4-BE49-F238E27FC236}">
-                <a16:creationId xmlns:a16="http://schemas.microsoft.com/office/drawing/2014/main" id="{319F8A0A-BF39-404D-B4C8-C9F7942097B1}"/>
+          <p:cNvPr id="28" name="Freeform 28">
+            <a:extLst xmlns:a="http://schemas.openxmlformats.org/drawingml/2006/main">
+              <a:ext uri="{FF2B5EF4-FFF2-40B4-BE49-F238E27FC236}">
+                <a16:creationId xmlns:a16="http://schemas.microsoft.com/office/drawing/2014/main" id="{9C6BD03F-B86D-471C-9A28-A1211E04CA44}"/>
               </a:ext>
             </a:extLst>
           </p:cNvPr>
@@ -5953,10 +6011,10 @@
       </p:sp>
       <p:sp>
         <p:nvSpPr>
-          <p:cNvPr id="28" name="TextBox 28">
-            <a:extLst xmlns:a="http://schemas.openxmlformats.org/drawingml/2006/main">
-              <a:ext uri="{FF2B5EF4-FFF2-40B4-BE49-F238E27FC236}">
-                <a16:creationId xmlns:a16="http://schemas.microsoft.com/office/drawing/2014/main" id="{FD29DBB8-CD62-4E2E-8702-B45516D55633}"/>
+          <p:cNvPr id="30" name="TextBox 30">
+            <a:extLst xmlns:a="http://schemas.openxmlformats.org/drawingml/2006/main">
+              <a:ext uri="{FF2B5EF4-FFF2-40B4-BE49-F238E27FC236}">
+                <a16:creationId xmlns:a16="http://schemas.microsoft.com/office/drawing/2014/main" id="{BAAF9B87-CEC9-4DF4-B838-28DC2870F7F5}"/>
               </a:ext>
             </a:extLst>
           </p:cNvPr>
@@ -6003,22 +6061,22 @@
       </p:sp>
       <p:sp>
         <p:nvSpPr>
-          <p:cNvPr id="29" name="TextBox 29">
-            <a:extLst xmlns:a="http://schemas.openxmlformats.org/drawingml/2006/main">
-              <a:ext uri="{FF2B5EF4-FFF2-40B4-BE49-F238E27FC236}">
-                <a16:creationId xmlns:a16="http://schemas.microsoft.com/office/drawing/2014/main" id="{8907EB83-A48E-403C-B4E8-6577B28DC47A}"/>
-              </a:ext>
-            </a:extLst>
-          </p:cNvPr>
-          <p:cNvSpPr>
-            <a:spLocks xmlns:a="http://schemas.openxmlformats.org/drawingml/2006/main" noGrp="1"/>
-          </p:cNvSpPr>
-          <p:nvPr/>
-        </p:nvSpPr>
-        <p:spPr>
-          <a:xfrm xmlns:a="http://schemas.openxmlformats.org/drawingml/2006/main" rot="0" flipH="0" flipV="0">
-            <a:off x="8241792" y="5816918"/>
-            <a:ext cx="1831086" cy="264033"/>
+          <p:cNvPr id="31" name="TextBox 31">
+            <a:extLst xmlns:a="http://schemas.openxmlformats.org/drawingml/2006/main">
+              <a:ext uri="{FF2B5EF4-FFF2-40B4-BE49-F238E27FC236}">
+                <a16:creationId xmlns:a16="http://schemas.microsoft.com/office/drawing/2014/main" id="{319692E6-EA24-4352-9549-DBB71A947560}"/>
+              </a:ext>
+            </a:extLst>
+          </p:cNvPr>
+          <p:cNvSpPr>
+            <a:spLocks xmlns:a="http://schemas.openxmlformats.org/drawingml/2006/main" noGrp="1"/>
+          </p:cNvSpPr>
+          <p:nvPr/>
+        </p:nvSpPr>
+        <p:spPr>
+          <a:xfrm xmlns:a="http://schemas.openxmlformats.org/drawingml/2006/main" rot="0" flipH="0" flipV="0">
+            <a:off x="8243316" y="5849302"/>
+            <a:ext cx="2395322" cy="205359"/>
           </a:xfrm>
           <a:prstGeom xmlns:a="http://schemas.openxmlformats.org/drawingml/2006/main" prst="rect">
             <a:avLst/>
@@ -6038,7 +6096,7 @@
               <a:buNone/>
             </a:pPr>
             <a:r>
-              <a:rPr sz="1350">
+              <a:rPr sz="1050">
                 <a:solidFill>
                   <a:srgbClr val="5B7388"/>
                 </a:solidFill>
@@ -6046,17 +6104,17 @@
                 <a:ea typeface="+mn-lt"/>
                 <a:cs typeface="+mn-lt"/>
               </a:rPr>
-              <a:t>发布前验收完成后公开</a:t>
+              <a:t>github.com/RexKing6/youjie-agent</a:t>
             </a:r>
           </a:p>
         </p:txBody>
       </p:sp>
       <p:sp>
         <p:nvSpPr>
-          <p:cNvPr id="31" name="TextBox 31">
-            <a:extLst xmlns:a="http://schemas.openxmlformats.org/drawingml/2006/main">
-              <a:ext uri="{FF2B5EF4-FFF2-40B4-BE49-F238E27FC236}">
-                <a16:creationId xmlns:a16="http://schemas.microsoft.com/office/drawing/2014/main" id="{86357761-1C0A-4164-BB04-24BC3C860033}"/>
+          <p:cNvPr id="33" name="TextBox 33">
+            <a:extLst xmlns:a="http://schemas.openxmlformats.org/drawingml/2006/main">
+              <a:ext uri="{FF2B5EF4-FFF2-40B4-BE49-F238E27FC236}">
+                <a16:creationId xmlns:a16="http://schemas.microsoft.com/office/drawing/2014/main" id="{69060870-A483-4FAC-82FD-C2EA05C54DDC}"/>
               </a:ext>
             </a:extLst>
           </p:cNvPr>
@@ -6103,10 +6161,10 @@
       </p:sp>
       <p:sp>
         <p:nvSpPr>
-          <p:cNvPr id="32" name="TextBox 32">
-            <a:extLst xmlns:a="http://schemas.openxmlformats.org/drawingml/2006/main">
-              <a:ext uri="{FF2B5EF4-FFF2-40B4-BE49-F238E27FC236}">
-                <a16:creationId xmlns:a16="http://schemas.microsoft.com/office/drawing/2014/main" id="{8CA0C296-7D81-41A0-981E-4CA33A78950F}"/>
+          <p:cNvPr id="34" name="TextBox 34">
+            <a:extLst xmlns:a="http://schemas.openxmlformats.org/drawingml/2006/main">
+              <a:ext uri="{FF2B5EF4-FFF2-40B4-BE49-F238E27FC236}">
+                <a16:creationId xmlns:a16="http://schemas.microsoft.com/office/drawing/2014/main" id="{9CFC3CBB-85F4-4E8E-BB86-4FFC3B06CF86}"/>
               </a:ext>
             </a:extLst>
           </p:cNvPr>
@@ -6153,10 +6211,10 @@
       </p:sp>
       <p:sp>
         <p:nvSpPr>
-          <p:cNvPr id="33" name="TextBox 33">
-            <a:extLst xmlns:a="http://schemas.openxmlformats.org/drawingml/2006/main">
-              <a:ext uri="{FF2B5EF4-FFF2-40B4-BE49-F238E27FC236}">
-                <a16:creationId xmlns:a16="http://schemas.microsoft.com/office/drawing/2014/main" id="{93F97A31-85E0-414D-B7AC-39542FCA8713}"/>
+          <p:cNvPr id="35" name="TextBox 35">
+            <a:extLst xmlns:a="http://schemas.openxmlformats.org/drawingml/2006/main">
+              <a:ext uri="{FF2B5EF4-FFF2-40B4-BE49-F238E27FC236}">
+                <a16:creationId xmlns:a16="http://schemas.microsoft.com/office/drawing/2014/main" id="{E91AEE94-A973-41FF-80F4-E5D4A07F8CF4}"/>
               </a:ext>
             </a:extLst>
           </p:cNvPr>
@@ -6204,7 +6262,7 @@
     </p:spTree>
     <p:extLst>
       <p:ext uri="{BB962C8B-B14F-4D97-AF65-F5344CB8AC3E}">
-        <p14:creationId xmlns:p14="http://schemas.microsoft.com/office/powerpoint/2010/main" val="1434572062"/>
+        <p14:creationId xmlns:p14="http://schemas.microsoft.com/office/powerpoint/2010/main" val="2121568192"/>
       </p:ext>
     </p:extLst>
   </p:cSld>
@@ -6235,7 +6293,7 @@
           <p:cNvPr id="2" name="TextBox 2">
             <a:extLst xmlns:a="http://schemas.openxmlformats.org/drawingml/2006/main">
               <a:ext uri="{FF2B5EF4-FFF2-40B4-BE49-F238E27FC236}">
-                <a16:creationId xmlns:a16="http://schemas.microsoft.com/office/drawing/2014/main" id="{755ED27F-7257-4107-BF6B-DF860AF17937}"/>
+                <a16:creationId xmlns:a16="http://schemas.microsoft.com/office/drawing/2014/main" id="{EDD50550-9E95-4872-B74E-A8B4F40B4AA7}"/>
               </a:ext>
             </a:extLst>
           </p:cNvPr>
@@ -6285,7 +6343,7 @@
           <p:cNvPr id="3" name="TextBox 3">
             <a:extLst xmlns:a="http://schemas.openxmlformats.org/drawingml/2006/main">
               <a:ext uri="{FF2B5EF4-FFF2-40B4-BE49-F238E27FC236}">
-                <a16:creationId xmlns:a16="http://schemas.microsoft.com/office/drawing/2014/main" id="{14458D01-9425-4692-8E2B-CA07CE0229D4}"/>
+                <a16:creationId xmlns:a16="http://schemas.microsoft.com/office/drawing/2014/main" id="{5F39ADEB-C2D8-4593-B4C2-E26BD558FD7F}"/>
               </a:ext>
             </a:extLst>
           </p:cNvPr>
@@ -6335,7 +6393,7 @@
           <p:cNvPr id="4" name="Rectangle 4">
             <a:extLst xmlns:a="http://schemas.openxmlformats.org/drawingml/2006/main">
               <a:ext uri="{FF2B5EF4-FFF2-40B4-BE49-F238E27FC236}">
-                <a16:creationId xmlns:a16="http://schemas.microsoft.com/office/drawing/2014/main" id="{84D50D77-F559-420A-B89B-D656B5B48D54}"/>
+                <a16:creationId xmlns:a16="http://schemas.microsoft.com/office/drawing/2014/main" id="{C9747A59-320A-4E3E-8EDE-D95A57844953}"/>
               </a:ext>
             </a:extLst>
           </p:cNvPr>
@@ -6369,7 +6427,7 @@
           <p:cNvPr id="5" name="Rectangle 5">
             <a:extLst xmlns:a="http://schemas.openxmlformats.org/drawingml/2006/main">
               <a:ext uri="{FF2B5EF4-FFF2-40B4-BE49-F238E27FC236}">
-                <a16:creationId xmlns:a16="http://schemas.microsoft.com/office/drawing/2014/main" id="{5A283511-6F87-43A2-827C-4A2D6355B8F7}"/>
+                <a16:creationId xmlns:a16="http://schemas.microsoft.com/office/drawing/2014/main" id="{293D39A0-B995-4EAF-A5A1-6AAB594E2167}"/>
               </a:ext>
             </a:extLst>
           </p:cNvPr>
@@ -6401,7 +6459,7 @@
           <p:cNvPr id="6" name="Rectangle 6">
             <a:extLst xmlns:a="http://schemas.openxmlformats.org/drawingml/2006/main">
               <a:ext uri="{FF2B5EF4-FFF2-40B4-BE49-F238E27FC236}">
-                <a16:creationId xmlns:a16="http://schemas.microsoft.com/office/drawing/2014/main" id="{963424FF-8B25-429A-AEDC-A12A8051D084}"/>
+                <a16:creationId xmlns:a16="http://schemas.microsoft.com/office/drawing/2014/main" id="{318DD43F-8285-41AA-88FD-A8E6858E5687}"/>
               </a:ext>
             </a:extLst>
           </p:cNvPr>
@@ -6431,7 +6489,7 @@
           <p:cNvPr id="7" name="Freeform 7">
             <a:extLst xmlns:a="http://schemas.openxmlformats.org/drawingml/2006/main">
               <a:ext uri="{FF2B5EF4-FFF2-40B4-BE49-F238E27FC236}">
-                <a16:creationId xmlns:a16="http://schemas.microsoft.com/office/drawing/2014/main" id="{FFE2F212-A3AA-4967-94A6-D1BEAE006848}"/>
+                <a16:creationId xmlns:a16="http://schemas.microsoft.com/office/drawing/2014/main" id="{D77BA5DC-6F83-41F5-963E-D39F08893A77}"/>
               </a:ext>
             </a:extLst>
           </p:cNvPr>
@@ -6500,7 +6558,7 @@
           <p:cNvPr id="8" name="Freeform 8">
             <a:extLst xmlns:a="http://schemas.openxmlformats.org/drawingml/2006/main">
               <a:ext uri="{FF2B5EF4-FFF2-40B4-BE49-F238E27FC236}">
-                <a16:creationId xmlns:a16="http://schemas.microsoft.com/office/drawing/2014/main" id="{28CF9677-5DCC-47C8-A33C-C4AB110FAC29}"/>
+                <a16:creationId xmlns:a16="http://schemas.microsoft.com/office/drawing/2014/main" id="{264C115B-F6DC-4B8D-9A4F-1AC97F4B083E}"/>
               </a:ext>
             </a:extLst>
           </p:cNvPr>
@@ -6543,7 +6601,7 @@
           <p:cNvPr id="10" name="TextBox 10">
             <a:extLst xmlns:a="http://schemas.openxmlformats.org/drawingml/2006/main">
               <a:ext uri="{FF2B5EF4-FFF2-40B4-BE49-F238E27FC236}">
-                <a16:creationId xmlns:a16="http://schemas.microsoft.com/office/drawing/2014/main" id="{9DF6D25F-344E-4B58-B673-94585A79DBD4}"/>
+                <a16:creationId xmlns:a16="http://schemas.microsoft.com/office/drawing/2014/main" id="{8C23702C-2038-4923-ABEB-D3EB4AFFB1A0}"/>
               </a:ext>
             </a:extLst>
           </p:cNvPr>
@@ -6593,7 +6651,7 @@
           <p:cNvPr id="11" name="TextBox 11">
             <a:extLst xmlns:a="http://schemas.openxmlformats.org/drawingml/2006/main">
               <a:ext uri="{FF2B5EF4-FFF2-40B4-BE49-F238E27FC236}">
-                <a16:creationId xmlns:a16="http://schemas.microsoft.com/office/drawing/2014/main" id="{C30CA8EA-5436-4527-B300-696690D4EB3B}"/>
+                <a16:creationId xmlns:a16="http://schemas.microsoft.com/office/drawing/2014/main" id="{23F567EC-7E75-49DA-BEF4-2334419BF86F}"/>
               </a:ext>
             </a:extLst>
           </p:cNvPr>
@@ -6643,7 +6701,7 @@
           <p:cNvPr id="12" name="TextBox 12">
             <a:extLst xmlns:a="http://schemas.openxmlformats.org/drawingml/2006/main">
               <a:ext uri="{FF2B5EF4-FFF2-40B4-BE49-F238E27FC236}">
-                <a16:creationId xmlns:a16="http://schemas.microsoft.com/office/drawing/2014/main" id="{5EF28B1D-F762-4D59-A61D-FA5471C57C14}"/>
+                <a16:creationId xmlns:a16="http://schemas.microsoft.com/office/drawing/2014/main" id="{358CF215-C473-4125-B37D-43E3274A5C7A}"/>
               </a:ext>
             </a:extLst>
           </p:cNvPr>
@@ -6693,7 +6751,7 @@
           <p:cNvPr id="13" name="Line 13">
             <a:extLst xmlns:a="http://schemas.openxmlformats.org/drawingml/2006/main">
               <a:ext uri="{FF2B5EF4-FFF2-40B4-BE49-F238E27FC236}">
-                <a16:creationId xmlns:a16="http://schemas.microsoft.com/office/drawing/2014/main" id="{BD4C1FAC-D88A-441A-8119-47CDAD4F0BDE}"/>
+                <a16:creationId xmlns:a16="http://schemas.microsoft.com/office/drawing/2014/main" id="{934C1022-44F8-498A-A34F-F2CF408F2041}"/>
               </a:ext>
             </a:extLst>
           </p:cNvPr>
@@ -6733,7 +6791,7 @@
           <p:cNvPr id="14" name="TextBox 14">
             <a:extLst xmlns:a="http://schemas.openxmlformats.org/drawingml/2006/main">
               <a:ext uri="{FF2B5EF4-FFF2-40B4-BE49-F238E27FC236}">
-                <a16:creationId xmlns:a16="http://schemas.microsoft.com/office/drawing/2014/main" id="{C3A7AAAC-E8FA-4841-8474-ECE024A28E85}"/>
+                <a16:creationId xmlns:a16="http://schemas.microsoft.com/office/drawing/2014/main" id="{4C84E0DD-0695-4017-8C15-F1CAA3BB4A7A}"/>
               </a:ext>
             </a:extLst>
           </p:cNvPr>
@@ -6783,7 +6841,7 @@
           <p:cNvPr id="15" name="TextBox 15">
             <a:extLst xmlns:a="http://schemas.openxmlformats.org/drawingml/2006/main">
               <a:ext uri="{FF2B5EF4-FFF2-40B4-BE49-F238E27FC236}">
-                <a16:creationId xmlns:a16="http://schemas.microsoft.com/office/drawing/2014/main" id="{E7E07546-7A37-4740-A88B-46591EEE0A3E}"/>
+                <a16:creationId xmlns:a16="http://schemas.microsoft.com/office/drawing/2014/main" id="{5DA551C5-5602-4017-AA1D-5921CF96A905}"/>
               </a:ext>
             </a:extLst>
           </p:cNvPr>
@@ -6833,7 +6891,7 @@
           <p:cNvPr id="16" name="TextBox 16">
             <a:extLst xmlns:a="http://schemas.openxmlformats.org/drawingml/2006/main">
               <a:ext uri="{FF2B5EF4-FFF2-40B4-BE49-F238E27FC236}">
-                <a16:creationId xmlns:a16="http://schemas.microsoft.com/office/drawing/2014/main" id="{9E6041EA-6116-49D5-B090-D7A992D0300C}"/>
+                <a16:creationId xmlns:a16="http://schemas.microsoft.com/office/drawing/2014/main" id="{6082EACE-726B-4279-A044-199D2409903A}"/>
               </a:ext>
             </a:extLst>
           </p:cNvPr>
@@ -6883,7 +6941,7 @@
           <p:cNvPr id="17" name="Rectangle 17">
             <a:extLst xmlns:a="http://schemas.openxmlformats.org/drawingml/2006/main">
               <a:ext uri="{FF2B5EF4-FFF2-40B4-BE49-F238E27FC236}">
-                <a16:creationId xmlns:a16="http://schemas.microsoft.com/office/drawing/2014/main" id="{C7859F3E-5CA1-44F3-AFD0-756AF107D5C3}"/>
+                <a16:creationId xmlns:a16="http://schemas.microsoft.com/office/drawing/2014/main" id="{8CF588F3-A429-4F71-A029-73CA95862B26}"/>
               </a:ext>
             </a:extLst>
           </p:cNvPr>
@@ -6915,7 +6973,7 @@
           <p:cNvPr id="18" name="TextBox 18">
             <a:extLst xmlns:a="http://schemas.openxmlformats.org/drawingml/2006/main">
               <a:ext uri="{FF2B5EF4-FFF2-40B4-BE49-F238E27FC236}">
-                <a16:creationId xmlns:a16="http://schemas.microsoft.com/office/drawing/2014/main" id="{373B7843-0595-46FA-93C0-10D6A5E2F4C0}"/>
+                <a16:creationId xmlns:a16="http://schemas.microsoft.com/office/drawing/2014/main" id="{5A5E90E6-2963-4986-85C2-1477A2BAB000}"/>
               </a:ext>
             </a:extLst>
           </p:cNvPr>
@@ -6965,7 +7023,7 @@
           <p:cNvPr id="20" name="Ellipse 20">
             <a:extLst xmlns:a="http://schemas.openxmlformats.org/drawingml/2006/main">
               <a:ext uri="{FF2B5EF4-FFF2-40B4-BE49-F238E27FC236}">
-                <a16:creationId xmlns:a16="http://schemas.microsoft.com/office/drawing/2014/main" id="{BFFF33F6-3A9C-4EC5-86FE-B124E9132FDB}"/>
+                <a16:creationId xmlns:a16="http://schemas.microsoft.com/office/drawing/2014/main" id="{AB7D8D24-E0D0-4D6A-8CB5-F41F1B257B8D}"/>
               </a:ext>
             </a:extLst>
           </p:cNvPr>
@@ -6997,7 +7055,7 @@
           <p:cNvPr id="21" name="Freeform 21">
             <a:extLst xmlns:a="http://schemas.openxmlformats.org/drawingml/2006/main">
               <a:ext uri="{FF2B5EF4-FFF2-40B4-BE49-F238E27FC236}">
-                <a16:creationId xmlns:a16="http://schemas.microsoft.com/office/drawing/2014/main" id="{9E51E7FF-88CE-49F5-B0F5-4EA7948F5E37}"/>
+                <a16:creationId xmlns:a16="http://schemas.microsoft.com/office/drawing/2014/main" id="{1992F320-F75A-4712-8413-27B15C2CB296}"/>
               </a:ext>
             </a:extLst>
           </p:cNvPr>
@@ -7037,7 +7095,7 @@
           <p:cNvPr id="22" name="Freeform 22">
             <a:extLst xmlns:a="http://schemas.openxmlformats.org/drawingml/2006/main">
               <a:ext uri="{FF2B5EF4-FFF2-40B4-BE49-F238E27FC236}">
-                <a16:creationId xmlns:a16="http://schemas.microsoft.com/office/drawing/2014/main" id="{73680C93-F4A2-4B71-8AEF-34430CCA93AC}"/>
+                <a16:creationId xmlns:a16="http://schemas.microsoft.com/office/drawing/2014/main" id="{16638EAF-4037-4106-977C-F5A1DAE180A5}"/>
               </a:ext>
             </a:extLst>
           </p:cNvPr>
@@ -7113,7 +7171,7 @@
           <p:cNvPr id="23" name="Freeform 23">
             <a:extLst xmlns:a="http://schemas.openxmlformats.org/drawingml/2006/main">
               <a:ext uri="{FF2B5EF4-FFF2-40B4-BE49-F238E27FC236}">
-                <a16:creationId xmlns:a16="http://schemas.microsoft.com/office/drawing/2014/main" id="{84D0C6D5-2E9A-4E71-AFFC-B16C02F702B5}"/>
+                <a16:creationId xmlns:a16="http://schemas.microsoft.com/office/drawing/2014/main" id="{E115D04D-1C7E-40AB-9167-3AFB3FD0114B}"/>
               </a:ext>
             </a:extLst>
           </p:cNvPr>
@@ -7153,7 +7211,7 @@
           <p:cNvPr id="25" name="TextBox 25">
             <a:extLst xmlns:a="http://schemas.openxmlformats.org/drawingml/2006/main">
               <a:ext uri="{FF2B5EF4-FFF2-40B4-BE49-F238E27FC236}">
-                <a16:creationId xmlns:a16="http://schemas.microsoft.com/office/drawing/2014/main" id="{EEEDE349-1E66-4244-8DFB-6AC5C2DC88DE}"/>
+                <a16:creationId xmlns:a16="http://schemas.microsoft.com/office/drawing/2014/main" id="{AF58FC14-39B8-4185-8EE8-924AB872232D}"/>
               </a:ext>
             </a:extLst>
           </p:cNvPr>
@@ -7203,7 +7261,7 @@
           <p:cNvPr id="26" name="Freeform 26">
             <a:extLst xmlns:a="http://schemas.openxmlformats.org/drawingml/2006/main">
               <a:ext uri="{FF2B5EF4-FFF2-40B4-BE49-F238E27FC236}">
-                <a16:creationId xmlns:a16="http://schemas.microsoft.com/office/drawing/2014/main" id="{9F909926-4FC3-4451-BB2E-0E6F0FAEBBF2}"/>
+                <a16:creationId xmlns:a16="http://schemas.microsoft.com/office/drawing/2014/main" id="{9747EA40-8F8B-4C9E-AEBC-16C595B112A5}"/>
               </a:ext>
             </a:extLst>
           </p:cNvPr>
@@ -7249,7 +7307,7 @@
           <p:cNvPr id="27" name="Freeform 27">
             <a:extLst xmlns:a="http://schemas.openxmlformats.org/drawingml/2006/main">
               <a:ext uri="{FF2B5EF4-FFF2-40B4-BE49-F238E27FC236}">
-                <a16:creationId xmlns:a16="http://schemas.microsoft.com/office/drawing/2014/main" id="{105305C4-BA55-44FD-8012-6C6A02302B08}"/>
+                <a16:creationId xmlns:a16="http://schemas.microsoft.com/office/drawing/2014/main" id="{75ECAF60-7C6A-4307-9F4A-3DE4343D3880}"/>
               </a:ext>
             </a:extLst>
           </p:cNvPr>
@@ -7289,7 +7347,7 @@
           <p:cNvPr id="28" name="Freeform 28">
             <a:extLst xmlns:a="http://schemas.openxmlformats.org/drawingml/2006/main">
               <a:ext uri="{FF2B5EF4-FFF2-40B4-BE49-F238E27FC236}">
-                <a16:creationId xmlns:a16="http://schemas.microsoft.com/office/drawing/2014/main" id="{97A03112-3FA8-4428-9A45-377794884504}"/>
+                <a16:creationId xmlns:a16="http://schemas.microsoft.com/office/drawing/2014/main" id="{B00C3E71-0B24-41C0-813B-820564337989}"/>
               </a:ext>
             </a:extLst>
           </p:cNvPr>
@@ -7335,7 +7393,7 @@
           <p:cNvPr id="29" name="Rectangle 29">
             <a:extLst xmlns:a="http://schemas.openxmlformats.org/drawingml/2006/main">
               <a:ext uri="{FF2B5EF4-FFF2-40B4-BE49-F238E27FC236}">
-                <a16:creationId xmlns:a16="http://schemas.microsoft.com/office/drawing/2014/main" id="{CB05C4F4-1291-40B0-903B-1399EB524321}"/>
+                <a16:creationId xmlns:a16="http://schemas.microsoft.com/office/drawing/2014/main" id="{A63881F6-CBFE-49F2-975B-E83460F57D73}"/>
               </a:ext>
             </a:extLst>
           </p:cNvPr>
@@ -7369,7 +7427,7 @@
           <p:cNvPr id="30" name="TextBox 30">
             <a:extLst xmlns:a="http://schemas.openxmlformats.org/drawingml/2006/main">
               <a:ext uri="{FF2B5EF4-FFF2-40B4-BE49-F238E27FC236}">
-                <a16:creationId xmlns:a16="http://schemas.microsoft.com/office/drawing/2014/main" id="{C5FA5017-BB08-4AC1-BD3E-0EF5B26C36ED}"/>
+                <a16:creationId xmlns:a16="http://schemas.microsoft.com/office/drawing/2014/main" id="{617DE1AF-395A-40FE-A531-9B27893B9A6F}"/>
               </a:ext>
             </a:extLst>
           </p:cNvPr>
@@ -7419,7 +7477,7 @@
           <p:cNvPr id="31" name="TextBox 31">
             <a:extLst xmlns:a="http://schemas.openxmlformats.org/drawingml/2006/main">
               <a:ext uri="{FF2B5EF4-FFF2-40B4-BE49-F238E27FC236}">
-                <a16:creationId xmlns:a16="http://schemas.microsoft.com/office/drawing/2014/main" id="{B7A85FE2-40A6-475A-8F6B-63C22EAD4001}"/>
+                <a16:creationId xmlns:a16="http://schemas.microsoft.com/office/drawing/2014/main" id="{F6F92759-2ECD-4B8B-AF77-545EFA146B9F}"/>
               </a:ext>
             </a:extLst>
           </p:cNvPr>
@@ -7469,7 +7527,7 @@
           <p:cNvPr id="33" name="Rectangle 33">
             <a:extLst xmlns:a="http://schemas.openxmlformats.org/drawingml/2006/main">
               <a:ext uri="{FF2B5EF4-FFF2-40B4-BE49-F238E27FC236}">
-                <a16:creationId xmlns:a16="http://schemas.microsoft.com/office/drawing/2014/main" id="{046F1566-0296-4951-8F4D-FB5297455C73}"/>
+                <a16:creationId xmlns:a16="http://schemas.microsoft.com/office/drawing/2014/main" id="{64345540-2FD8-4840-9DBF-F6EFB167F221}"/>
               </a:ext>
             </a:extLst>
           </p:cNvPr>
@@ -7503,7 +7561,7 @@
           <p:cNvPr id="34" name="TextBox 34">
             <a:extLst xmlns:a="http://schemas.openxmlformats.org/drawingml/2006/main">
               <a:ext uri="{FF2B5EF4-FFF2-40B4-BE49-F238E27FC236}">
-                <a16:creationId xmlns:a16="http://schemas.microsoft.com/office/drawing/2014/main" id="{CE5A19EE-AD38-4237-BC57-0AAFA032AE36}"/>
+                <a16:creationId xmlns:a16="http://schemas.microsoft.com/office/drawing/2014/main" id="{8CCEAA4A-CDC1-4BC5-B400-17011E4E7CA7}"/>
               </a:ext>
             </a:extLst>
           </p:cNvPr>
@@ -7553,7 +7611,7 @@
           <p:cNvPr id="35" name="TextBox 35">
             <a:extLst xmlns:a="http://schemas.openxmlformats.org/drawingml/2006/main">
               <a:ext uri="{FF2B5EF4-FFF2-40B4-BE49-F238E27FC236}">
-                <a16:creationId xmlns:a16="http://schemas.microsoft.com/office/drawing/2014/main" id="{36F3946E-F694-48DA-B643-4AE41EABA994}"/>
+                <a16:creationId xmlns:a16="http://schemas.microsoft.com/office/drawing/2014/main" id="{34D54151-B191-4C63-B6F2-845E6CCE311F}"/>
               </a:ext>
             </a:extLst>
           </p:cNvPr>
@@ -7603,7 +7661,7 @@
           <p:cNvPr id="37" name="Rectangle 37">
             <a:extLst xmlns:a="http://schemas.openxmlformats.org/drawingml/2006/main">
               <a:ext uri="{FF2B5EF4-FFF2-40B4-BE49-F238E27FC236}">
-                <a16:creationId xmlns:a16="http://schemas.microsoft.com/office/drawing/2014/main" id="{F3E23192-5E40-4F10-8681-547841D4C1F3}"/>
+                <a16:creationId xmlns:a16="http://schemas.microsoft.com/office/drawing/2014/main" id="{A3E4E35D-CDBF-49CD-9CCE-626BCB2D651C}"/>
               </a:ext>
             </a:extLst>
           </p:cNvPr>
@@ -7637,7 +7695,7 @@
           <p:cNvPr id="38" name="TextBox 38">
             <a:extLst xmlns:a="http://schemas.openxmlformats.org/drawingml/2006/main">
               <a:ext uri="{FF2B5EF4-FFF2-40B4-BE49-F238E27FC236}">
-                <a16:creationId xmlns:a16="http://schemas.microsoft.com/office/drawing/2014/main" id="{AECEB088-874F-4876-8145-CD1E1B7E594C}"/>
+                <a16:creationId xmlns:a16="http://schemas.microsoft.com/office/drawing/2014/main" id="{AC2A548F-E09F-4F8E-B891-D32729A3942F}"/>
               </a:ext>
             </a:extLst>
           </p:cNvPr>
@@ -7687,7 +7745,7 @@
           <p:cNvPr id="39" name="TextBox 39">
             <a:extLst xmlns:a="http://schemas.openxmlformats.org/drawingml/2006/main">
               <a:ext uri="{FF2B5EF4-FFF2-40B4-BE49-F238E27FC236}">
-                <a16:creationId xmlns:a16="http://schemas.microsoft.com/office/drawing/2014/main" id="{6AF79B28-C19A-4306-89B5-3FC3F098AA8F}"/>
+                <a16:creationId xmlns:a16="http://schemas.microsoft.com/office/drawing/2014/main" id="{92F9594F-7069-4311-A0E9-4DF0FB1B3F98}"/>
               </a:ext>
             </a:extLst>
           </p:cNvPr>
@@ -7737,7 +7795,7 @@
           <p:cNvPr id="41" name="Rectangle 41">
             <a:extLst xmlns:a="http://schemas.openxmlformats.org/drawingml/2006/main">
               <a:ext uri="{FF2B5EF4-FFF2-40B4-BE49-F238E27FC236}">
-                <a16:creationId xmlns:a16="http://schemas.microsoft.com/office/drawing/2014/main" id="{032F947C-D214-4039-9519-40B274F215E1}"/>
+                <a16:creationId xmlns:a16="http://schemas.microsoft.com/office/drawing/2014/main" id="{2AAC7FE6-25A3-4A4E-BAE7-7984154112C5}"/>
               </a:ext>
             </a:extLst>
           </p:cNvPr>
@@ -7769,7 +7827,7 @@
           <p:cNvPr id="42" name="TextBox 42">
             <a:extLst xmlns:a="http://schemas.openxmlformats.org/drawingml/2006/main">
               <a:ext uri="{FF2B5EF4-FFF2-40B4-BE49-F238E27FC236}">
-                <a16:creationId xmlns:a16="http://schemas.microsoft.com/office/drawing/2014/main" id="{DDAEC9C8-739D-4109-8627-A7500A5EE0B7}"/>
+                <a16:creationId xmlns:a16="http://schemas.microsoft.com/office/drawing/2014/main" id="{0744009C-AD59-4B8C-BC25-BD1F3B062B9D}"/>
               </a:ext>
             </a:extLst>
           </p:cNvPr>
@@ -7819,7 +7877,7 @@
           <p:cNvPr id="44" name="TextBox 44">
             <a:extLst xmlns:a="http://schemas.openxmlformats.org/drawingml/2006/main">
               <a:ext uri="{FF2B5EF4-FFF2-40B4-BE49-F238E27FC236}">
-                <a16:creationId xmlns:a16="http://schemas.microsoft.com/office/drawing/2014/main" id="{6827D647-1B9A-4E61-9ED8-A73528ECA3C2}"/>
+                <a16:creationId xmlns:a16="http://schemas.microsoft.com/office/drawing/2014/main" id="{C05D2D47-EFB0-4B41-A9A4-EC69087BC38B}"/>
               </a:ext>
             </a:extLst>
           </p:cNvPr>
@@ -7869,7 +7927,7 @@
           <p:cNvPr id="45" name="TextBox 45">
             <a:extLst xmlns:a="http://schemas.openxmlformats.org/drawingml/2006/main">
               <a:ext uri="{FF2B5EF4-FFF2-40B4-BE49-F238E27FC236}">
-                <a16:creationId xmlns:a16="http://schemas.microsoft.com/office/drawing/2014/main" id="{BFB741F0-B99F-434A-B283-74895028C2ED}"/>
+                <a16:creationId xmlns:a16="http://schemas.microsoft.com/office/drawing/2014/main" id="{1E749B5F-EF9D-46D0-B316-2C7328EB65AD}"/>
               </a:ext>
             </a:extLst>
           </p:cNvPr>
@@ -7917,7 +7975,7 @@
     </p:spTree>
     <p:extLst>
       <p:ext uri="{BB962C8B-B14F-4D97-AF65-F5344CB8AC3E}">
-        <p14:creationId xmlns:p14="http://schemas.microsoft.com/office/powerpoint/2010/main" val="1947290283"/>
+        <p14:creationId xmlns:p14="http://schemas.microsoft.com/office/powerpoint/2010/main" val="1424577990"/>
       </p:ext>
     </p:extLst>
   </p:cSld>
@@ -7948,7 +8006,7 @@
           <p:cNvPr id="2" name="TextBox 2">
             <a:extLst xmlns:a="http://schemas.openxmlformats.org/drawingml/2006/main">
               <a:ext uri="{FF2B5EF4-FFF2-40B4-BE49-F238E27FC236}">
-                <a16:creationId xmlns:a16="http://schemas.microsoft.com/office/drawing/2014/main" id="{62BEBAEA-D928-4302-BC77-4DC4ADF37F65}"/>
+                <a16:creationId xmlns:a16="http://schemas.microsoft.com/office/drawing/2014/main" id="{19027135-3FA6-402D-B58A-FD3177C19CC6}"/>
               </a:ext>
             </a:extLst>
           </p:cNvPr>
@@ -7998,7 +8056,7 @@
           <p:cNvPr id="3" name="TextBox 3">
             <a:extLst xmlns:a="http://schemas.openxmlformats.org/drawingml/2006/main">
               <a:ext uri="{FF2B5EF4-FFF2-40B4-BE49-F238E27FC236}">
-                <a16:creationId xmlns:a16="http://schemas.microsoft.com/office/drawing/2014/main" id="{75A41AB9-1626-43A2-A3F0-957B90403CE1}"/>
+                <a16:creationId xmlns:a16="http://schemas.microsoft.com/office/drawing/2014/main" id="{91B1A76A-CA7B-4A04-877C-FB7E44DBA02E}"/>
               </a:ext>
             </a:extLst>
           </p:cNvPr>
@@ -8048,7 +8106,7 @@
           <p:cNvPr id="4" name="Freeform 4">
             <a:extLst xmlns:a="http://schemas.openxmlformats.org/drawingml/2006/main">
               <a:ext uri="{FF2B5EF4-FFF2-40B4-BE49-F238E27FC236}">
-                <a16:creationId xmlns:a16="http://schemas.microsoft.com/office/drawing/2014/main" id="{FB728861-EE9D-4076-B221-3C1423DE0417}"/>
+                <a16:creationId xmlns:a16="http://schemas.microsoft.com/office/drawing/2014/main" id="{903FBC2D-95BB-4AF9-8872-A26E5F6B56BA}"/>
               </a:ext>
             </a:extLst>
           </p:cNvPr>
@@ -8088,7 +8146,7 @@
           <p:cNvPr id="5" name="Freeform 5">
             <a:extLst xmlns:a="http://schemas.openxmlformats.org/drawingml/2006/main">
               <a:ext uri="{FF2B5EF4-FFF2-40B4-BE49-F238E27FC236}">
-                <a16:creationId xmlns:a16="http://schemas.microsoft.com/office/drawing/2014/main" id="{3A9393CA-9189-470A-A6FD-FEBC81E8D35C}"/>
+                <a16:creationId xmlns:a16="http://schemas.microsoft.com/office/drawing/2014/main" id="{76318875-BC2D-4360-AC4A-75B70F38BB81}"/>
               </a:ext>
             </a:extLst>
           </p:cNvPr>
@@ -8128,7 +8186,7 @@
           <p:cNvPr id="6" name="Freeform 6">
             <a:extLst xmlns:a="http://schemas.openxmlformats.org/drawingml/2006/main">
               <a:ext uri="{FF2B5EF4-FFF2-40B4-BE49-F238E27FC236}">
-                <a16:creationId xmlns:a16="http://schemas.microsoft.com/office/drawing/2014/main" id="{54ECF9EE-3CD6-41BD-A68C-4191C8666991}"/>
+                <a16:creationId xmlns:a16="http://schemas.microsoft.com/office/drawing/2014/main" id="{8719339D-4C07-4EDA-9BA2-0F8B5706FF63}"/>
               </a:ext>
             </a:extLst>
           </p:cNvPr>
@@ -8168,7 +8226,7 @@
           <p:cNvPr id="7" name="Ellipse 7">
             <a:extLst xmlns:a="http://schemas.openxmlformats.org/drawingml/2006/main">
               <a:ext uri="{FF2B5EF4-FFF2-40B4-BE49-F238E27FC236}">
-                <a16:creationId xmlns:a16="http://schemas.microsoft.com/office/drawing/2014/main" id="{CF02B806-5118-4843-8FEC-9930A1247A70}"/>
+                <a16:creationId xmlns:a16="http://schemas.microsoft.com/office/drawing/2014/main" id="{4CE77698-DF96-48E9-A2D5-2CCD356844A7}"/>
               </a:ext>
             </a:extLst>
           </p:cNvPr>
@@ -8200,7 +8258,7 @@
           <p:cNvPr id="8" name="Freeform 8">
             <a:extLst xmlns:a="http://schemas.openxmlformats.org/drawingml/2006/main">
               <a:ext uri="{FF2B5EF4-FFF2-40B4-BE49-F238E27FC236}">
-                <a16:creationId xmlns:a16="http://schemas.microsoft.com/office/drawing/2014/main" id="{2A8ADBAB-62C1-4FFF-969B-1DFAE70FF9DB}"/>
+                <a16:creationId xmlns:a16="http://schemas.microsoft.com/office/drawing/2014/main" id="{0F401F75-7F34-4DF6-8553-4336F1166338}"/>
               </a:ext>
             </a:extLst>
           </p:cNvPr>
@@ -8269,7 +8327,7 @@
           <p:cNvPr id="9" name="Freeform 9">
             <a:extLst xmlns:a="http://schemas.openxmlformats.org/drawingml/2006/main">
               <a:ext uri="{FF2B5EF4-FFF2-40B4-BE49-F238E27FC236}">
-                <a16:creationId xmlns:a16="http://schemas.microsoft.com/office/drawing/2014/main" id="{246590A7-456A-496F-BDE9-E69E255AA696}"/>
+                <a16:creationId xmlns:a16="http://schemas.microsoft.com/office/drawing/2014/main" id="{17EE27F2-AA6B-4BF4-A935-2C7E4D30A2DC}"/>
               </a:ext>
             </a:extLst>
           </p:cNvPr>
@@ -8312,7 +8370,7 @@
           <p:cNvPr id="11" name="TextBox 11">
             <a:extLst xmlns:a="http://schemas.openxmlformats.org/drawingml/2006/main">
               <a:ext uri="{FF2B5EF4-FFF2-40B4-BE49-F238E27FC236}">
-                <a16:creationId xmlns:a16="http://schemas.microsoft.com/office/drawing/2014/main" id="{C65EE0F7-B001-4D78-A928-4A2600367FD7}"/>
+                <a16:creationId xmlns:a16="http://schemas.microsoft.com/office/drawing/2014/main" id="{EECDE936-4ED9-4A25-B663-CD89C9C90CB8}"/>
               </a:ext>
             </a:extLst>
           </p:cNvPr>
@@ -8362,7 +8420,7 @@
           <p:cNvPr id="13" name="Ellipse 13">
             <a:extLst xmlns:a="http://schemas.openxmlformats.org/drawingml/2006/main">
               <a:ext uri="{FF2B5EF4-FFF2-40B4-BE49-F238E27FC236}">
-                <a16:creationId xmlns:a16="http://schemas.microsoft.com/office/drawing/2014/main" id="{7CACD5C5-D246-4944-BD6F-753F063FD488}"/>
+                <a16:creationId xmlns:a16="http://schemas.microsoft.com/office/drawing/2014/main" id="{06782436-2D63-42AF-B856-AD6CEAC1215B}"/>
               </a:ext>
             </a:extLst>
           </p:cNvPr>
@@ -8394,7 +8452,7 @@
           <p:cNvPr id="14" name="Freeform 14">
             <a:extLst xmlns:a="http://schemas.openxmlformats.org/drawingml/2006/main">
               <a:ext uri="{FF2B5EF4-FFF2-40B4-BE49-F238E27FC236}">
-                <a16:creationId xmlns:a16="http://schemas.microsoft.com/office/drawing/2014/main" id="{7D84F45A-BCF0-4A66-98EB-5D509410DE81}"/>
+                <a16:creationId xmlns:a16="http://schemas.microsoft.com/office/drawing/2014/main" id="{22D8EA4B-F12E-4D20-ADF5-509D29E74254}"/>
               </a:ext>
             </a:extLst>
           </p:cNvPr>
@@ -8458,7 +8516,7 @@
           <p:cNvPr id="15" name="Freeform 15">
             <a:extLst xmlns:a="http://schemas.openxmlformats.org/drawingml/2006/main">
               <a:ext uri="{FF2B5EF4-FFF2-40B4-BE49-F238E27FC236}">
-                <a16:creationId xmlns:a16="http://schemas.microsoft.com/office/drawing/2014/main" id="{A603692C-2979-402F-8795-2112CA19525E}"/>
+                <a16:creationId xmlns:a16="http://schemas.microsoft.com/office/drawing/2014/main" id="{7A44FCC7-CD29-4B76-80C5-80D73FE6FCAE}"/>
               </a:ext>
             </a:extLst>
           </p:cNvPr>
@@ -8501,7 +8559,7 @@
           <p:cNvPr id="16" name="Freeform 16">
             <a:extLst xmlns:a="http://schemas.openxmlformats.org/drawingml/2006/main">
               <a:ext uri="{FF2B5EF4-FFF2-40B4-BE49-F238E27FC236}">
-                <a16:creationId xmlns:a16="http://schemas.microsoft.com/office/drawing/2014/main" id="{CDA53D9E-99A1-47F4-94F5-CE1D2A28EDF0}"/>
+                <a16:creationId xmlns:a16="http://schemas.microsoft.com/office/drawing/2014/main" id="{33A0D5EE-C3A5-4F8D-A4DF-39D8BADF60B5}"/>
               </a:ext>
             </a:extLst>
           </p:cNvPr>
@@ -8541,7 +8599,7 @@
           <p:cNvPr id="17" name="Freeform 17">
             <a:extLst xmlns:a="http://schemas.openxmlformats.org/drawingml/2006/main">
               <a:ext uri="{FF2B5EF4-FFF2-40B4-BE49-F238E27FC236}">
-                <a16:creationId xmlns:a16="http://schemas.microsoft.com/office/drawing/2014/main" id="{B5C72BF8-3BA6-4613-B962-B24CA4A84BE0}"/>
+                <a16:creationId xmlns:a16="http://schemas.microsoft.com/office/drawing/2014/main" id="{FD152941-500F-4B55-A650-60242772BBE1}"/>
               </a:ext>
             </a:extLst>
           </p:cNvPr>
@@ -8581,7 +8639,7 @@
           <p:cNvPr id="19" name="TextBox 19">
             <a:extLst xmlns:a="http://schemas.openxmlformats.org/drawingml/2006/main">
               <a:ext uri="{FF2B5EF4-FFF2-40B4-BE49-F238E27FC236}">
-                <a16:creationId xmlns:a16="http://schemas.microsoft.com/office/drawing/2014/main" id="{55F45295-D555-4AA5-A622-A9E80AC28D24}"/>
+                <a16:creationId xmlns:a16="http://schemas.microsoft.com/office/drawing/2014/main" id="{85F8BAFC-88F5-4E4E-B7EB-A7C736BAC6B0}"/>
               </a:ext>
             </a:extLst>
           </p:cNvPr>
@@ -8631,7 +8689,7 @@
           <p:cNvPr id="21" name="Ellipse 21">
             <a:extLst xmlns:a="http://schemas.openxmlformats.org/drawingml/2006/main">
               <a:ext uri="{FF2B5EF4-FFF2-40B4-BE49-F238E27FC236}">
-                <a16:creationId xmlns:a16="http://schemas.microsoft.com/office/drawing/2014/main" id="{3C5C07A3-0473-4F12-AFC5-A82A2BBAE365}"/>
+                <a16:creationId xmlns:a16="http://schemas.microsoft.com/office/drawing/2014/main" id="{7A156911-3BB7-4ECD-A4AC-C8F5C62F599B}"/>
               </a:ext>
             </a:extLst>
           </p:cNvPr>
@@ -8663,7 +8721,7 @@
           <p:cNvPr id="22" name="Freeform 22">
             <a:extLst xmlns:a="http://schemas.openxmlformats.org/drawingml/2006/main">
               <a:ext uri="{FF2B5EF4-FFF2-40B4-BE49-F238E27FC236}">
-                <a16:creationId xmlns:a16="http://schemas.microsoft.com/office/drawing/2014/main" id="{1D2200FB-8FCF-447E-A33F-23318C89FEC3}"/>
+                <a16:creationId xmlns:a16="http://schemas.microsoft.com/office/drawing/2014/main" id="{80076B29-7195-4B75-BEAB-A496035B9BA2}"/>
               </a:ext>
             </a:extLst>
           </p:cNvPr>
@@ -8720,7 +8778,7 @@
           <p:cNvPr id="23" name="Freeform 23">
             <a:extLst xmlns:a="http://schemas.openxmlformats.org/drawingml/2006/main">
               <a:ext uri="{FF2B5EF4-FFF2-40B4-BE49-F238E27FC236}">
-                <a16:creationId xmlns:a16="http://schemas.microsoft.com/office/drawing/2014/main" id="{9115A5BC-63E0-49CF-88A9-379D5CD2559C}"/>
+                <a16:creationId xmlns:a16="http://schemas.microsoft.com/office/drawing/2014/main" id="{690495B3-DC22-4737-9920-5EC09D7C4D87}"/>
               </a:ext>
             </a:extLst>
           </p:cNvPr>
@@ -8777,7 +8835,7 @@
           <p:cNvPr id="24" name="Freeform 24">
             <a:extLst xmlns:a="http://schemas.openxmlformats.org/drawingml/2006/main">
               <a:ext uri="{FF2B5EF4-FFF2-40B4-BE49-F238E27FC236}">
-                <a16:creationId xmlns:a16="http://schemas.microsoft.com/office/drawing/2014/main" id="{F4EAF1A7-7A8A-4138-80E3-5C63356E87EB}"/>
+                <a16:creationId xmlns:a16="http://schemas.microsoft.com/office/drawing/2014/main" id="{901BE5C6-862C-4364-ADC4-2BDE03EF27A5}"/>
               </a:ext>
             </a:extLst>
           </p:cNvPr>
@@ -8843,7 +8901,7 @@
           <p:cNvPr id="26" name="TextBox 26">
             <a:extLst xmlns:a="http://schemas.openxmlformats.org/drawingml/2006/main">
               <a:ext uri="{FF2B5EF4-FFF2-40B4-BE49-F238E27FC236}">
-                <a16:creationId xmlns:a16="http://schemas.microsoft.com/office/drawing/2014/main" id="{8C62350D-DAAB-4F8F-8117-51AED68E72F4}"/>
+                <a16:creationId xmlns:a16="http://schemas.microsoft.com/office/drawing/2014/main" id="{B037EE68-D1B8-450B-9990-CD1FAE857B5F}"/>
               </a:ext>
             </a:extLst>
           </p:cNvPr>
@@ -8893,7 +8951,7 @@
           <p:cNvPr id="28" name="Ellipse 28">
             <a:extLst xmlns:a="http://schemas.openxmlformats.org/drawingml/2006/main">
               <a:ext uri="{FF2B5EF4-FFF2-40B4-BE49-F238E27FC236}">
-                <a16:creationId xmlns:a16="http://schemas.microsoft.com/office/drawing/2014/main" id="{C7044DEA-57BE-44B1-B6BD-C2321812F746}"/>
+                <a16:creationId xmlns:a16="http://schemas.microsoft.com/office/drawing/2014/main" id="{7374762B-4458-483C-9230-75CD9D874C90}"/>
               </a:ext>
             </a:extLst>
           </p:cNvPr>
@@ -8925,7 +8983,7 @@
           <p:cNvPr id="29" name="Freeform 29">
             <a:extLst xmlns:a="http://schemas.openxmlformats.org/drawingml/2006/main">
               <a:ext uri="{FF2B5EF4-FFF2-40B4-BE49-F238E27FC236}">
-                <a16:creationId xmlns:a16="http://schemas.microsoft.com/office/drawing/2014/main" id="{E22B56EB-6A8E-4F2B-845F-B565964E0CB5}"/>
+                <a16:creationId xmlns:a16="http://schemas.microsoft.com/office/drawing/2014/main" id="{FFE17E82-540B-48BF-9E2A-8E724AD98896}"/>
               </a:ext>
             </a:extLst>
           </p:cNvPr>
@@ -8982,7 +9040,7 @@
           <p:cNvPr id="30" name="Freeform 30">
             <a:extLst xmlns:a="http://schemas.openxmlformats.org/drawingml/2006/main">
               <a:ext uri="{FF2B5EF4-FFF2-40B4-BE49-F238E27FC236}">
-                <a16:creationId xmlns:a16="http://schemas.microsoft.com/office/drawing/2014/main" id="{A4973F5E-F621-463E-91D5-465036BF9EAE}"/>
+                <a16:creationId xmlns:a16="http://schemas.microsoft.com/office/drawing/2014/main" id="{920BB2A4-6F45-48DD-A84A-9DEBD757D1F1}"/>
               </a:ext>
             </a:extLst>
           </p:cNvPr>
@@ -9035,7 +9093,7 @@
           <p:cNvPr id="31" name="Freeform 31">
             <a:extLst xmlns:a="http://schemas.openxmlformats.org/drawingml/2006/main">
               <a:ext uri="{FF2B5EF4-FFF2-40B4-BE49-F238E27FC236}">
-                <a16:creationId xmlns:a16="http://schemas.microsoft.com/office/drawing/2014/main" id="{004F3590-2074-464B-8633-A65424770F78}"/>
+                <a16:creationId xmlns:a16="http://schemas.microsoft.com/office/drawing/2014/main" id="{D12C054C-3790-41BD-B67A-DFCB4CFCB85D}"/>
               </a:ext>
             </a:extLst>
           </p:cNvPr>
@@ -9088,7 +9146,7 @@
           <p:cNvPr id="33" name="TextBox 33">
             <a:extLst xmlns:a="http://schemas.openxmlformats.org/drawingml/2006/main">
               <a:ext uri="{FF2B5EF4-FFF2-40B4-BE49-F238E27FC236}">
-                <a16:creationId xmlns:a16="http://schemas.microsoft.com/office/drawing/2014/main" id="{2992DBA5-135A-44D5-8622-6C451AB3E5FF}"/>
+                <a16:creationId xmlns:a16="http://schemas.microsoft.com/office/drawing/2014/main" id="{5C52C03A-B6F9-45ED-AD35-03CA3385BF73}"/>
               </a:ext>
             </a:extLst>
           </p:cNvPr>
@@ -9138,7 +9196,7 @@
           <p:cNvPr id="35" name="Ellipse 35">
             <a:extLst xmlns:a="http://schemas.openxmlformats.org/drawingml/2006/main">
               <a:ext uri="{FF2B5EF4-FFF2-40B4-BE49-F238E27FC236}">
-                <a16:creationId xmlns:a16="http://schemas.microsoft.com/office/drawing/2014/main" id="{F96F3268-4A69-4419-A524-C3CC1CC03DA3}"/>
+                <a16:creationId xmlns:a16="http://schemas.microsoft.com/office/drawing/2014/main" id="{AE34C933-07AF-4712-BAD2-2570E40D7028}"/>
               </a:ext>
             </a:extLst>
           </p:cNvPr>
@@ -9170,7 +9228,7 @@
           <p:cNvPr id="36" name="Freeform 36">
             <a:extLst xmlns:a="http://schemas.openxmlformats.org/drawingml/2006/main">
               <a:ext uri="{FF2B5EF4-FFF2-40B4-BE49-F238E27FC236}">
-                <a16:creationId xmlns:a16="http://schemas.microsoft.com/office/drawing/2014/main" id="{8FAB392F-E779-49EE-9E8B-7D718C1586AA}"/>
+                <a16:creationId xmlns:a16="http://schemas.microsoft.com/office/drawing/2014/main" id="{1AE1460C-B955-4A7F-AF21-F8AF9910A133}"/>
               </a:ext>
             </a:extLst>
           </p:cNvPr>
@@ -9239,7 +9297,7 @@
           <p:cNvPr id="37" name="Freeform 37">
             <a:extLst xmlns:a="http://schemas.openxmlformats.org/drawingml/2006/main">
               <a:ext uri="{FF2B5EF4-FFF2-40B4-BE49-F238E27FC236}">
-                <a16:creationId xmlns:a16="http://schemas.microsoft.com/office/drawing/2014/main" id="{4FEB2737-E9DC-4CA5-9CE8-FA2C6BE65FA0}"/>
+                <a16:creationId xmlns:a16="http://schemas.microsoft.com/office/drawing/2014/main" id="{77D403A7-33C1-4390-9823-44FB4FD1F805}"/>
               </a:ext>
             </a:extLst>
           </p:cNvPr>
@@ -9308,7 +9366,7 @@
           <p:cNvPr id="38" name="Freeform 38">
             <a:extLst xmlns:a="http://schemas.openxmlformats.org/drawingml/2006/main">
               <a:ext uri="{FF2B5EF4-FFF2-40B4-BE49-F238E27FC236}">
-                <a16:creationId xmlns:a16="http://schemas.microsoft.com/office/drawing/2014/main" id="{656D7A64-221F-4F85-91D7-547769D211EB}"/>
+                <a16:creationId xmlns:a16="http://schemas.microsoft.com/office/drawing/2014/main" id="{9BD1EEBF-125B-464C-BB72-15B051EC764D}"/>
               </a:ext>
             </a:extLst>
           </p:cNvPr>
@@ -9377,7 +9435,7 @@
           <p:cNvPr id="39" name="Freeform 39">
             <a:extLst xmlns:a="http://schemas.openxmlformats.org/drawingml/2006/main">
               <a:ext uri="{FF2B5EF4-FFF2-40B4-BE49-F238E27FC236}">
-                <a16:creationId xmlns:a16="http://schemas.microsoft.com/office/drawing/2014/main" id="{3BE208C9-BE23-44BE-A3E7-7BDC3380EFF1}"/>
+                <a16:creationId xmlns:a16="http://schemas.microsoft.com/office/drawing/2014/main" id="{D3368A81-C556-411F-B278-5C2DDCCEE6C5}"/>
               </a:ext>
             </a:extLst>
           </p:cNvPr>
@@ -9417,7 +9475,7 @@
           <p:cNvPr id="41" name="TextBox 41">
             <a:extLst xmlns:a="http://schemas.openxmlformats.org/drawingml/2006/main">
               <a:ext uri="{FF2B5EF4-FFF2-40B4-BE49-F238E27FC236}">
-                <a16:creationId xmlns:a16="http://schemas.microsoft.com/office/drawing/2014/main" id="{25D4D50E-3D1E-4611-A04A-2996A5665E85}"/>
+                <a16:creationId xmlns:a16="http://schemas.microsoft.com/office/drawing/2014/main" id="{E3DDF0B4-88BB-415B-9FC3-F2849FE6EFA7}"/>
               </a:ext>
             </a:extLst>
           </p:cNvPr>
@@ -9467,7 +9525,7 @@
           <p:cNvPr id="43" name="Ellipse 43">
             <a:extLst xmlns:a="http://schemas.openxmlformats.org/drawingml/2006/main">
               <a:ext uri="{FF2B5EF4-FFF2-40B4-BE49-F238E27FC236}">
-                <a16:creationId xmlns:a16="http://schemas.microsoft.com/office/drawing/2014/main" id="{20673C17-DC3B-4602-B91A-3148CFEF3F93}"/>
+                <a16:creationId xmlns:a16="http://schemas.microsoft.com/office/drawing/2014/main" id="{F2B4F1D4-7ABA-491B-85C8-6FC87C33D94A}"/>
               </a:ext>
             </a:extLst>
           </p:cNvPr>
@@ -9499,7 +9557,7 @@
           <p:cNvPr id="44" name="Freeform 44">
             <a:extLst xmlns:a="http://schemas.openxmlformats.org/drawingml/2006/main">
               <a:ext uri="{FF2B5EF4-FFF2-40B4-BE49-F238E27FC236}">
-                <a16:creationId xmlns:a16="http://schemas.microsoft.com/office/drawing/2014/main" id="{D92B5A9A-D117-4CDD-A1AA-F29A8AECEEA6}"/>
+                <a16:creationId xmlns:a16="http://schemas.microsoft.com/office/drawing/2014/main" id="{A3EA7512-0D92-409E-A9C8-50097F9C2DA0}"/>
               </a:ext>
             </a:extLst>
           </p:cNvPr>
@@ -9556,7 +9614,7 @@
           <p:cNvPr id="45" name="Freeform 45">
             <a:extLst xmlns:a="http://schemas.openxmlformats.org/drawingml/2006/main">
               <a:ext uri="{FF2B5EF4-FFF2-40B4-BE49-F238E27FC236}">
-                <a16:creationId xmlns:a16="http://schemas.microsoft.com/office/drawing/2014/main" id="{A0021F4B-6FD5-41EA-B8CB-4B58568D8F67}"/>
+                <a16:creationId xmlns:a16="http://schemas.microsoft.com/office/drawing/2014/main" id="{14BD25F2-7D1F-4C6E-8668-7BBB01191EC0}"/>
               </a:ext>
             </a:extLst>
           </p:cNvPr>
@@ -9599,7 +9657,7 @@
           <p:cNvPr id="47" name="TextBox 47">
             <a:extLst xmlns:a="http://schemas.openxmlformats.org/drawingml/2006/main">
               <a:ext uri="{FF2B5EF4-FFF2-40B4-BE49-F238E27FC236}">
-                <a16:creationId xmlns:a16="http://schemas.microsoft.com/office/drawing/2014/main" id="{D0732ACD-F5C2-4886-BBEB-BC76C0CE9DC5}"/>
+                <a16:creationId xmlns:a16="http://schemas.microsoft.com/office/drawing/2014/main" id="{013C7EE5-FF33-424E-B3D9-0E0A99B6BAC9}"/>
               </a:ext>
             </a:extLst>
           </p:cNvPr>
@@ -9649,7 +9707,7 @@
           <p:cNvPr id="49" name="Ellipse 49">
             <a:extLst xmlns:a="http://schemas.openxmlformats.org/drawingml/2006/main">
               <a:ext uri="{FF2B5EF4-FFF2-40B4-BE49-F238E27FC236}">
-                <a16:creationId xmlns:a16="http://schemas.microsoft.com/office/drawing/2014/main" id="{84EF219E-CF0F-4A86-99C4-0534A77EC416}"/>
+                <a16:creationId xmlns:a16="http://schemas.microsoft.com/office/drawing/2014/main" id="{802B200B-9492-4481-B9C2-FAAE5432A8FC}"/>
               </a:ext>
             </a:extLst>
           </p:cNvPr>
@@ -9681,7 +9739,7 @@
           <p:cNvPr id="50" name="Freeform 50">
             <a:extLst xmlns:a="http://schemas.openxmlformats.org/drawingml/2006/main">
               <a:ext uri="{FF2B5EF4-FFF2-40B4-BE49-F238E27FC236}">
-                <a16:creationId xmlns:a16="http://schemas.microsoft.com/office/drawing/2014/main" id="{3033F987-D69B-4E5C-B361-D6AA11A3770B}"/>
+                <a16:creationId xmlns:a16="http://schemas.microsoft.com/office/drawing/2014/main" id="{D77B43BF-F3BC-4C4F-AB5C-818D81A8E1DD}"/>
               </a:ext>
             </a:extLst>
           </p:cNvPr>
@@ -9738,7 +9796,7 @@
           <p:cNvPr id="51" name="Freeform 51">
             <a:extLst xmlns:a="http://schemas.openxmlformats.org/drawingml/2006/main">
               <a:ext uri="{FF2B5EF4-FFF2-40B4-BE49-F238E27FC236}">
-                <a16:creationId xmlns:a16="http://schemas.microsoft.com/office/drawing/2014/main" id="{1CA87118-8C43-4360-88D1-2AADC20BA8C7}"/>
+                <a16:creationId xmlns:a16="http://schemas.microsoft.com/office/drawing/2014/main" id="{8E42F4A2-ABCD-4B31-BDA3-AA5E1F70A4C6}"/>
               </a:ext>
             </a:extLst>
           </p:cNvPr>
@@ -9786,7 +9844,7 @@
           <p:cNvPr id="52" name="Freeform 52">
             <a:extLst xmlns:a="http://schemas.openxmlformats.org/drawingml/2006/main">
               <a:ext uri="{FF2B5EF4-FFF2-40B4-BE49-F238E27FC236}">
-                <a16:creationId xmlns:a16="http://schemas.microsoft.com/office/drawing/2014/main" id="{0836410D-3FF7-4C0C-BE86-ABF075E29C19}"/>
+                <a16:creationId xmlns:a16="http://schemas.microsoft.com/office/drawing/2014/main" id="{110D6A2E-0795-4BDF-BD8E-B578E2E9B18F}"/>
               </a:ext>
             </a:extLst>
           </p:cNvPr>
@@ -9829,7 +9887,7 @@
           <p:cNvPr id="54" name="TextBox 54">
             <a:extLst xmlns:a="http://schemas.openxmlformats.org/drawingml/2006/main">
               <a:ext uri="{FF2B5EF4-FFF2-40B4-BE49-F238E27FC236}">
-                <a16:creationId xmlns:a16="http://schemas.microsoft.com/office/drawing/2014/main" id="{727EEA15-9FC9-4A6A-9D5A-2023018D9377}"/>
+                <a16:creationId xmlns:a16="http://schemas.microsoft.com/office/drawing/2014/main" id="{DBE5215F-E901-4BEB-8542-90CED5B81D24}"/>
               </a:ext>
             </a:extLst>
           </p:cNvPr>
@@ -9879,7 +9937,7 @@
           <p:cNvPr id="57" name="Freeform 57">
             <a:extLst xmlns:a="http://schemas.openxmlformats.org/drawingml/2006/main">
               <a:ext uri="{FF2B5EF4-FFF2-40B4-BE49-F238E27FC236}">
-                <a16:creationId xmlns:a16="http://schemas.microsoft.com/office/drawing/2014/main" id="{91CE94D4-5845-48CC-ADA9-8E03744590AA}"/>
+                <a16:creationId xmlns:a16="http://schemas.microsoft.com/office/drawing/2014/main" id="{E51A3881-EDE8-4B45-BB4A-02EBF3C4744C}"/>
               </a:ext>
             </a:extLst>
           </p:cNvPr>
@@ -9922,7 +9980,7 @@
           <p:cNvPr id="58" name="Freeform 58">
             <a:extLst xmlns:a="http://schemas.openxmlformats.org/drawingml/2006/main">
               <a:ext uri="{FF2B5EF4-FFF2-40B4-BE49-F238E27FC236}">
-                <a16:creationId xmlns:a16="http://schemas.microsoft.com/office/drawing/2014/main" id="{7F0E38CA-9C1F-489F-B7B3-AE00FC0CEB7B}"/>
+                <a16:creationId xmlns:a16="http://schemas.microsoft.com/office/drawing/2014/main" id="{045305E5-4685-45E1-92CC-D2C90F0294F3}"/>
               </a:ext>
             </a:extLst>
           </p:cNvPr>
@@ -9965,7 +10023,7 @@
           <p:cNvPr id="59" name="Rectangle 59">
             <a:extLst xmlns:a="http://schemas.openxmlformats.org/drawingml/2006/main">
               <a:ext uri="{FF2B5EF4-FFF2-40B4-BE49-F238E27FC236}">
-                <a16:creationId xmlns:a16="http://schemas.microsoft.com/office/drawing/2014/main" id="{BAC0FA5E-C4F0-408E-BB0E-0995D5C5B9D5}"/>
+                <a16:creationId xmlns:a16="http://schemas.microsoft.com/office/drawing/2014/main" id="{E64BAD7A-30A3-415D-BA18-B79634D38712}"/>
               </a:ext>
             </a:extLst>
           </p:cNvPr>
@@ -9997,7 +10055,7 @@
           <p:cNvPr id="60" name="TextBox 60">
             <a:extLst xmlns:a="http://schemas.openxmlformats.org/drawingml/2006/main">
               <a:ext uri="{FF2B5EF4-FFF2-40B4-BE49-F238E27FC236}">
-                <a16:creationId xmlns:a16="http://schemas.microsoft.com/office/drawing/2014/main" id="{FE3095B1-95A7-4C46-9423-ADFDBE6BEB56}"/>
+                <a16:creationId xmlns:a16="http://schemas.microsoft.com/office/drawing/2014/main" id="{745DD5DD-5CA6-48C0-B158-7BE4E1D97C1E}"/>
               </a:ext>
             </a:extLst>
           </p:cNvPr>
@@ -10047,7 +10105,7 @@
           <p:cNvPr id="61" name="Rectangle 61">
             <a:extLst xmlns:a="http://schemas.openxmlformats.org/drawingml/2006/main">
               <a:ext uri="{FF2B5EF4-FFF2-40B4-BE49-F238E27FC236}">
-                <a16:creationId xmlns:a16="http://schemas.microsoft.com/office/drawing/2014/main" id="{F2F8B957-07B9-4853-9D06-89B60C02379C}"/>
+                <a16:creationId xmlns:a16="http://schemas.microsoft.com/office/drawing/2014/main" id="{2AB94B85-B7D4-4528-8753-05C628700F1A}"/>
               </a:ext>
             </a:extLst>
           </p:cNvPr>
@@ -10079,7 +10137,7 @@
           <p:cNvPr id="62" name="TextBox 62">
             <a:extLst xmlns:a="http://schemas.openxmlformats.org/drawingml/2006/main">
               <a:ext uri="{FF2B5EF4-FFF2-40B4-BE49-F238E27FC236}">
-                <a16:creationId xmlns:a16="http://schemas.microsoft.com/office/drawing/2014/main" id="{7FEBC5B3-1B06-4289-92B0-E113894B96CD}"/>
+                <a16:creationId xmlns:a16="http://schemas.microsoft.com/office/drawing/2014/main" id="{0DE7BAF5-49A6-4E25-986C-6C28DFA80B63}"/>
               </a:ext>
             </a:extLst>
           </p:cNvPr>
@@ -10129,7 +10187,7 @@
           <p:cNvPr id="64" name="Rectangle 64">
             <a:extLst xmlns:a="http://schemas.openxmlformats.org/drawingml/2006/main">
               <a:ext uri="{FF2B5EF4-FFF2-40B4-BE49-F238E27FC236}">
-                <a16:creationId xmlns:a16="http://schemas.microsoft.com/office/drawing/2014/main" id="{C650CC1C-0E5E-4AA2-809D-49186A1529B3}"/>
+                <a16:creationId xmlns:a16="http://schemas.microsoft.com/office/drawing/2014/main" id="{AD250157-9495-4CB3-B5D7-615203B55070}"/>
               </a:ext>
             </a:extLst>
           </p:cNvPr>
@@ -10161,7 +10219,7 @@
           <p:cNvPr id="65" name="TextBox 65">
             <a:extLst xmlns:a="http://schemas.openxmlformats.org/drawingml/2006/main">
               <a:ext uri="{FF2B5EF4-FFF2-40B4-BE49-F238E27FC236}">
-                <a16:creationId xmlns:a16="http://schemas.microsoft.com/office/drawing/2014/main" id="{3A9A5E94-617D-44B8-93D9-4E6B5296F167}"/>
+                <a16:creationId xmlns:a16="http://schemas.microsoft.com/office/drawing/2014/main" id="{3BC12D7B-AD4C-48E9-AE1E-6039220D3907}"/>
               </a:ext>
             </a:extLst>
           </p:cNvPr>
@@ -10211,7 +10269,7 @@
           <p:cNvPr id="66" name="TextBox 66">
             <a:extLst xmlns:a="http://schemas.openxmlformats.org/drawingml/2006/main">
               <a:ext uri="{FF2B5EF4-FFF2-40B4-BE49-F238E27FC236}">
-                <a16:creationId xmlns:a16="http://schemas.microsoft.com/office/drawing/2014/main" id="{26080778-2B5B-49FF-A564-B2AEC24D1FB8}"/>
+                <a16:creationId xmlns:a16="http://schemas.microsoft.com/office/drawing/2014/main" id="{8B46BCF2-C600-4A3A-92CB-B6C6DA770957}"/>
               </a:ext>
             </a:extLst>
           </p:cNvPr>
@@ -10261,7 +10319,7 @@
           <p:cNvPr id="68" name="TextBox 68">
             <a:extLst xmlns:a="http://schemas.openxmlformats.org/drawingml/2006/main">
               <a:ext uri="{FF2B5EF4-FFF2-40B4-BE49-F238E27FC236}">
-                <a16:creationId xmlns:a16="http://schemas.microsoft.com/office/drawing/2014/main" id="{D3E53BEA-880C-4905-B9BD-3DB923A48E47}"/>
+                <a16:creationId xmlns:a16="http://schemas.microsoft.com/office/drawing/2014/main" id="{9E4A47D9-82B1-43C1-AAE3-D659A529819F}"/>
               </a:ext>
             </a:extLst>
           </p:cNvPr>
@@ -10311,7 +10369,7 @@
           <p:cNvPr id="69" name="TextBox 69">
             <a:extLst xmlns:a="http://schemas.openxmlformats.org/drawingml/2006/main">
               <a:ext uri="{FF2B5EF4-FFF2-40B4-BE49-F238E27FC236}">
-                <a16:creationId xmlns:a16="http://schemas.microsoft.com/office/drawing/2014/main" id="{A914A555-1AA8-4A37-A88B-0F45E58B28DE}"/>
+                <a16:creationId xmlns:a16="http://schemas.microsoft.com/office/drawing/2014/main" id="{217DCE45-EDA7-41D2-A160-BEBA741A1DAF}"/>
               </a:ext>
             </a:extLst>
           </p:cNvPr>
@@ -10359,7 +10417,7 @@
     </p:spTree>
     <p:extLst>
       <p:ext uri="{BB962C8B-B14F-4D97-AF65-F5344CB8AC3E}">
-        <p14:creationId xmlns:p14="http://schemas.microsoft.com/office/powerpoint/2010/main" val="1358538657"/>
+        <p14:creationId xmlns:p14="http://schemas.microsoft.com/office/powerpoint/2010/main" val="873721246"/>
       </p:ext>
     </p:extLst>
   </p:cSld>
@@ -10390,7 +10448,7 @@
           <p:cNvPr id="2" name="TextBox 2">
             <a:extLst xmlns:a="http://schemas.openxmlformats.org/drawingml/2006/main">
               <a:ext uri="{FF2B5EF4-FFF2-40B4-BE49-F238E27FC236}">
-                <a16:creationId xmlns:a16="http://schemas.microsoft.com/office/drawing/2014/main" id="{99A6F881-378B-479B-BAEA-92289D384FD2}"/>
+                <a16:creationId xmlns:a16="http://schemas.microsoft.com/office/drawing/2014/main" id="{C2AFEE7E-AB8F-44C9-A4FD-038A4695E115}"/>
               </a:ext>
             </a:extLst>
           </p:cNvPr>
@@ -10440,7 +10498,7 @@
           <p:cNvPr id="3" name="TextBox 3">
             <a:extLst xmlns:a="http://schemas.openxmlformats.org/drawingml/2006/main">
               <a:ext uri="{FF2B5EF4-FFF2-40B4-BE49-F238E27FC236}">
-                <a16:creationId xmlns:a16="http://schemas.microsoft.com/office/drawing/2014/main" id="{E8168EB3-3805-4040-8B69-BEDE7108AB6E}"/>
+                <a16:creationId xmlns:a16="http://schemas.microsoft.com/office/drawing/2014/main" id="{D0A1F801-1431-4D07-88C2-D86A308B25F0}"/>
               </a:ext>
             </a:extLst>
           </p:cNvPr>
@@ -10490,7 +10548,7 @@
           <p:cNvPr id="4" name="Freeform 4">
             <a:extLst xmlns:a="http://schemas.openxmlformats.org/drawingml/2006/main">
               <a:ext uri="{FF2B5EF4-FFF2-40B4-BE49-F238E27FC236}">
-                <a16:creationId xmlns:a16="http://schemas.microsoft.com/office/drawing/2014/main" id="{8B435786-38FA-4C4A-84B4-B0C00E260AA2}"/>
+                <a16:creationId xmlns:a16="http://schemas.microsoft.com/office/drawing/2014/main" id="{BD683AD1-E53C-4709-A1C4-1D31BE93DE9D}"/>
               </a:ext>
             </a:extLst>
           </p:cNvPr>
@@ -10539,7 +10597,7 @@
           <p:cNvPr id="5" name="Ellipse 5">
             <a:extLst xmlns:a="http://schemas.openxmlformats.org/drawingml/2006/main">
               <a:ext uri="{FF2B5EF4-FFF2-40B4-BE49-F238E27FC236}">
-                <a16:creationId xmlns:a16="http://schemas.microsoft.com/office/drawing/2014/main" id="{E3270ADF-726A-4D47-B984-6C3C42391909}"/>
+                <a16:creationId xmlns:a16="http://schemas.microsoft.com/office/drawing/2014/main" id="{51C30238-7670-4EEB-B9EE-D5192B8B310E}"/>
               </a:ext>
             </a:extLst>
           </p:cNvPr>
@@ -10569,7 +10627,7 @@
           <p:cNvPr id="6" name="Freeform 6">
             <a:extLst xmlns:a="http://schemas.openxmlformats.org/drawingml/2006/main">
               <a:ext uri="{FF2B5EF4-FFF2-40B4-BE49-F238E27FC236}">
-                <a16:creationId xmlns:a16="http://schemas.microsoft.com/office/drawing/2014/main" id="{51CCF1D8-73F9-438D-BE50-C8C617BA4F25}"/>
+                <a16:creationId xmlns:a16="http://schemas.microsoft.com/office/drawing/2014/main" id="{077CF63D-F0A9-450E-B5E5-D43EDBDF71CE}"/>
               </a:ext>
             </a:extLst>
           </p:cNvPr>
@@ -10638,7 +10696,7 @@
           <p:cNvPr id="7" name="Freeform 7">
             <a:extLst xmlns:a="http://schemas.openxmlformats.org/drawingml/2006/main">
               <a:ext uri="{FF2B5EF4-FFF2-40B4-BE49-F238E27FC236}">
-                <a16:creationId xmlns:a16="http://schemas.microsoft.com/office/drawing/2014/main" id="{EBAE2118-30EB-4C78-A955-DA0B1408622F}"/>
+                <a16:creationId xmlns:a16="http://schemas.microsoft.com/office/drawing/2014/main" id="{B93A0E2C-D225-4085-A9FA-8CCDD378B15F}"/>
               </a:ext>
             </a:extLst>
           </p:cNvPr>
@@ -10678,7 +10736,7 @@
           <p:cNvPr id="8" name="Freeform 8">
             <a:extLst xmlns:a="http://schemas.openxmlformats.org/drawingml/2006/main">
               <a:ext uri="{FF2B5EF4-FFF2-40B4-BE49-F238E27FC236}">
-                <a16:creationId xmlns:a16="http://schemas.microsoft.com/office/drawing/2014/main" id="{D2E50D2E-42E6-4687-8563-A6A316A5B6B9}"/>
+                <a16:creationId xmlns:a16="http://schemas.microsoft.com/office/drawing/2014/main" id="{516843DB-C4E1-4802-B559-D806B7B7371D}"/>
               </a:ext>
             </a:extLst>
           </p:cNvPr>
@@ -10718,7 +10776,7 @@
           <p:cNvPr id="9" name="Freeform 9">
             <a:extLst xmlns:a="http://schemas.openxmlformats.org/drawingml/2006/main">
               <a:ext uri="{FF2B5EF4-FFF2-40B4-BE49-F238E27FC236}">
-                <a16:creationId xmlns:a16="http://schemas.microsoft.com/office/drawing/2014/main" id="{09D4BAF8-23B9-405E-8FD1-C822E2E68FD2}"/>
+                <a16:creationId xmlns:a16="http://schemas.microsoft.com/office/drawing/2014/main" id="{FB058AD6-4908-4088-AC54-F31225538AAD}"/>
               </a:ext>
             </a:extLst>
           </p:cNvPr>
@@ -10758,7 +10816,7 @@
           <p:cNvPr id="10" name="Freeform 10">
             <a:extLst xmlns:a="http://schemas.openxmlformats.org/drawingml/2006/main">
               <a:ext uri="{FF2B5EF4-FFF2-40B4-BE49-F238E27FC236}">
-                <a16:creationId xmlns:a16="http://schemas.microsoft.com/office/drawing/2014/main" id="{CE81F0A3-4898-40B4-A3AE-EA2F6A6CD2C2}"/>
+                <a16:creationId xmlns:a16="http://schemas.microsoft.com/office/drawing/2014/main" id="{5E91681A-CDE6-4E53-8DBB-818FEFCAF332}"/>
               </a:ext>
             </a:extLst>
           </p:cNvPr>
@@ -10798,7 +10856,7 @@
           <p:cNvPr id="11" name="Freeform 11">
             <a:extLst xmlns:a="http://schemas.openxmlformats.org/drawingml/2006/main">
               <a:ext uri="{FF2B5EF4-FFF2-40B4-BE49-F238E27FC236}">
-                <a16:creationId xmlns:a16="http://schemas.microsoft.com/office/drawing/2014/main" id="{A7960768-DBCA-49BB-B0CB-7FDF76A8EFBB}"/>
+                <a16:creationId xmlns:a16="http://schemas.microsoft.com/office/drawing/2014/main" id="{963D6C12-420B-466E-BB56-064B8EA4E45F}"/>
               </a:ext>
             </a:extLst>
           </p:cNvPr>
@@ -10838,7 +10896,7 @@
           <p:cNvPr id="12" name="Freeform 12">
             <a:extLst xmlns:a="http://schemas.openxmlformats.org/drawingml/2006/main">
               <a:ext uri="{FF2B5EF4-FFF2-40B4-BE49-F238E27FC236}">
-                <a16:creationId xmlns:a16="http://schemas.microsoft.com/office/drawing/2014/main" id="{D160505A-6B07-47C9-8CE5-9FFA76729061}"/>
+                <a16:creationId xmlns:a16="http://schemas.microsoft.com/office/drawing/2014/main" id="{6D54076E-A756-4475-AFD3-5669D3C6BD8A}"/>
               </a:ext>
             </a:extLst>
           </p:cNvPr>
@@ -10878,7 +10936,7 @@
           <p:cNvPr id="13" name="Freeform 13">
             <a:extLst xmlns:a="http://schemas.openxmlformats.org/drawingml/2006/main">
               <a:ext uri="{FF2B5EF4-FFF2-40B4-BE49-F238E27FC236}">
-                <a16:creationId xmlns:a16="http://schemas.microsoft.com/office/drawing/2014/main" id="{C7350F68-C27F-4F9E-ABDE-7E6DC5DEF0EE}"/>
+                <a16:creationId xmlns:a16="http://schemas.microsoft.com/office/drawing/2014/main" id="{E5D4AB59-F665-4AB6-B4FD-DA5EDEBF0127}"/>
               </a:ext>
             </a:extLst>
           </p:cNvPr>
@@ -10918,7 +10976,7 @@
           <p:cNvPr id="14" name="Freeform 14">
             <a:extLst xmlns:a="http://schemas.openxmlformats.org/drawingml/2006/main">
               <a:ext uri="{FF2B5EF4-FFF2-40B4-BE49-F238E27FC236}">
-                <a16:creationId xmlns:a16="http://schemas.microsoft.com/office/drawing/2014/main" id="{E4338E7E-BA21-46A3-8CA1-97C78A0F4F12}"/>
+                <a16:creationId xmlns:a16="http://schemas.microsoft.com/office/drawing/2014/main" id="{1C23C6C6-13E5-4A99-9675-39EAA0BAA1F8}"/>
               </a:ext>
             </a:extLst>
           </p:cNvPr>
@@ -10958,7 +11016,7 @@
           <p:cNvPr id="16" name="TextBox 16">
             <a:extLst xmlns:a="http://schemas.openxmlformats.org/drawingml/2006/main">
               <a:ext uri="{FF2B5EF4-FFF2-40B4-BE49-F238E27FC236}">
-                <a16:creationId xmlns:a16="http://schemas.microsoft.com/office/drawing/2014/main" id="{7FEC8231-0400-4334-9F1D-C67A3A18D859}"/>
+                <a16:creationId xmlns:a16="http://schemas.microsoft.com/office/drawing/2014/main" id="{47E32D9B-7A81-4A35-B23C-E7696058AF52}"/>
               </a:ext>
             </a:extLst>
           </p:cNvPr>
@@ -11008,7 +11066,7 @@
           <p:cNvPr id="17" name="TextBox 17">
             <a:extLst xmlns:a="http://schemas.openxmlformats.org/drawingml/2006/main">
               <a:ext uri="{FF2B5EF4-FFF2-40B4-BE49-F238E27FC236}">
-                <a16:creationId xmlns:a16="http://schemas.microsoft.com/office/drawing/2014/main" id="{8F0936AD-4253-484C-A26B-ECFC9DD4D8B8}"/>
+                <a16:creationId xmlns:a16="http://schemas.microsoft.com/office/drawing/2014/main" id="{B7C32D82-6BBA-47D7-9619-5DF390CF9511}"/>
               </a:ext>
             </a:extLst>
           </p:cNvPr>
@@ -11058,7 +11116,7 @@
           <p:cNvPr id="18" name="TextBox 18">
             <a:extLst xmlns:a="http://schemas.openxmlformats.org/drawingml/2006/main">
               <a:ext uri="{FF2B5EF4-FFF2-40B4-BE49-F238E27FC236}">
-                <a16:creationId xmlns:a16="http://schemas.microsoft.com/office/drawing/2014/main" id="{0B55D815-BCFA-410A-A9C0-4E64E48B76DF}"/>
+                <a16:creationId xmlns:a16="http://schemas.microsoft.com/office/drawing/2014/main" id="{2D6CED7D-9CFB-4B9C-AC7A-6D5110A82967}"/>
               </a:ext>
             </a:extLst>
           </p:cNvPr>
@@ -11108,7 +11166,7 @@
           <p:cNvPr id="19" name="Freeform 19">
             <a:extLst xmlns:a="http://schemas.openxmlformats.org/drawingml/2006/main">
               <a:ext uri="{FF2B5EF4-FFF2-40B4-BE49-F238E27FC236}">
-                <a16:creationId xmlns:a16="http://schemas.microsoft.com/office/drawing/2014/main" id="{96749E6F-7DBC-4DAC-BF0B-1695FE44E745}"/>
+                <a16:creationId xmlns:a16="http://schemas.microsoft.com/office/drawing/2014/main" id="{660B187E-A8D7-4A9A-A99A-76E69E56508A}"/>
               </a:ext>
             </a:extLst>
           </p:cNvPr>
@@ -11148,7 +11206,7 @@
           <p:cNvPr id="20" name="TextBox 20">
             <a:extLst xmlns:a="http://schemas.openxmlformats.org/drawingml/2006/main">
               <a:ext uri="{FF2B5EF4-FFF2-40B4-BE49-F238E27FC236}">
-                <a16:creationId xmlns:a16="http://schemas.microsoft.com/office/drawing/2014/main" id="{2DF2EA6F-A22F-4FAE-B97D-011FD29B2323}"/>
+                <a16:creationId xmlns:a16="http://schemas.microsoft.com/office/drawing/2014/main" id="{96CB6212-CD4B-4A43-AAA1-6ABBF93F5170}"/>
               </a:ext>
             </a:extLst>
           </p:cNvPr>
@@ -11198,7 +11256,7 @@
           <p:cNvPr id="21" name="TextBox 21">
             <a:extLst xmlns:a="http://schemas.openxmlformats.org/drawingml/2006/main">
               <a:ext uri="{FF2B5EF4-FFF2-40B4-BE49-F238E27FC236}">
-                <a16:creationId xmlns:a16="http://schemas.microsoft.com/office/drawing/2014/main" id="{D35A5C2E-D577-4048-8626-C4C457E35A3D}"/>
+                <a16:creationId xmlns:a16="http://schemas.microsoft.com/office/drawing/2014/main" id="{0E0010BF-7E0B-41C1-9A0A-2E05E7104DCC}"/>
               </a:ext>
             </a:extLst>
           </p:cNvPr>
@@ -11248,7 +11306,7 @@
           <p:cNvPr id="22" name="TextBox 22">
             <a:extLst xmlns:a="http://schemas.openxmlformats.org/drawingml/2006/main">
               <a:ext uri="{FF2B5EF4-FFF2-40B4-BE49-F238E27FC236}">
-                <a16:creationId xmlns:a16="http://schemas.microsoft.com/office/drawing/2014/main" id="{2A530242-5957-4AC7-AE69-6D860ABFC845}"/>
+                <a16:creationId xmlns:a16="http://schemas.microsoft.com/office/drawing/2014/main" id="{295C99C4-57A0-4D63-928C-B70FEA6263EF}"/>
               </a:ext>
             </a:extLst>
           </p:cNvPr>
@@ -11298,7 +11356,7 @@
           <p:cNvPr id="24" name="Freeform 24">
             <a:extLst xmlns:a="http://schemas.openxmlformats.org/drawingml/2006/main">
               <a:ext uri="{FF2B5EF4-FFF2-40B4-BE49-F238E27FC236}">
-                <a16:creationId xmlns:a16="http://schemas.microsoft.com/office/drawing/2014/main" id="{A3EA34B4-95AC-40EE-A0F2-7201CE0D51C4}"/>
+                <a16:creationId xmlns:a16="http://schemas.microsoft.com/office/drawing/2014/main" id="{0A1B4BA1-1E9E-41B7-9E0D-93B271D6E39D}"/>
               </a:ext>
             </a:extLst>
           </p:cNvPr>
@@ -11347,7 +11405,7 @@
           <p:cNvPr id="25" name="Ellipse 25">
             <a:extLst xmlns:a="http://schemas.openxmlformats.org/drawingml/2006/main">
               <a:ext uri="{FF2B5EF4-FFF2-40B4-BE49-F238E27FC236}">
-                <a16:creationId xmlns:a16="http://schemas.microsoft.com/office/drawing/2014/main" id="{63CD24E1-009C-4D22-96CD-2F7BA18A6F16}"/>
+                <a16:creationId xmlns:a16="http://schemas.microsoft.com/office/drawing/2014/main" id="{2EAE36C2-CB04-41B9-BE51-C4AB039210B6}"/>
               </a:ext>
             </a:extLst>
           </p:cNvPr>
@@ -11377,7 +11435,7 @@
           <p:cNvPr id="26" name="Freeform 26">
             <a:extLst xmlns:a="http://schemas.openxmlformats.org/drawingml/2006/main">
               <a:ext uri="{FF2B5EF4-FFF2-40B4-BE49-F238E27FC236}">
-                <a16:creationId xmlns:a16="http://schemas.microsoft.com/office/drawing/2014/main" id="{25BC239E-EC67-4137-9346-A24F8F18D609}"/>
+                <a16:creationId xmlns:a16="http://schemas.microsoft.com/office/drawing/2014/main" id="{2356E5E8-FCB4-467C-955A-52BE043A4757}"/>
               </a:ext>
             </a:extLst>
           </p:cNvPr>
@@ -11434,7 +11492,7 @@
           <p:cNvPr id="27" name="Freeform 27">
             <a:extLst xmlns:a="http://schemas.openxmlformats.org/drawingml/2006/main">
               <a:ext uri="{FF2B5EF4-FFF2-40B4-BE49-F238E27FC236}">
-                <a16:creationId xmlns:a16="http://schemas.microsoft.com/office/drawing/2014/main" id="{63BB3D0B-8BE6-4512-B28D-C6C51149316D}"/>
+                <a16:creationId xmlns:a16="http://schemas.microsoft.com/office/drawing/2014/main" id="{EBF3433C-9D52-4278-B0CF-14655BE0252F}"/>
               </a:ext>
             </a:extLst>
           </p:cNvPr>
@@ -11477,7 +11535,7 @@
           <p:cNvPr id="29" name="TextBox 29">
             <a:extLst xmlns:a="http://schemas.openxmlformats.org/drawingml/2006/main">
               <a:ext uri="{FF2B5EF4-FFF2-40B4-BE49-F238E27FC236}">
-                <a16:creationId xmlns:a16="http://schemas.microsoft.com/office/drawing/2014/main" id="{BC9D7D97-3955-497F-B749-6DF5C264F197}"/>
+                <a16:creationId xmlns:a16="http://schemas.microsoft.com/office/drawing/2014/main" id="{00B58B9A-862E-487D-961C-2206E937D528}"/>
               </a:ext>
             </a:extLst>
           </p:cNvPr>
@@ -11527,7 +11585,7 @@
           <p:cNvPr id="30" name="TextBox 30">
             <a:extLst xmlns:a="http://schemas.openxmlformats.org/drawingml/2006/main">
               <a:ext uri="{FF2B5EF4-FFF2-40B4-BE49-F238E27FC236}">
-                <a16:creationId xmlns:a16="http://schemas.microsoft.com/office/drawing/2014/main" id="{BBBF3134-CFAD-444C-A436-3BFCC19B7A0E}"/>
+                <a16:creationId xmlns:a16="http://schemas.microsoft.com/office/drawing/2014/main" id="{5B9242BD-7920-41E7-8EF6-F56592560390}"/>
               </a:ext>
             </a:extLst>
           </p:cNvPr>
@@ -11577,7 +11635,7 @@
           <p:cNvPr id="31" name="TextBox 31">
             <a:extLst xmlns:a="http://schemas.openxmlformats.org/drawingml/2006/main">
               <a:ext uri="{FF2B5EF4-FFF2-40B4-BE49-F238E27FC236}">
-                <a16:creationId xmlns:a16="http://schemas.microsoft.com/office/drawing/2014/main" id="{5295F0ED-68F4-41A4-A937-E996CEBD0A05}"/>
+                <a16:creationId xmlns:a16="http://schemas.microsoft.com/office/drawing/2014/main" id="{5E6B2B6B-7D54-4832-8307-D0FFCD497D00}"/>
               </a:ext>
             </a:extLst>
           </p:cNvPr>
@@ -11627,7 +11685,7 @@
           <p:cNvPr id="32" name="Freeform 32">
             <a:extLst xmlns:a="http://schemas.openxmlformats.org/drawingml/2006/main">
               <a:ext uri="{FF2B5EF4-FFF2-40B4-BE49-F238E27FC236}">
-                <a16:creationId xmlns:a16="http://schemas.microsoft.com/office/drawing/2014/main" id="{599EBFE0-CB67-4DE5-B15B-6237946C7DEA}"/>
+                <a16:creationId xmlns:a16="http://schemas.microsoft.com/office/drawing/2014/main" id="{4905BBAD-8460-434E-BB94-02BB7830EA1B}"/>
               </a:ext>
             </a:extLst>
           </p:cNvPr>
@@ -11667,7 +11725,7 @@
           <p:cNvPr id="33" name="TextBox 33">
             <a:extLst xmlns:a="http://schemas.openxmlformats.org/drawingml/2006/main">
               <a:ext uri="{FF2B5EF4-FFF2-40B4-BE49-F238E27FC236}">
-                <a16:creationId xmlns:a16="http://schemas.microsoft.com/office/drawing/2014/main" id="{C98CB182-F0D6-4EC7-98FF-FD4313BD36EC}"/>
+                <a16:creationId xmlns:a16="http://schemas.microsoft.com/office/drawing/2014/main" id="{E6343F69-8445-495A-8191-163E333581AF}"/>
               </a:ext>
             </a:extLst>
           </p:cNvPr>
@@ -11717,7 +11775,7 @@
           <p:cNvPr id="34" name="TextBox 34">
             <a:extLst xmlns:a="http://schemas.openxmlformats.org/drawingml/2006/main">
               <a:ext uri="{FF2B5EF4-FFF2-40B4-BE49-F238E27FC236}">
-                <a16:creationId xmlns:a16="http://schemas.microsoft.com/office/drawing/2014/main" id="{9C9F86C3-6C17-4155-9E54-62AD5693218F}"/>
+                <a16:creationId xmlns:a16="http://schemas.microsoft.com/office/drawing/2014/main" id="{96C4A1DA-BCF5-4635-80FE-F4CB297988C1}"/>
               </a:ext>
             </a:extLst>
           </p:cNvPr>
@@ -11767,7 +11825,7 @@
           <p:cNvPr id="35" name="TextBox 35">
             <a:extLst xmlns:a="http://schemas.openxmlformats.org/drawingml/2006/main">
               <a:ext uri="{FF2B5EF4-FFF2-40B4-BE49-F238E27FC236}">
-                <a16:creationId xmlns:a16="http://schemas.microsoft.com/office/drawing/2014/main" id="{31F977A0-1D84-4693-BB60-F8A946583F68}"/>
+                <a16:creationId xmlns:a16="http://schemas.microsoft.com/office/drawing/2014/main" id="{A39B57D5-6595-4306-8C54-E125115C7FEB}"/>
               </a:ext>
             </a:extLst>
           </p:cNvPr>
@@ -11817,7 +11875,7 @@
           <p:cNvPr id="37" name="Line 37">
             <a:extLst xmlns:a="http://schemas.openxmlformats.org/drawingml/2006/main">
               <a:ext uri="{FF2B5EF4-FFF2-40B4-BE49-F238E27FC236}">
-                <a16:creationId xmlns:a16="http://schemas.microsoft.com/office/drawing/2014/main" id="{5D05328B-F6D8-486E-BABB-0918FF0984F3}"/>
+                <a16:creationId xmlns:a16="http://schemas.microsoft.com/office/drawing/2014/main" id="{C51B95B5-9F04-4144-8BDC-FE7F9BDD33CE}"/>
               </a:ext>
             </a:extLst>
           </p:cNvPr>
@@ -11857,7 +11915,7 @@
           <p:cNvPr id="38" name="Rectangle 38">
             <a:extLst xmlns:a="http://schemas.openxmlformats.org/drawingml/2006/main">
               <a:ext uri="{FF2B5EF4-FFF2-40B4-BE49-F238E27FC236}">
-                <a16:creationId xmlns:a16="http://schemas.microsoft.com/office/drawing/2014/main" id="{5F50D754-9457-4D73-8D68-7B8643494C75}"/>
+                <a16:creationId xmlns:a16="http://schemas.microsoft.com/office/drawing/2014/main" id="{BD4E589D-D05B-42AF-A73D-64BC3D24E385}"/>
               </a:ext>
             </a:extLst>
           </p:cNvPr>
@@ -11891,7 +11949,7 @@
           <p:cNvPr id="39" name="Freeform 39">
             <a:extLst xmlns:a="http://schemas.openxmlformats.org/drawingml/2006/main">
               <a:ext uri="{FF2B5EF4-FFF2-40B4-BE49-F238E27FC236}">
-                <a16:creationId xmlns:a16="http://schemas.microsoft.com/office/drawing/2014/main" id="{6D24DF77-DE1B-4C6F-AE35-56632F2F6225}"/>
+                <a16:creationId xmlns:a16="http://schemas.microsoft.com/office/drawing/2014/main" id="{17C47370-25C2-44B5-8120-8BFBEC6B6196}"/>
               </a:ext>
             </a:extLst>
           </p:cNvPr>
@@ -11960,7 +12018,7 @@
           <p:cNvPr id="40" name="Freeform 40">
             <a:extLst xmlns:a="http://schemas.openxmlformats.org/drawingml/2006/main">
               <a:ext uri="{FF2B5EF4-FFF2-40B4-BE49-F238E27FC236}">
-                <a16:creationId xmlns:a16="http://schemas.microsoft.com/office/drawing/2014/main" id="{A5FE4C18-1986-4615-A1F3-2A5840A675D7}"/>
+                <a16:creationId xmlns:a16="http://schemas.microsoft.com/office/drawing/2014/main" id="{9AB64718-5A2D-4918-88BD-8CCB3D161E35}"/>
               </a:ext>
             </a:extLst>
           </p:cNvPr>
@@ -12017,7 +12075,7 @@
           <p:cNvPr id="41" name="Freeform 41">
             <a:extLst xmlns:a="http://schemas.openxmlformats.org/drawingml/2006/main">
               <a:ext uri="{FF2B5EF4-FFF2-40B4-BE49-F238E27FC236}">
-                <a16:creationId xmlns:a16="http://schemas.microsoft.com/office/drawing/2014/main" id="{5B031BB1-0660-416F-AF5B-1D020FDD91E4}"/>
+                <a16:creationId xmlns:a16="http://schemas.microsoft.com/office/drawing/2014/main" id="{716288AC-E5C4-4057-A1EC-20B1A409C2D9}"/>
               </a:ext>
             </a:extLst>
           </p:cNvPr>
@@ -12070,7 +12128,7 @@
           <p:cNvPr id="43" name="TextBox 43">
             <a:extLst xmlns:a="http://schemas.openxmlformats.org/drawingml/2006/main">
               <a:ext uri="{FF2B5EF4-FFF2-40B4-BE49-F238E27FC236}">
-                <a16:creationId xmlns:a16="http://schemas.microsoft.com/office/drawing/2014/main" id="{DB0FC2AD-0480-4722-908F-E06146DC96AD}"/>
+                <a16:creationId xmlns:a16="http://schemas.microsoft.com/office/drawing/2014/main" id="{18955F7B-18A4-4796-A778-AE99814DB62E}"/>
               </a:ext>
             </a:extLst>
           </p:cNvPr>
@@ -12120,7 +12178,7 @@
           <p:cNvPr id="45" name="TextBox 45">
             <a:extLst xmlns:a="http://schemas.openxmlformats.org/drawingml/2006/main">
               <a:ext uri="{FF2B5EF4-FFF2-40B4-BE49-F238E27FC236}">
-                <a16:creationId xmlns:a16="http://schemas.microsoft.com/office/drawing/2014/main" id="{0282C8E7-FEC2-4083-B3A6-1FF7D695CA3C}"/>
+                <a16:creationId xmlns:a16="http://schemas.microsoft.com/office/drawing/2014/main" id="{5E84F380-4087-4311-99B9-789AD6B91F68}"/>
               </a:ext>
             </a:extLst>
           </p:cNvPr>
@@ -12170,7 +12228,7 @@
           <p:cNvPr id="46" name="TextBox 46">
             <a:extLst xmlns:a="http://schemas.openxmlformats.org/drawingml/2006/main">
               <a:ext uri="{FF2B5EF4-FFF2-40B4-BE49-F238E27FC236}">
-                <a16:creationId xmlns:a16="http://schemas.microsoft.com/office/drawing/2014/main" id="{C380CBE4-2D2F-4441-B3CB-F06C707F3016}"/>
+                <a16:creationId xmlns:a16="http://schemas.microsoft.com/office/drawing/2014/main" id="{AF5A69D5-BC75-442C-8FBC-486153915F8F}"/>
               </a:ext>
             </a:extLst>
           </p:cNvPr>
@@ -12218,7 +12276,7 @@
     </p:spTree>
     <p:extLst>
       <p:ext uri="{BB962C8B-B14F-4D97-AF65-F5344CB8AC3E}">
-        <p14:creationId xmlns:p14="http://schemas.microsoft.com/office/powerpoint/2010/main" val="1417073376"/>
+        <p14:creationId xmlns:p14="http://schemas.microsoft.com/office/powerpoint/2010/main" val="869807525"/>
       </p:ext>
     </p:extLst>
   </p:cSld>
@@ -12249,7 +12307,7 @@
           <p:cNvPr id="2" name="TextBox 2">
             <a:extLst xmlns:a="http://schemas.openxmlformats.org/drawingml/2006/main">
               <a:ext uri="{FF2B5EF4-FFF2-40B4-BE49-F238E27FC236}">
-                <a16:creationId xmlns:a16="http://schemas.microsoft.com/office/drawing/2014/main" id="{FF2BDC15-2762-4B8D-8ACA-496BFBA85201}"/>
+                <a16:creationId xmlns:a16="http://schemas.microsoft.com/office/drawing/2014/main" id="{0E30DA68-6790-4333-8D17-CEC77CC72653}"/>
               </a:ext>
             </a:extLst>
           </p:cNvPr>
@@ -12299,7 +12357,7 @@
           <p:cNvPr id="3" name="TextBox 3">
             <a:extLst xmlns:a="http://schemas.openxmlformats.org/drawingml/2006/main">
               <a:ext uri="{FF2B5EF4-FFF2-40B4-BE49-F238E27FC236}">
-                <a16:creationId xmlns:a16="http://schemas.microsoft.com/office/drawing/2014/main" id="{CA7BC437-A1ED-4217-85D5-B0D3DD19FDDE}"/>
+                <a16:creationId xmlns:a16="http://schemas.microsoft.com/office/drawing/2014/main" id="{ED4F131B-7FD0-4ADB-8612-B6CFDE9FA7FE}"/>
               </a:ext>
             </a:extLst>
           </p:cNvPr>
@@ -12349,7 +12407,7 @@
           <p:cNvPr id="4" name="TextBox 4">
             <a:extLst xmlns:a="http://schemas.openxmlformats.org/drawingml/2006/main">
               <a:ext uri="{FF2B5EF4-FFF2-40B4-BE49-F238E27FC236}">
-                <a16:creationId xmlns:a16="http://schemas.microsoft.com/office/drawing/2014/main" id="{080C23D9-1E5E-4122-ABA6-5724EEEF1A32}"/>
+                <a16:creationId xmlns:a16="http://schemas.microsoft.com/office/drawing/2014/main" id="{47572967-6F74-4FE1-8E44-02FA9E3FFE78}"/>
               </a:ext>
             </a:extLst>
           </p:cNvPr>
@@ -12399,7 +12457,7 @@
           <p:cNvPr id="5" name="Ellipse 5">
             <a:extLst xmlns:a="http://schemas.openxmlformats.org/drawingml/2006/main">
               <a:ext uri="{FF2B5EF4-FFF2-40B4-BE49-F238E27FC236}">
-                <a16:creationId xmlns:a16="http://schemas.microsoft.com/office/drawing/2014/main" id="{6906326C-92E3-4D6D-A607-F8E57CAEE5CE}"/>
+                <a16:creationId xmlns:a16="http://schemas.microsoft.com/office/drawing/2014/main" id="{24E4DA8D-3A1E-4272-9E6B-FF9BC8A55BA2}"/>
               </a:ext>
             </a:extLst>
           </p:cNvPr>
@@ -12431,7 +12489,7 @@
           <p:cNvPr id="6" name="Freeform 6">
             <a:extLst xmlns:a="http://schemas.openxmlformats.org/drawingml/2006/main">
               <a:ext uri="{FF2B5EF4-FFF2-40B4-BE49-F238E27FC236}">
-                <a16:creationId xmlns:a16="http://schemas.microsoft.com/office/drawing/2014/main" id="{4C5A63F4-556D-4E23-9720-6B201754CA2F}"/>
+                <a16:creationId xmlns:a16="http://schemas.microsoft.com/office/drawing/2014/main" id="{44FC9001-3107-4491-A868-39B00503DC43}"/>
               </a:ext>
             </a:extLst>
           </p:cNvPr>
@@ -12479,7 +12537,7 @@
           <p:cNvPr id="7" name="Freeform 7">
             <a:extLst xmlns:a="http://schemas.openxmlformats.org/drawingml/2006/main">
               <a:ext uri="{FF2B5EF4-FFF2-40B4-BE49-F238E27FC236}">
-                <a16:creationId xmlns:a16="http://schemas.microsoft.com/office/drawing/2014/main" id="{2F5B312E-D476-48FF-A619-BDD5E4B8598D}"/>
+                <a16:creationId xmlns:a16="http://schemas.microsoft.com/office/drawing/2014/main" id="{4E99A3D8-FBF4-4B8C-BAEA-ABAA1948D11F}"/>
               </a:ext>
             </a:extLst>
           </p:cNvPr>
@@ -12546,7 +12604,7 @@
           <p:cNvPr id="8" name="Freeform 8">
             <a:extLst xmlns:a="http://schemas.openxmlformats.org/drawingml/2006/main">
               <a:ext uri="{FF2B5EF4-FFF2-40B4-BE49-F238E27FC236}">
-                <a16:creationId xmlns:a16="http://schemas.microsoft.com/office/drawing/2014/main" id="{066CEAFD-DEC8-4E66-B882-A849D9048A5C}"/>
+                <a16:creationId xmlns:a16="http://schemas.microsoft.com/office/drawing/2014/main" id="{F1A7C9B8-F256-491F-98BF-1D6918DD6F16}"/>
               </a:ext>
             </a:extLst>
           </p:cNvPr>
@@ -12589,7 +12647,7 @@
           <p:cNvPr id="10" name="TextBox 10">
             <a:extLst xmlns:a="http://schemas.openxmlformats.org/drawingml/2006/main">
               <a:ext uri="{FF2B5EF4-FFF2-40B4-BE49-F238E27FC236}">
-                <a16:creationId xmlns:a16="http://schemas.microsoft.com/office/drawing/2014/main" id="{686345EB-D760-41E1-9D4F-6A25778BAF20}"/>
+                <a16:creationId xmlns:a16="http://schemas.microsoft.com/office/drawing/2014/main" id="{54462C46-24F7-429B-98A2-2D8B91F7F640}"/>
               </a:ext>
             </a:extLst>
           </p:cNvPr>
@@ -12639,7 +12697,7 @@
           <p:cNvPr id="11" name="TextBox 11">
             <a:extLst xmlns:a="http://schemas.openxmlformats.org/drawingml/2006/main">
               <a:ext uri="{FF2B5EF4-FFF2-40B4-BE49-F238E27FC236}">
-                <a16:creationId xmlns:a16="http://schemas.microsoft.com/office/drawing/2014/main" id="{B88A1D43-75BC-4ECE-BC2F-1ECFE9F0D71B}"/>
+                <a16:creationId xmlns:a16="http://schemas.microsoft.com/office/drawing/2014/main" id="{371FA420-747A-4476-A7FC-0973F62B6944}"/>
               </a:ext>
             </a:extLst>
           </p:cNvPr>
@@ -12689,7 +12747,7 @@
           <p:cNvPr id="13" name="Freeform 13">
             <a:extLst xmlns:a="http://schemas.openxmlformats.org/drawingml/2006/main">
               <a:ext uri="{FF2B5EF4-FFF2-40B4-BE49-F238E27FC236}">
-                <a16:creationId xmlns:a16="http://schemas.microsoft.com/office/drawing/2014/main" id="{DB4837FC-31A5-46F0-9719-A2C97B57E77A}"/>
+                <a16:creationId xmlns:a16="http://schemas.microsoft.com/office/drawing/2014/main" id="{3A290AFF-EA03-4E58-813F-7EDA3C06F133}"/>
               </a:ext>
             </a:extLst>
           </p:cNvPr>
@@ -12729,7 +12787,7 @@
           <p:cNvPr id="14" name="Freeform 14">
             <a:extLst xmlns:a="http://schemas.openxmlformats.org/drawingml/2006/main">
               <a:ext uri="{FF2B5EF4-FFF2-40B4-BE49-F238E27FC236}">
-                <a16:creationId xmlns:a16="http://schemas.microsoft.com/office/drawing/2014/main" id="{66723D0D-F162-4F96-90EA-1F5EDA946F9B}"/>
+                <a16:creationId xmlns:a16="http://schemas.microsoft.com/office/drawing/2014/main" id="{A9D0F54F-9B0D-4B8E-8787-F6EF70B23818}"/>
               </a:ext>
             </a:extLst>
           </p:cNvPr>
@@ -12772,7 +12830,7 @@
           <p:cNvPr id="15" name="TextBox 15">
             <a:extLst xmlns:a="http://schemas.openxmlformats.org/drawingml/2006/main">
               <a:ext uri="{FF2B5EF4-FFF2-40B4-BE49-F238E27FC236}">
-                <a16:creationId xmlns:a16="http://schemas.microsoft.com/office/drawing/2014/main" id="{8413F5C3-2CE0-4588-82A1-400E9520E546}"/>
+                <a16:creationId xmlns:a16="http://schemas.microsoft.com/office/drawing/2014/main" id="{7E9C97B3-7E7D-4DA2-8548-1457A15D6FF9}"/>
               </a:ext>
             </a:extLst>
           </p:cNvPr>
@@ -12822,7 +12880,7 @@
           <p:cNvPr id="16" name="Ellipse 16">
             <a:extLst xmlns:a="http://schemas.openxmlformats.org/drawingml/2006/main">
               <a:ext uri="{FF2B5EF4-FFF2-40B4-BE49-F238E27FC236}">
-                <a16:creationId xmlns:a16="http://schemas.microsoft.com/office/drawing/2014/main" id="{401DC12C-4D6D-44BA-AE55-44EA1DA5A2EA}"/>
+                <a16:creationId xmlns:a16="http://schemas.microsoft.com/office/drawing/2014/main" id="{2E32C9AC-E94E-4CC3-90F6-882601730AAC}"/>
               </a:ext>
             </a:extLst>
           </p:cNvPr>
@@ -12854,7 +12912,7 @@
           <p:cNvPr id="17" name="Ellipse 17">
             <a:extLst xmlns:a="http://schemas.openxmlformats.org/drawingml/2006/main">
               <a:ext uri="{FF2B5EF4-FFF2-40B4-BE49-F238E27FC236}">
-                <a16:creationId xmlns:a16="http://schemas.microsoft.com/office/drawing/2014/main" id="{21DCAAE7-ECE1-4CC0-A022-A0F0BB48DA9F}"/>
+                <a16:creationId xmlns:a16="http://schemas.microsoft.com/office/drawing/2014/main" id="{1C6C794E-E1C8-4AEB-8A82-5CADF0ADE872}"/>
               </a:ext>
             </a:extLst>
           </p:cNvPr>
@@ -12884,7 +12942,7 @@
           <p:cNvPr id="18" name="TextBox 18">
             <a:extLst xmlns:a="http://schemas.openxmlformats.org/drawingml/2006/main">
               <a:ext uri="{FF2B5EF4-FFF2-40B4-BE49-F238E27FC236}">
-                <a16:creationId xmlns:a16="http://schemas.microsoft.com/office/drawing/2014/main" id="{23A3E2AB-C9FA-4684-8EC1-A89CCA1694B5}"/>
+                <a16:creationId xmlns:a16="http://schemas.microsoft.com/office/drawing/2014/main" id="{B800AB92-558A-4DD8-B2A2-FA49D3F31DD2}"/>
               </a:ext>
             </a:extLst>
           </p:cNvPr>
@@ -12934,7 +12992,7 @@
           <p:cNvPr id="19" name="TextBox 19">
             <a:extLst xmlns:a="http://schemas.openxmlformats.org/drawingml/2006/main">
               <a:ext uri="{FF2B5EF4-FFF2-40B4-BE49-F238E27FC236}">
-                <a16:creationId xmlns:a16="http://schemas.microsoft.com/office/drawing/2014/main" id="{14213A98-9501-45C0-B1BD-57C3D4713666}"/>
+                <a16:creationId xmlns:a16="http://schemas.microsoft.com/office/drawing/2014/main" id="{8386E91B-E04B-4D67-8DF9-5BAF532F1682}"/>
               </a:ext>
             </a:extLst>
           </p:cNvPr>
@@ -12984,7 +13042,7 @@
           <p:cNvPr id="21" name="Freeform 21">
             <a:extLst xmlns:a="http://schemas.openxmlformats.org/drawingml/2006/main">
               <a:ext uri="{FF2B5EF4-FFF2-40B4-BE49-F238E27FC236}">
-                <a16:creationId xmlns:a16="http://schemas.microsoft.com/office/drawing/2014/main" id="{8AE0FA90-C48D-444C-BD34-EFE87D7D3979}"/>
+                <a16:creationId xmlns:a16="http://schemas.microsoft.com/office/drawing/2014/main" id="{864F2E69-B1FD-4AEC-91E7-8A1CCD74764A}"/>
               </a:ext>
             </a:extLst>
           </p:cNvPr>
@@ -13024,7 +13082,7 @@
           <p:cNvPr id="22" name="Freeform 22">
             <a:extLst xmlns:a="http://schemas.openxmlformats.org/drawingml/2006/main">
               <a:ext uri="{FF2B5EF4-FFF2-40B4-BE49-F238E27FC236}">
-                <a16:creationId xmlns:a16="http://schemas.microsoft.com/office/drawing/2014/main" id="{93351C52-1859-450D-8AAC-4BEB3B6B99C0}"/>
+                <a16:creationId xmlns:a16="http://schemas.microsoft.com/office/drawing/2014/main" id="{0CD4F6BD-6ECF-4D74-9B19-C510801A5AB0}"/>
               </a:ext>
             </a:extLst>
           </p:cNvPr>
@@ -13067,7 +13125,7 @@
           <p:cNvPr id="23" name="TextBox 23">
             <a:extLst xmlns:a="http://schemas.openxmlformats.org/drawingml/2006/main">
               <a:ext uri="{FF2B5EF4-FFF2-40B4-BE49-F238E27FC236}">
-                <a16:creationId xmlns:a16="http://schemas.microsoft.com/office/drawing/2014/main" id="{5E4B0D78-B62D-477F-9867-63704B7ACA0B}"/>
+                <a16:creationId xmlns:a16="http://schemas.microsoft.com/office/drawing/2014/main" id="{7D81B738-19E6-4470-8339-A2001A363EF0}"/>
               </a:ext>
             </a:extLst>
           </p:cNvPr>
@@ -13117,7 +13175,7 @@
           <p:cNvPr id="24" name="Ellipse 24">
             <a:extLst xmlns:a="http://schemas.openxmlformats.org/drawingml/2006/main">
               <a:ext uri="{FF2B5EF4-FFF2-40B4-BE49-F238E27FC236}">
-                <a16:creationId xmlns:a16="http://schemas.microsoft.com/office/drawing/2014/main" id="{8B481FA6-34FE-4D90-B509-10334E04BD9D}"/>
+                <a16:creationId xmlns:a16="http://schemas.microsoft.com/office/drawing/2014/main" id="{8776C40C-248B-4EF3-9183-BB739EAEA28F}"/>
               </a:ext>
             </a:extLst>
           </p:cNvPr>
@@ -13149,7 +13207,7 @@
           <p:cNvPr id="25" name="Freeform 25">
             <a:extLst xmlns:a="http://schemas.openxmlformats.org/drawingml/2006/main">
               <a:ext uri="{FF2B5EF4-FFF2-40B4-BE49-F238E27FC236}">
-                <a16:creationId xmlns:a16="http://schemas.microsoft.com/office/drawing/2014/main" id="{35D1ED77-F90B-4E29-B244-A744A103987F}"/>
+                <a16:creationId xmlns:a16="http://schemas.microsoft.com/office/drawing/2014/main" id="{CCA10114-3E41-4FD7-BFB7-3F5754C15B40}"/>
               </a:ext>
             </a:extLst>
           </p:cNvPr>
@@ -13205,7 +13263,7 @@
           <p:cNvPr id="26" name="Freeform 26">
             <a:extLst xmlns:a="http://schemas.openxmlformats.org/drawingml/2006/main">
               <a:ext uri="{FF2B5EF4-FFF2-40B4-BE49-F238E27FC236}">
-                <a16:creationId xmlns:a16="http://schemas.microsoft.com/office/drawing/2014/main" id="{2F0302D8-2623-4A60-8FB1-883D1577C2D4}"/>
+                <a16:creationId xmlns:a16="http://schemas.microsoft.com/office/drawing/2014/main" id="{4A2DD8DB-9CCD-41AF-A37A-AC0428444105}"/>
               </a:ext>
             </a:extLst>
           </p:cNvPr>
@@ -13261,7 +13319,7 @@
           <p:cNvPr id="28" name="TextBox 28">
             <a:extLst xmlns:a="http://schemas.openxmlformats.org/drawingml/2006/main">
               <a:ext uri="{FF2B5EF4-FFF2-40B4-BE49-F238E27FC236}">
-                <a16:creationId xmlns:a16="http://schemas.microsoft.com/office/drawing/2014/main" id="{E6ABF99E-51D7-411C-AB27-5FD49F91E6F3}"/>
+                <a16:creationId xmlns:a16="http://schemas.microsoft.com/office/drawing/2014/main" id="{7B3FFA77-39C9-4C2F-9D76-3BF07D2AB98E}"/>
               </a:ext>
             </a:extLst>
           </p:cNvPr>
@@ -13311,7 +13369,7 @@
           <p:cNvPr id="29" name="TextBox 29">
             <a:extLst xmlns:a="http://schemas.openxmlformats.org/drawingml/2006/main">
               <a:ext uri="{FF2B5EF4-FFF2-40B4-BE49-F238E27FC236}">
-                <a16:creationId xmlns:a16="http://schemas.microsoft.com/office/drawing/2014/main" id="{DD477E6F-208D-4871-AF54-A878BB79ABC8}"/>
+                <a16:creationId xmlns:a16="http://schemas.microsoft.com/office/drawing/2014/main" id="{BC8E0B12-7CF0-4AEB-A48B-5DFDF7FD8DB8}"/>
               </a:ext>
             </a:extLst>
           </p:cNvPr>
@@ -13361,7 +13419,7 @@
           <p:cNvPr id="31" name="Rectangle 31">
             <a:extLst xmlns:a="http://schemas.openxmlformats.org/drawingml/2006/main">
               <a:ext uri="{FF2B5EF4-FFF2-40B4-BE49-F238E27FC236}">
-                <a16:creationId xmlns:a16="http://schemas.microsoft.com/office/drawing/2014/main" id="{F1BF389C-BA5B-41A5-91CE-FBED12874303}"/>
+                <a16:creationId xmlns:a16="http://schemas.microsoft.com/office/drawing/2014/main" id="{89D34892-B59B-4C65-B15E-D3505373330D}"/>
               </a:ext>
             </a:extLst>
           </p:cNvPr>
@@ -13395,7 +13453,7 @@
           <p:cNvPr id="32" name="TextBox 32">
             <a:extLst xmlns:a="http://schemas.openxmlformats.org/drawingml/2006/main">
               <a:ext uri="{FF2B5EF4-FFF2-40B4-BE49-F238E27FC236}">
-                <a16:creationId xmlns:a16="http://schemas.microsoft.com/office/drawing/2014/main" id="{F88384F4-0584-4E4D-B20A-42C158716A1F}"/>
+                <a16:creationId xmlns:a16="http://schemas.microsoft.com/office/drawing/2014/main" id="{8CA88000-F904-4D3A-8FEB-067652303A12}"/>
               </a:ext>
             </a:extLst>
           </p:cNvPr>
@@ -13445,7 +13503,7 @@
           <p:cNvPr id="33" name="TextBox 33">
             <a:extLst xmlns:a="http://schemas.openxmlformats.org/drawingml/2006/main">
               <a:ext uri="{FF2B5EF4-FFF2-40B4-BE49-F238E27FC236}">
-                <a16:creationId xmlns:a16="http://schemas.microsoft.com/office/drawing/2014/main" id="{CD30F084-ECB2-480C-8F68-D61478893BF6}"/>
+                <a16:creationId xmlns:a16="http://schemas.microsoft.com/office/drawing/2014/main" id="{8C4A7D75-1756-4C65-9631-133B436D49FA}"/>
               </a:ext>
             </a:extLst>
           </p:cNvPr>
@@ -13495,7 +13553,7 @@
           <p:cNvPr id="34" name="Rectangle 34">
             <a:extLst xmlns:a="http://schemas.openxmlformats.org/drawingml/2006/main">
               <a:ext uri="{FF2B5EF4-FFF2-40B4-BE49-F238E27FC236}">
-                <a16:creationId xmlns:a16="http://schemas.microsoft.com/office/drawing/2014/main" id="{5DA92CD1-B3C3-4A6A-A8F9-0910CA9F7CC9}"/>
+                <a16:creationId xmlns:a16="http://schemas.microsoft.com/office/drawing/2014/main" id="{F5675D26-E5F3-4441-AD56-05859E049DA2}"/>
               </a:ext>
             </a:extLst>
           </p:cNvPr>
@@ -13529,7 +13587,7 @@
           <p:cNvPr id="35" name="TextBox 35">
             <a:extLst xmlns:a="http://schemas.openxmlformats.org/drawingml/2006/main">
               <a:ext uri="{FF2B5EF4-FFF2-40B4-BE49-F238E27FC236}">
-                <a16:creationId xmlns:a16="http://schemas.microsoft.com/office/drawing/2014/main" id="{7ED8AE11-9BB3-40D6-B2A8-FC22FF1AA599}"/>
+                <a16:creationId xmlns:a16="http://schemas.microsoft.com/office/drawing/2014/main" id="{92CFA1F0-E86E-44F3-9644-F1C4B4480B0F}"/>
               </a:ext>
             </a:extLst>
           </p:cNvPr>
@@ -13579,7 +13637,7 @@
           <p:cNvPr id="36" name="TextBox 36">
             <a:extLst xmlns:a="http://schemas.openxmlformats.org/drawingml/2006/main">
               <a:ext uri="{FF2B5EF4-FFF2-40B4-BE49-F238E27FC236}">
-                <a16:creationId xmlns:a16="http://schemas.microsoft.com/office/drawing/2014/main" id="{180DE683-4C0C-4EF0-B7DD-08C240EC8D06}"/>
+                <a16:creationId xmlns:a16="http://schemas.microsoft.com/office/drawing/2014/main" id="{C04ED288-92A9-4447-8E79-DEED899208AA}"/>
               </a:ext>
             </a:extLst>
           </p:cNvPr>
@@ -13629,7 +13687,7 @@
           <p:cNvPr id="38" name="Rectangle 38">
             <a:extLst xmlns:a="http://schemas.openxmlformats.org/drawingml/2006/main">
               <a:ext uri="{FF2B5EF4-FFF2-40B4-BE49-F238E27FC236}">
-                <a16:creationId xmlns:a16="http://schemas.microsoft.com/office/drawing/2014/main" id="{20F03AA0-A76D-4E73-AD90-9DAF6FDDD940}"/>
+                <a16:creationId xmlns:a16="http://schemas.microsoft.com/office/drawing/2014/main" id="{8E939551-F35C-456E-848E-357ABC25681F}"/>
               </a:ext>
             </a:extLst>
           </p:cNvPr>
@@ -13661,7 +13719,7 @@
           <p:cNvPr id="39" name="TextBox 39">
             <a:extLst xmlns:a="http://schemas.openxmlformats.org/drawingml/2006/main">
               <a:ext uri="{FF2B5EF4-FFF2-40B4-BE49-F238E27FC236}">
-                <a16:creationId xmlns:a16="http://schemas.microsoft.com/office/drawing/2014/main" id="{401C30A0-5D5A-4385-9AE0-F50BF66DE36F}"/>
+                <a16:creationId xmlns:a16="http://schemas.microsoft.com/office/drawing/2014/main" id="{B01F98CE-73F0-40D3-9FAA-672D2B4EA439}"/>
               </a:ext>
             </a:extLst>
           </p:cNvPr>
@@ -13711,7 +13769,7 @@
           <p:cNvPr id="40" name="TextBox 40">
             <a:extLst xmlns:a="http://schemas.openxmlformats.org/drawingml/2006/main">
               <a:ext uri="{FF2B5EF4-FFF2-40B4-BE49-F238E27FC236}">
-                <a16:creationId xmlns:a16="http://schemas.microsoft.com/office/drawing/2014/main" id="{561FE4B8-A89A-4F9E-B17E-98445DE5471A}"/>
+                <a16:creationId xmlns:a16="http://schemas.microsoft.com/office/drawing/2014/main" id="{33F0A744-C337-4156-A695-FACE14B6B94B}"/>
               </a:ext>
             </a:extLst>
           </p:cNvPr>
@@ -13761,7 +13819,7 @@
           <p:cNvPr id="42" name="TextBox 42">
             <a:extLst xmlns:a="http://schemas.openxmlformats.org/drawingml/2006/main">
               <a:ext uri="{FF2B5EF4-FFF2-40B4-BE49-F238E27FC236}">
-                <a16:creationId xmlns:a16="http://schemas.microsoft.com/office/drawing/2014/main" id="{2262AEA4-C938-4BE5-A492-BCC0BC1E2518}"/>
+                <a16:creationId xmlns:a16="http://schemas.microsoft.com/office/drawing/2014/main" id="{60EF2C62-4536-499D-AFF5-6D09C5E49EDE}"/>
               </a:ext>
             </a:extLst>
           </p:cNvPr>
@@ -13811,7 +13869,7 @@
           <p:cNvPr id="43" name="TextBox 43">
             <a:extLst xmlns:a="http://schemas.openxmlformats.org/drawingml/2006/main">
               <a:ext uri="{FF2B5EF4-FFF2-40B4-BE49-F238E27FC236}">
-                <a16:creationId xmlns:a16="http://schemas.microsoft.com/office/drawing/2014/main" id="{E2407CA6-2A45-41F3-8737-168FDA0C174E}"/>
+                <a16:creationId xmlns:a16="http://schemas.microsoft.com/office/drawing/2014/main" id="{C2572446-22D8-4D28-934A-297702CCB5E6}"/>
               </a:ext>
             </a:extLst>
           </p:cNvPr>
@@ -13859,7 +13917,7 @@
     </p:spTree>
     <p:extLst>
       <p:ext uri="{BB962C8B-B14F-4D97-AF65-F5344CB8AC3E}">
-        <p14:creationId xmlns:p14="http://schemas.microsoft.com/office/powerpoint/2010/main" val="1515500989"/>
+        <p14:creationId xmlns:p14="http://schemas.microsoft.com/office/powerpoint/2010/main" val="675392350"/>
       </p:ext>
     </p:extLst>
   </p:cSld>
@@ -13890,7 +13948,7 @@
           <p:cNvPr id="2" name="TextBox 2">
             <a:extLst xmlns:a="http://schemas.openxmlformats.org/drawingml/2006/main">
               <a:ext uri="{FF2B5EF4-FFF2-40B4-BE49-F238E27FC236}">
-                <a16:creationId xmlns:a16="http://schemas.microsoft.com/office/drawing/2014/main" id="{F6AC708D-903E-49C8-B715-C4B1C4A7CE42}"/>
+                <a16:creationId xmlns:a16="http://schemas.microsoft.com/office/drawing/2014/main" id="{1D91D043-A9EB-4455-95FF-08A604265816}"/>
               </a:ext>
             </a:extLst>
           </p:cNvPr>
@@ -13940,7 +13998,7 @@
           <p:cNvPr id="3" name="TextBox 3">
             <a:extLst xmlns:a="http://schemas.openxmlformats.org/drawingml/2006/main">
               <a:ext uri="{FF2B5EF4-FFF2-40B4-BE49-F238E27FC236}">
-                <a16:creationId xmlns:a16="http://schemas.microsoft.com/office/drawing/2014/main" id="{F6C77B12-74F3-43CB-86C7-DAE4B69911D5}"/>
+                <a16:creationId xmlns:a16="http://schemas.microsoft.com/office/drawing/2014/main" id="{CFA326A6-7871-4E70-842A-1BD6200FAA91}"/>
               </a:ext>
             </a:extLst>
           </p:cNvPr>
@@ -13990,7 +14048,7 @@
           <p:cNvPr id="4" name="TextBox 4">
             <a:extLst xmlns:a="http://schemas.openxmlformats.org/drawingml/2006/main">
               <a:ext uri="{FF2B5EF4-FFF2-40B4-BE49-F238E27FC236}">
-                <a16:creationId xmlns:a16="http://schemas.microsoft.com/office/drawing/2014/main" id="{D3FC96F0-9CFC-4610-B8B7-9F722EE8ACD7}"/>
+                <a16:creationId xmlns:a16="http://schemas.microsoft.com/office/drawing/2014/main" id="{2EC11FCB-F49D-4627-BEF8-61CAB9E5AC90}"/>
               </a:ext>
             </a:extLst>
           </p:cNvPr>
@@ -14040,7 +14098,7 @@
           <p:cNvPr id="5" name="TextBox 5">
             <a:extLst xmlns:a="http://schemas.openxmlformats.org/drawingml/2006/main">
               <a:ext uri="{FF2B5EF4-FFF2-40B4-BE49-F238E27FC236}">
-                <a16:creationId xmlns:a16="http://schemas.microsoft.com/office/drawing/2014/main" id="{E3BB51ED-5895-4439-9AB7-125597B2ADFA}"/>
+                <a16:creationId xmlns:a16="http://schemas.microsoft.com/office/drawing/2014/main" id="{041E4649-5384-4FCD-BA6E-28640094ACC7}"/>
               </a:ext>
             </a:extLst>
           </p:cNvPr>
@@ -14090,7 +14148,7 @@
           <p:cNvPr id="6" name="Line 6">
             <a:extLst xmlns:a="http://schemas.openxmlformats.org/drawingml/2006/main">
               <a:ext uri="{FF2B5EF4-FFF2-40B4-BE49-F238E27FC236}">
-                <a16:creationId xmlns:a16="http://schemas.microsoft.com/office/drawing/2014/main" id="{F17596E9-C8B1-4108-96A6-DE9A8DCE0929}"/>
+                <a16:creationId xmlns:a16="http://schemas.microsoft.com/office/drawing/2014/main" id="{4AC28EEF-EBC9-431E-96EF-4172F8B7528D}"/>
               </a:ext>
             </a:extLst>
           </p:cNvPr>
@@ -14130,7 +14188,7 @@
           <p:cNvPr id="7" name="TextBox 7">
             <a:extLst xmlns:a="http://schemas.openxmlformats.org/drawingml/2006/main">
               <a:ext uri="{FF2B5EF4-FFF2-40B4-BE49-F238E27FC236}">
-                <a16:creationId xmlns:a16="http://schemas.microsoft.com/office/drawing/2014/main" id="{291619F3-9597-4296-8113-DD9C2929F37E}"/>
+                <a16:creationId xmlns:a16="http://schemas.microsoft.com/office/drawing/2014/main" id="{E9882240-3185-49D6-BA4C-1AC809215610}"/>
               </a:ext>
             </a:extLst>
           </p:cNvPr>
@@ -14180,7 +14238,7 @@
           <p:cNvPr id="8" name="TextBox 8">
             <a:extLst xmlns:a="http://schemas.openxmlformats.org/drawingml/2006/main">
               <a:ext uri="{FF2B5EF4-FFF2-40B4-BE49-F238E27FC236}">
-                <a16:creationId xmlns:a16="http://schemas.microsoft.com/office/drawing/2014/main" id="{A0778DFE-8D99-4112-97C9-ADBA3D68E768}"/>
+                <a16:creationId xmlns:a16="http://schemas.microsoft.com/office/drawing/2014/main" id="{DAB451B1-C794-467C-B5F2-E847AA22816C}"/>
               </a:ext>
             </a:extLst>
           </p:cNvPr>
@@ -14230,7 +14288,7 @@
           <p:cNvPr id="9" name="Line 9">
             <a:extLst xmlns:a="http://schemas.openxmlformats.org/drawingml/2006/main">
               <a:ext uri="{FF2B5EF4-FFF2-40B4-BE49-F238E27FC236}">
-                <a16:creationId xmlns:a16="http://schemas.microsoft.com/office/drawing/2014/main" id="{3E4AEC42-370A-484D-8725-05C2A5BB9D10}"/>
+                <a16:creationId xmlns:a16="http://schemas.microsoft.com/office/drawing/2014/main" id="{0D060DA4-DBE3-461A-8A12-738CFFF36B66}"/>
               </a:ext>
             </a:extLst>
           </p:cNvPr>
@@ -14270,7 +14328,7 @@
           <p:cNvPr id="10" name="TextBox 10">
             <a:extLst xmlns:a="http://schemas.openxmlformats.org/drawingml/2006/main">
               <a:ext uri="{FF2B5EF4-FFF2-40B4-BE49-F238E27FC236}">
-                <a16:creationId xmlns:a16="http://schemas.microsoft.com/office/drawing/2014/main" id="{E4C27A7B-7DA5-4CA1-82A8-8006306462C1}"/>
+                <a16:creationId xmlns:a16="http://schemas.microsoft.com/office/drawing/2014/main" id="{95D14137-6EA9-479C-B1BA-82C1B26CAD9D}"/>
               </a:ext>
             </a:extLst>
           </p:cNvPr>
@@ -14320,7 +14378,7 @@
           <p:cNvPr id="11" name="TextBox 11">
             <a:extLst xmlns:a="http://schemas.openxmlformats.org/drawingml/2006/main">
               <a:ext uri="{FF2B5EF4-FFF2-40B4-BE49-F238E27FC236}">
-                <a16:creationId xmlns:a16="http://schemas.microsoft.com/office/drawing/2014/main" id="{37C228E8-51B9-46BA-BD3D-2EDB2B6009DB}"/>
+                <a16:creationId xmlns:a16="http://schemas.microsoft.com/office/drawing/2014/main" id="{D8C07120-A978-4E9B-B99D-EFA59CCC01C7}"/>
               </a:ext>
             </a:extLst>
           </p:cNvPr>
@@ -14370,7 +14428,7 @@
           <p:cNvPr id="12" name="TextBox 12">
             <a:extLst xmlns:a="http://schemas.openxmlformats.org/drawingml/2006/main">
               <a:ext uri="{FF2B5EF4-FFF2-40B4-BE49-F238E27FC236}">
-                <a16:creationId xmlns:a16="http://schemas.microsoft.com/office/drawing/2014/main" id="{9D7D792B-7DFE-4F26-A278-841781B32DE0}"/>
+                <a16:creationId xmlns:a16="http://schemas.microsoft.com/office/drawing/2014/main" id="{8BBC5FDD-0D99-4B9A-96A1-3C66194EA4E6}"/>
               </a:ext>
             </a:extLst>
           </p:cNvPr>
@@ -14420,7 +14478,7 @@
           <p:cNvPr id="14" name="Freeform 14">
             <a:extLst xmlns:a="http://schemas.openxmlformats.org/drawingml/2006/main">
               <a:ext uri="{FF2B5EF4-FFF2-40B4-BE49-F238E27FC236}">
-                <a16:creationId xmlns:a16="http://schemas.microsoft.com/office/drawing/2014/main" id="{55A488BD-1EC1-4A2F-87EA-BCF16A98FD6B}"/>
+                <a16:creationId xmlns:a16="http://schemas.microsoft.com/office/drawing/2014/main" id="{6EF06F08-753C-405F-85EA-6E3B8A27AA53}"/>
               </a:ext>
             </a:extLst>
           </p:cNvPr>
@@ -14460,7 +14518,7 @@
           <p:cNvPr id="15" name="Ellipse 15">
             <a:extLst xmlns:a="http://schemas.openxmlformats.org/drawingml/2006/main">
               <a:ext uri="{FF2B5EF4-FFF2-40B4-BE49-F238E27FC236}">
-                <a16:creationId xmlns:a16="http://schemas.microsoft.com/office/drawing/2014/main" id="{202EA54D-E68B-409E-9851-B57BF32E3745}"/>
+                <a16:creationId xmlns:a16="http://schemas.microsoft.com/office/drawing/2014/main" id="{0840BA54-3798-49A7-BA3E-3C2705634252}"/>
               </a:ext>
             </a:extLst>
           </p:cNvPr>
@@ -14490,7 +14548,7 @@
           <p:cNvPr id="16" name="Freeform 16">
             <a:extLst xmlns:a="http://schemas.openxmlformats.org/drawingml/2006/main">
               <a:ext uri="{FF2B5EF4-FFF2-40B4-BE49-F238E27FC236}">
-                <a16:creationId xmlns:a16="http://schemas.microsoft.com/office/drawing/2014/main" id="{0A609D3D-E989-4E9E-9C39-FC0DC5333C81}"/>
+                <a16:creationId xmlns:a16="http://schemas.microsoft.com/office/drawing/2014/main" id="{D1432E0A-31DC-4A56-9F5C-9E5AB4E4A43F}"/>
               </a:ext>
             </a:extLst>
           </p:cNvPr>
@@ -14547,7 +14605,7 @@
           <p:cNvPr id="17" name="Freeform 17">
             <a:extLst xmlns:a="http://schemas.openxmlformats.org/drawingml/2006/main">
               <a:ext uri="{FF2B5EF4-FFF2-40B4-BE49-F238E27FC236}">
-                <a16:creationId xmlns:a16="http://schemas.microsoft.com/office/drawing/2014/main" id="{F148DACE-6D8C-4A58-8171-7617E7CA1C59}"/>
+                <a16:creationId xmlns:a16="http://schemas.microsoft.com/office/drawing/2014/main" id="{FBABFF0F-2AC4-4A54-8AE0-05816AFECBA6}"/>
               </a:ext>
             </a:extLst>
           </p:cNvPr>
@@ -14600,7 +14658,7 @@
           <p:cNvPr id="18" name="Freeform 18">
             <a:extLst xmlns:a="http://schemas.openxmlformats.org/drawingml/2006/main">
               <a:ext uri="{FF2B5EF4-FFF2-40B4-BE49-F238E27FC236}">
-                <a16:creationId xmlns:a16="http://schemas.microsoft.com/office/drawing/2014/main" id="{E9AC0F7A-46D6-421A-9293-C105D66FD8AB}"/>
+                <a16:creationId xmlns:a16="http://schemas.microsoft.com/office/drawing/2014/main" id="{85ABFFFA-8A14-4688-A500-6422472C50E3}"/>
               </a:ext>
             </a:extLst>
           </p:cNvPr>
@@ -14653,7 +14711,7 @@
           <p:cNvPr id="20" name="TextBox 20">
             <a:extLst xmlns:a="http://schemas.openxmlformats.org/drawingml/2006/main">
               <a:ext uri="{FF2B5EF4-FFF2-40B4-BE49-F238E27FC236}">
-                <a16:creationId xmlns:a16="http://schemas.microsoft.com/office/drawing/2014/main" id="{A4FE58D5-D874-4B04-9BE5-F71814F39BCC}"/>
+                <a16:creationId xmlns:a16="http://schemas.microsoft.com/office/drawing/2014/main" id="{9ADA2373-465F-4F3E-8F78-A8254AB97976}"/>
               </a:ext>
             </a:extLst>
           </p:cNvPr>
@@ -14703,7 +14761,7 @@
           <p:cNvPr id="21" name="TextBox 21">
             <a:extLst xmlns:a="http://schemas.openxmlformats.org/drawingml/2006/main">
               <a:ext uri="{FF2B5EF4-FFF2-40B4-BE49-F238E27FC236}">
-                <a16:creationId xmlns:a16="http://schemas.microsoft.com/office/drawing/2014/main" id="{99BB8A65-F89F-4F72-8614-38641BF3CE71}"/>
+                <a16:creationId xmlns:a16="http://schemas.microsoft.com/office/drawing/2014/main" id="{EF997830-F685-49C8-B341-C48D00310F92}"/>
               </a:ext>
             </a:extLst>
           </p:cNvPr>
@@ -14753,7 +14811,7 @@
           <p:cNvPr id="23" name="Ellipse 23">
             <a:extLst xmlns:a="http://schemas.openxmlformats.org/drawingml/2006/main">
               <a:ext uri="{FF2B5EF4-FFF2-40B4-BE49-F238E27FC236}">
-                <a16:creationId xmlns:a16="http://schemas.microsoft.com/office/drawing/2014/main" id="{C9CBA8AE-1EA3-4B26-B4AA-A6A4113ABF26}"/>
+                <a16:creationId xmlns:a16="http://schemas.microsoft.com/office/drawing/2014/main" id="{D791290A-C6DA-41CD-B12D-D75EE3D9C97A}"/>
               </a:ext>
             </a:extLst>
           </p:cNvPr>
@@ -14783,7 +14841,7 @@
           <p:cNvPr id="24" name="TextBox 24">
             <a:extLst xmlns:a="http://schemas.openxmlformats.org/drawingml/2006/main">
               <a:ext uri="{FF2B5EF4-FFF2-40B4-BE49-F238E27FC236}">
-                <a16:creationId xmlns:a16="http://schemas.microsoft.com/office/drawing/2014/main" id="{6F5B5061-3ED2-496D-8B0C-961056A1FB24}"/>
+                <a16:creationId xmlns:a16="http://schemas.microsoft.com/office/drawing/2014/main" id="{30E04F87-A2A4-4CC6-AE99-470A8E4C50D1}"/>
               </a:ext>
             </a:extLst>
           </p:cNvPr>
@@ -14833,7 +14891,7 @@
           <p:cNvPr id="25" name="TextBox 25">
             <a:extLst xmlns:a="http://schemas.openxmlformats.org/drawingml/2006/main">
               <a:ext uri="{FF2B5EF4-FFF2-40B4-BE49-F238E27FC236}">
-                <a16:creationId xmlns:a16="http://schemas.microsoft.com/office/drawing/2014/main" id="{380E1927-832A-4758-A7BE-D61384945DDD}"/>
+                <a16:creationId xmlns:a16="http://schemas.microsoft.com/office/drawing/2014/main" id="{8E8F099B-5430-4249-B192-4C564EB6A899}"/>
               </a:ext>
             </a:extLst>
           </p:cNvPr>
@@ -14883,7 +14941,7 @@
           <p:cNvPr id="26" name="TextBox 26">
             <a:extLst xmlns:a="http://schemas.openxmlformats.org/drawingml/2006/main">
               <a:ext uri="{FF2B5EF4-FFF2-40B4-BE49-F238E27FC236}">
-                <a16:creationId xmlns:a16="http://schemas.microsoft.com/office/drawing/2014/main" id="{531E5FB9-D172-46D1-9910-A6ABC658A416}"/>
+                <a16:creationId xmlns:a16="http://schemas.microsoft.com/office/drawing/2014/main" id="{8D766EC6-BD05-4A14-99EB-596C804EA969}"/>
               </a:ext>
             </a:extLst>
           </p:cNvPr>
@@ -14933,7 +14991,7 @@
           <p:cNvPr id="28" name="Ellipse 28">
             <a:extLst xmlns:a="http://schemas.openxmlformats.org/drawingml/2006/main">
               <a:ext uri="{FF2B5EF4-FFF2-40B4-BE49-F238E27FC236}">
-                <a16:creationId xmlns:a16="http://schemas.microsoft.com/office/drawing/2014/main" id="{C2A0A0E0-CFBD-4483-871F-9246B8420C4E}"/>
+                <a16:creationId xmlns:a16="http://schemas.microsoft.com/office/drawing/2014/main" id="{10DEACB1-B512-462E-9BC1-709E7D703483}"/>
               </a:ext>
             </a:extLst>
           </p:cNvPr>
@@ -14963,7 +15021,7 @@
           <p:cNvPr id="29" name="Freeform 29">
             <a:extLst xmlns:a="http://schemas.openxmlformats.org/drawingml/2006/main">
               <a:ext uri="{FF2B5EF4-FFF2-40B4-BE49-F238E27FC236}">
-                <a16:creationId xmlns:a16="http://schemas.microsoft.com/office/drawing/2014/main" id="{8D43C41F-9351-402B-863A-499FFCD5C3D9}"/>
+                <a16:creationId xmlns:a16="http://schemas.microsoft.com/office/drawing/2014/main" id="{13610098-B086-444F-B2B5-F9F508F1E2EA}"/>
               </a:ext>
             </a:extLst>
           </p:cNvPr>
@@ -15020,7 +15078,7 @@
           <p:cNvPr id="30" name="Freeform 30">
             <a:extLst xmlns:a="http://schemas.openxmlformats.org/drawingml/2006/main">
               <a:ext uri="{FF2B5EF4-FFF2-40B4-BE49-F238E27FC236}">
-                <a16:creationId xmlns:a16="http://schemas.microsoft.com/office/drawing/2014/main" id="{A564E2B7-A9F3-4931-8A0A-2AD43C1E60D8}"/>
+                <a16:creationId xmlns:a16="http://schemas.microsoft.com/office/drawing/2014/main" id="{4406E71D-3325-41FF-81F4-8139207DCDC5}"/>
               </a:ext>
             </a:extLst>
           </p:cNvPr>
@@ -15077,7 +15135,7 @@
           <p:cNvPr id="31" name="Freeform 31">
             <a:extLst xmlns:a="http://schemas.openxmlformats.org/drawingml/2006/main">
               <a:ext uri="{FF2B5EF4-FFF2-40B4-BE49-F238E27FC236}">
-                <a16:creationId xmlns:a16="http://schemas.microsoft.com/office/drawing/2014/main" id="{B23EEC3B-C09D-4DDE-81FE-1F4F6D62AF2F}"/>
+                <a16:creationId xmlns:a16="http://schemas.microsoft.com/office/drawing/2014/main" id="{200C40DC-22A2-49E1-A0BB-7DF7018C8E3B}"/>
               </a:ext>
             </a:extLst>
           </p:cNvPr>
@@ -15134,7 +15192,7 @@
           <p:cNvPr id="32" name="Freeform 32">
             <a:extLst xmlns:a="http://schemas.openxmlformats.org/drawingml/2006/main">
               <a:ext uri="{FF2B5EF4-FFF2-40B4-BE49-F238E27FC236}">
-                <a16:creationId xmlns:a16="http://schemas.microsoft.com/office/drawing/2014/main" id="{3258A2A9-9662-4988-8A3C-9B955A8B1AF2}"/>
+                <a16:creationId xmlns:a16="http://schemas.microsoft.com/office/drawing/2014/main" id="{082CDE54-A39C-46C8-871F-C671F148AF2B}"/>
               </a:ext>
             </a:extLst>
           </p:cNvPr>
@@ -15191,7 +15249,7 @@
           <p:cNvPr id="33" name="Freeform 33">
             <a:extLst xmlns:a="http://schemas.openxmlformats.org/drawingml/2006/main">
               <a:ext uri="{FF2B5EF4-FFF2-40B4-BE49-F238E27FC236}">
-                <a16:creationId xmlns:a16="http://schemas.microsoft.com/office/drawing/2014/main" id="{503A8B78-06F0-46CB-9E02-ABC1D54A351C}"/>
+                <a16:creationId xmlns:a16="http://schemas.microsoft.com/office/drawing/2014/main" id="{B26BF19C-96E7-4F65-B722-AF934FF2C4FA}"/>
               </a:ext>
             </a:extLst>
           </p:cNvPr>
@@ -15248,7 +15306,7 @@
           <p:cNvPr id="34" name="Freeform 34">
             <a:extLst xmlns:a="http://schemas.openxmlformats.org/drawingml/2006/main">
               <a:ext uri="{FF2B5EF4-FFF2-40B4-BE49-F238E27FC236}">
-                <a16:creationId xmlns:a16="http://schemas.microsoft.com/office/drawing/2014/main" id="{9A350A70-F1FA-4AD7-9ABB-BFC78DDEA9A6}"/>
+                <a16:creationId xmlns:a16="http://schemas.microsoft.com/office/drawing/2014/main" id="{5A50800A-27A3-42CF-A9B5-2C6898BC8AEB}"/>
               </a:ext>
             </a:extLst>
           </p:cNvPr>
@@ -15288,7 +15346,7 @@
           <p:cNvPr id="35" name="Freeform 35">
             <a:extLst xmlns:a="http://schemas.openxmlformats.org/drawingml/2006/main">
               <a:ext uri="{FF2B5EF4-FFF2-40B4-BE49-F238E27FC236}">
-                <a16:creationId xmlns:a16="http://schemas.microsoft.com/office/drawing/2014/main" id="{0CAB50FD-4863-4057-88E1-99E176C1C4C6}"/>
+                <a16:creationId xmlns:a16="http://schemas.microsoft.com/office/drawing/2014/main" id="{18A5BA53-F8B6-4315-84BA-461260650105}"/>
               </a:ext>
             </a:extLst>
           </p:cNvPr>
@@ -15328,7 +15386,7 @@
           <p:cNvPr id="36" name="Freeform 36">
             <a:extLst xmlns:a="http://schemas.openxmlformats.org/drawingml/2006/main">
               <a:ext uri="{FF2B5EF4-FFF2-40B4-BE49-F238E27FC236}">
-                <a16:creationId xmlns:a16="http://schemas.microsoft.com/office/drawing/2014/main" id="{4BDAECC7-81D9-4117-BD31-BC86ACAA0421}"/>
+                <a16:creationId xmlns:a16="http://schemas.microsoft.com/office/drawing/2014/main" id="{61DCD124-3D2D-472F-923B-6BCEA63C7A2C}"/>
               </a:ext>
             </a:extLst>
           </p:cNvPr>
@@ -15368,7 +15426,7 @@
           <p:cNvPr id="37" name="Freeform 37">
             <a:extLst xmlns:a="http://schemas.openxmlformats.org/drawingml/2006/main">
               <a:ext uri="{FF2B5EF4-FFF2-40B4-BE49-F238E27FC236}">
-                <a16:creationId xmlns:a16="http://schemas.microsoft.com/office/drawing/2014/main" id="{CBB9FD7D-B229-4B1F-A0A2-9F5ACEBA828F}"/>
+                <a16:creationId xmlns:a16="http://schemas.microsoft.com/office/drawing/2014/main" id="{CE1DD797-FDB0-4B3F-A82B-05D2B7147DDA}"/>
               </a:ext>
             </a:extLst>
           </p:cNvPr>
@@ -15408,7 +15466,7 @@
           <p:cNvPr id="39" name="TextBox 39">
             <a:extLst xmlns:a="http://schemas.openxmlformats.org/drawingml/2006/main">
               <a:ext uri="{FF2B5EF4-FFF2-40B4-BE49-F238E27FC236}">
-                <a16:creationId xmlns:a16="http://schemas.microsoft.com/office/drawing/2014/main" id="{0BB2B6C0-1307-473A-A9FB-A8B7057F01DD}"/>
+                <a16:creationId xmlns:a16="http://schemas.microsoft.com/office/drawing/2014/main" id="{5FE9E410-1071-4AEC-B451-89DB17C4AA45}"/>
               </a:ext>
             </a:extLst>
           </p:cNvPr>
@@ -15458,7 +15516,7 @@
           <p:cNvPr id="40" name="TextBox 40">
             <a:extLst xmlns:a="http://schemas.openxmlformats.org/drawingml/2006/main">
               <a:ext uri="{FF2B5EF4-FFF2-40B4-BE49-F238E27FC236}">
-                <a16:creationId xmlns:a16="http://schemas.microsoft.com/office/drawing/2014/main" id="{36A4ECB3-FA85-4448-8FF1-9E6F587552B0}"/>
+                <a16:creationId xmlns:a16="http://schemas.microsoft.com/office/drawing/2014/main" id="{7AD7C2A0-8BD2-42AF-A7B7-0DDE9AD84858}"/>
               </a:ext>
             </a:extLst>
           </p:cNvPr>
@@ -15508,7 +15566,7 @@
           <p:cNvPr id="42" name="Ellipse 42">
             <a:extLst xmlns:a="http://schemas.openxmlformats.org/drawingml/2006/main">
               <a:ext uri="{FF2B5EF4-FFF2-40B4-BE49-F238E27FC236}">
-                <a16:creationId xmlns:a16="http://schemas.microsoft.com/office/drawing/2014/main" id="{52D7D3C3-B87B-4063-BA63-F4B91F07A995}"/>
+                <a16:creationId xmlns:a16="http://schemas.microsoft.com/office/drawing/2014/main" id="{846C95E2-5C27-4255-ADB2-ACFB9B7F23E5}"/>
               </a:ext>
             </a:extLst>
           </p:cNvPr>
@@ -15538,7 +15596,7 @@
           <p:cNvPr id="43" name="Freeform 43">
             <a:extLst xmlns:a="http://schemas.openxmlformats.org/drawingml/2006/main">
               <a:ext uri="{FF2B5EF4-FFF2-40B4-BE49-F238E27FC236}">
-                <a16:creationId xmlns:a16="http://schemas.microsoft.com/office/drawing/2014/main" id="{3E4B92F8-752A-4D5C-A666-1100C6C0B7A5}"/>
+                <a16:creationId xmlns:a16="http://schemas.microsoft.com/office/drawing/2014/main" id="{BB782B64-E27C-489D-9484-BA8DBDAFB3F0}"/>
               </a:ext>
             </a:extLst>
           </p:cNvPr>
@@ -15595,7 +15653,7 @@
           <p:cNvPr id="44" name="Freeform 44">
             <a:extLst xmlns:a="http://schemas.openxmlformats.org/drawingml/2006/main">
               <a:ext uri="{FF2B5EF4-FFF2-40B4-BE49-F238E27FC236}">
-                <a16:creationId xmlns:a16="http://schemas.microsoft.com/office/drawing/2014/main" id="{72755E3C-91BB-4A81-9E34-448D72DB4249}"/>
+                <a16:creationId xmlns:a16="http://schemas.microsoft.com/office/drawing/2014/main" id="{AFCE4279-9F7B-4E2B-B63B-9D2644E41757}"/>
               </a:ext>
             </a:extLst>
           </p:cNvPr>
@@ -15638,7 +15696,7 @@
           <p:cNvPr id="46" name="TextBox 46">
             <a:extLst xmlns:a="http://schemas.openxmlformats.org/drawingml/2006/main">
               <a:ext uri="{FF2B5EF4-FFF2-40B4-BE49-F238E27FC236}">
-                <a16:creationId xmlns:a16="http://schemas.microsoft.com/office/drawing/2014/main" id="{108C7D8D-56E5-44A2-9A8D-71D6CB946781}"/>
+                <a16:creationId xmlns:a16="http://schemas.microsoft.com/office/drawing/2014/main" id="{30D2A9C0-F8C2-4235-B093-3842A8FE67F6}"/>
               </a:ext>
             </a:extLst>
           </p:cNvPr>
@@ -15688,7 +15746,7 @@
           <p:cNvPr id="47" name="TextBox 47">
             <a:extLst xmlns:a="http://schemas.openxmlformats.org/drawingml/2006/main">
               <a:ext uri="{FF2B5EF4-FFF2-40B4-BE49-F238E27FC236}">
-                <a16:creationId xmlns:a16="http://schemas.microsoft.com/office/drawing/2014/main" id="{F9629DE8-35F8-4808-B837-37418BA6EDF1}"/>
+                <a16:creationId xmlns:a16="http://schemas.microsoft.com/office/drawing/2014/main" id="{46DF731E-7978-4E08-83F9-EF6639FD28D3}"/>
               </a:ext>
             </a:extLst>
           </p:cNvPr>
@@ -15738,7 +15796,7 @@
           <p:cNvPr id="50" name="Rectangle 50">
             <a:extLst xmlns:a="http://schemas.openxmlformats.org/drawingml/2006/main">
               <a:ext uri="{FF2B5EF4-FFF2-40B4-BE49-F238E27FC236}">
-                <a16:creationId xmlns:a16="http://schemas.microsoft.com/office/drawing/2014/main" id="{3282B7A4-9634-4CE3-B225-1C2404A69C49}"/>
+                <a16:creationId xmlns:a16="http://schemas.microsoft.com/office/drawing/2014/main" id="{A3BAC180-A287-4795-A9EB-E4A5AA442590}"/>
               </a:ext>
             </a:extLst>
           </p:cNvPr>
@@ -15772,7 +15830,7 @@
           <p:cNvPr id="51" name="TextBox 51">
             <a:extLst xmlns:a="http://schemas.openxmlformats.org/drawingml/2006/main">
               <a:ext uri="{FF2B5EF4-FFF2-40B4-BE49-F238E27FC236}">
-                <a16:creationId xmlns:a16="http://schemas.microsoft.com/office/drawing/2014/main" id="{9A3469A8-0EC7-4738-B9A5-5A8710BA423D}"/>
+                <a16:creationId xmlns:a16="http://schemas.microsoft.com/office/drawing/2014/main" id="{0019150D-FEF4-42DC-9580-5CF37D669C39}"/>
               </a:ext>
             </a:extLst>
           </p:cNvPr>
@@ -15822,7 +15880,7 @@
           <p:cNvPr id="52" name="TextBox 52">
             <a:extLst xmlns:a="http://schemas.openxmlformats.org/drawingml/2006/main">
               <a:ext uri="{FF2B5EF4-FFF2-40B4-BE49-F238E27FC236}">
-                <a16:creationId xmlns:a16="http://schemas.microsoft.com/office/drawing/2014/main" id="{A2930AD2-F2FA-4CAB-A50B-5925BC2885CC}"/>
+                <a16:creationId xmlns:a16="http://schemas.microsoft.com/office/drawing/2014/main" id="{0CF0896A-878B-4870-9B3F-AA8CFDF87A9D}"/>
               </a:ext>
             </a:extLst>
           </p:cNvPr>
@@ -15872,7 +15930,7 @@
           <p:cNvPr id="53" name="TextBox 53">
             <a:extLst xmlns:a="http://schemas.openxmlformats.org/drawingml/2006/main">
               <a:ext uri="{FF2B5EF4-FFF2-40B4-BE49-F238E27FC236}">
-                <a16:creationId xmlns:a16="http://schemas.microsoft.com/office/drawing/2014/main" id="{1A76ADFB-2A91-4774-813E-F1D6BE5B41BC}"/>
+                <a16:creationId xmlns:a16="http://schemas.microsoft.com/office/drawing/2014/main" id="{EACE1B5E-2E1A-4712-AC69-10188BA7D2A1}"/>
               </a:ext>
             </a:extLst>
           </p:cNvPr>
@@ -15922,7 +15980,7 @@
           <p:cNvPr id="54" name="TextBox 54">
             <a:extLst xmlns:a="http://schemas.openxmlformats.org/drawingml/2006/main">
               <a:ext uri="{FF2B5EF4-FFF2-40B4-BE49-F238E27FC236}">
-                <a16:creationId xmlns:a16="http://schemas.microsoft.com/office/drawing/2014/main" id="{B1979D35-BAED-4680-B397-CADD0592D830}"/>
+                <a16:creationId xmlns:a16="http://schemas.microsoft.com/office/drawing/2014/main" id="{4139590A-0CDA-4B6C-AA6C-240D6A0B49ED}"/>
               </a:ext>
             </a:extLst>
           </p:cNvPr>
@@ -15972,7 +16030,7 @@
           <p:cNvPr id="55" name="Rectangle 55">
             <a:extLst xmlns:a="http://schemas.openxmlformats.org/drawingml/2006/main">
               <a:ext uri="{FF2B5EF4-FFF2-40B4-BE49-F238E27FC236}">
-                <a16:creationId xmlns:a16="http://schemas.microsoft.com/office/drawing/2014/main" id="{B15AE957-9326-4D60-8071-744F31B22CEE}"/>
+                <a16:creationId xmlns:a16="http://schemas.microsoft.com/office/drawing/2014/main" id="{209EC218-C6CE-4D59-B901-BDF1285B6B57}"/>
               </a:ext>
             </a:extLst>
           </p:cNvPr>
@@ -16006,7 +16064,7 @@
           <p:cNvPr id="56" name="TextBox 56">
             <a:extLst xmlns:a="http://schemas.openxmlformats.org/drawingml/2006/main">
               <a:ext uri="{FF2B5EF4-FFF2-40B4-BE49-F238E27FC236}">
-                <a16:creationId xmlns:a16="http://schemas.microsoft.com/office/drawing/2014/main" id="{924E0D1E-3FD1-4160-8AD8-2A7BD97CC542}"/>
+                <a16:creationId xmlns:a16="http://schemas.microsoft.com/office/drawing/2014/main" id="{F7A34EA0-782F-4582-807D-689AD51A8E96}"/>
               </a:ext>
             </a:extLst>
           </p:cNvPr>
@@ -16056,7 +16114,7 @@
           <p:cNvPr id="57" name="TextBox 57">
             <a:extLst xmlns:a="http://schemas.openxmlformats.org/drawingml/2006/main">
               <a:ext uri="{FF2B5EF4-FFF2-40B4-BE49-F238E27FC236}">
-                <a16:creationId xmlns:a16="http://schemas.microsoft.com/office/drawing/2014/main" id="{6051FF2D-525B-41EB-B9E4-01966C99AA22}"/>
+                <a16:creationId xmlns:a16="http://schemas.microsoft.com/office/drawing/2014/main" id="{A508E734-4799-4908-8E75-B7D21D7D0537}"/>
               </a:ext>
             </a:extLst>
           </p:cNvPr>
@@ -16106,7 +16164,7 @@
           <p:cNvPr id="58" name="TextBox 58">
             <a:extLst xmlns:a="http://schemas.openxmlformats.org/drawingml/2006/main">
               <a:ext uri="{FF2B5EF4-FFF2-40B4-BE49-F238E27FC236}">
-                <a16:creationId xmlns:a16="http://schemas.microsoft.com/office/drawing/2014/main" id="{A35E0818-7463-45DA-8A9E-FC2B72B9A522}"/>
+                <a16:creationId xmlns:a16="http://schemas.microsoft.com/office/drawing/2014/main" id="{446BB82A-8600-4FD9-8163-D81544836001}"/>
               </a:ext>
             </a:extLst>
           </p:cNvPr>
@@ -16156,7 +16214,7 @@
           <p:cNvPr id="59" name="TextBox 59">
             <a:extLst xmlns:a="http://schemas.openxmlformats.org/drawingml/2006/main">
               <a:ext uri="{FF2B5EF4-FFF2-40B4-BE49-F238E27FC236}">
-                <a16:creationId xmlns:a16="http://schemas.microsoft.com/office/drawing/2014/main" id="{F1989213-53ED-43D9-9BB0-476200A4BC59}"/>
+                <a16:creationId xmlns:a16="http://schemas.microsoft.com/office/drawing/2014/main" id="{411E3F35-A9EA-465B-BE26-F2053B7F97FD}"/>
               </a:ext>
             </a:extLst>
           </p:cNvPr>
@@ -16206,7 +16264,7 @@
           <p:cNvPr id="61" name="TextBox 61">
             <a:extLst xmlns:a="http://schemas.openxmlformats.org/drawingml/2006/main">
               <a:ext uri="{FF2B5EF4-FFF2-40B4-BE49-F238E27FC236}">
-                <a16:creationId xmlns:a16="http://schemas.microsoft.com/office/drawing/2014/main" id="{C2845656-CF5C-4930-A0A1-EFC887790A10}"/>
+                <a16:creationId xmlns:a16="http://schemas.microsoft.com/office/drawing/2014/main" id="{AE61458C-40AA-4843-A66F-99242C3D4A22}"/>
               </a:ext>
             </a:extLst>
           </p:cNvPr>
@@ -16256,7 +16314,7 @@
           <p:cNvPr id="62" name="TextBox 62">
             <a:extLst xmlns:a="http://schemas.openxmlformats.org/drawingml/2006/main">
               <a:ext uri="{FF2B5EF4-FFF2-40B4-BE49-F238E27FC236}">
-                <a16:creationId xmlns:a16="http://schemas.microsoft.com/office/drawing/2014/main" id="{01922889-E206-46C7-8311-C2E74479447C}"/>
+                <a16:creationId xmlns:a16="http://schemas.microsoft.com/office/drawing/2014/main" id="{9164D69E-826C-487E-AAB6-D0EAC52F1FE7}"/>
               </a:ext>
             </a:extLst>
           </p:cNvPr>
@@ -16304,7 +16362,7 @@
     </p:spTree>
     <p:extLst>
       <p:ext uri="{BB962C8B-B14F-4D97-AF65-F5344CB8AC3E}">
-        <p14:creationId xmlns:p14="http://schemas.microsoft.com/office/powerpoint/2010/main" val="206442244"/>
+        <p14:creationId xmlns:p14="http://schemas.microsoft.com/office/powerpoint/2010/main" val="1074087094"/>
       </p:ext>
     </p:extLst>
   </p:cSld>
@@ -16335,7 +16393,7 @@
           <p:cNvPr id="2" name="TextBox 2">
             <a:extLst xmlns:a="http://schemas.openxmlformats.org/drawingml/2006/main">
               <a:ext uri="{FF2B5EF4-FFF2-40B4-BE49-F238E27FC236}">
-                <a16:creationId xmlns:a16="http://schemas.microsoft.com/office/drawing/2014/main" id="{19E8C209-ED77-4C28-A458-8162C02583E3}"/>
+                <a16:creationId xmlns:a16="http://schemas.microsoft.com/office/drawing/2014/main" id="{C0B99D62-EBCC-4EB4-A6F2-558D174B7B61}"/>
               </a:ext>
             </a:extLst>
           </p:cNvPr>
@@ -16385,7 +16443,7 @@
           <p:cNvPr id="3" name="TextBox 3">
             <a:extLst xmlns:a="http://schemas.openxmlformats.org/drawingml/2006/main">
               <a:ext uri="{FF2B5EF4-FFF2-40B4-BE49-F238E27FC236}">
-                <a16:creationId xmlns:a16="http://schemas.microsoft.com/office/drawing/2014/main" id="{F4DFBD0E-823A-44AA-A195-0DFA95D99419}"/>
+                <a16:creationId xmlns:a16="http://schemas.microsoft.com/office/drawing/2014/main" id="{A714349F-6611-4962-BDE7-06630ECA6B0D}"/>
               </a:ext>
             </a:extLst>
           </p:cNvPr>
@@ -16435,7 +16493,7 @@
           <p:cNvPr id="4" name="Line 4">
             <a:extLst xmlns:a="http://schemas.openxmlformats.org/drawingml/2006/main">
               <a:ext uri="{FF2B5EF4-FFF2-40B4-BE49-F238E27FC236}">
-                <a16:creationId xmlns:a16="http://schemas.microsoft.com/office/drawing/2014/main" id="{31582404-7370-4097-B1D9-B627F40DFDE9}"/>
+                <a16:creationId xmlns:a16="http://schemas.microsoft.com/office/drawing/2014/main" id="{CEC77C7E-17F0-41FE-8878-C39848832C16}"/>
               </a:ext>
             </a:extLst>
           </p:cNvPr>
@@ -16475,7 +16533,7 @@
           <p:cNvPr id="5" name="Line 5">
             <a:extLst xmlns:a="http://schemas.openxmlformats.org/drawingml/2006/main">
               <a:ext uri="{FF2B5EF4-FFF2-40B4-BE49-F238E27FC236}">
-                <a16:creationId xmlns:a16="http://schemas.microsoft.com/office/drawing/2014/main" id="{BCD532FF-2C8A-49F7-AE5F-7D4F6A141421}"/>
+                <a16:creationId xmlns:a16="http://schemas.microsoft.com/office/drawing/2014/main" id="{1E56A1CB-42D3-499C-990E-6958D6683FFF}"/>
               </a:ext>
             </a:extLst>
           </p:cNvPr>
@@ -16515,7 +16573,7 @@
           <p:cNvPr id="6" name="Line 6">
             <a:extLst xmlns:a="http://schemas.openxmlformats.org/drawingml/2006/main">
               <a:ext uri="{FF2B5EF4-FFF2-40B4-BE49-F238E27FC236}">
-                <a16:creationId xmlns:a16="http://schemas.microsoft.com/office/drawing/2014/main" id="{19115F10-A36B-47FB-993E-79D3E2503AFA}"/>
+                <a16:creationId xmlns:a16="http://schemas.microsoft.com/office/drawing/2014/main" id="{70458061-B7E9-4BFB-BD48-3967D1F094E9}"/>
               </a:ext>
             </a:extLst>
           </p:cNvPr>
@@ -16555,7 +16613,7 @@
           <p:cNvPr id="7" name="Line 7">
             <a:extLst xmlns:a="http://schemas.openxmlformats.org/drawingml/2006/main">
               <a:ext uri="{FF2B5EF4-FFF2-40B4-BE49-F238E27FC236}">
-                <a16:creationId xmlns:a16="http://schemas.microsoft.com/office/drawing/2014/main" id="{2EAEDF86-5F08-4EA3-98AA-688B28A6A107}"/>
+                <a16:creationId xmlns:a16="http://schemas.microsoft.com/office/drawing/2014/main" id="{0F1B2B78-D6CF-4112-B446-6786DF18802B}"/>
               </a:ext>
             </a:extLst>
           </p:cNvPr>
@@ -16595,7 +16653,7 @@
           <p:cNvPr id="8" name="TextBox 8">
             <a:extLst xmlns:a="http://schemas.openxmlformats.org/drawingml/2006/main">
               <a:ext uri="{FF2B5EF4-FFF2-40B4-BE49-F238E27FC236}">
-                <a16:creationId xmlns:a16="http://schemas.microsoft.com/office/drawing/2014/main" id="{8438DD1D-602B-44FB-AFDE-3F08A989438A}"/>
+                <a16:creationId xmlns:a16="http://schemas.microsoft.com/office/drawing/2014/main" id="{334DE397-C2C3-4DD3-9C28-4707AE469952}"/>
               </a:ext>
             </a:extLst>
           </p:cNvPr>
@@ -16645,7 +16703,7 @@
           <p:cNvPr id="9" name="TextBox 9">
             <a:extLst xmlns:a="http://schemas.openxmlformats.org/drawingml/2006/main">
               <a:ext uri="{FF2B5EF4-FFF2-40B4-BE49-F238E27FC236}">
-                <a16:creationId xmlns:a16="http://schemas.microsoft.com/office/drawing/2014/main" id="{10F34033-2DBB-4131-BE72-02A29CD3B1E1}"/>
+                <a16:creationId xmlns:a16="http://schemas.microsoft.com/office/drawing/2014/main" id="{DB5076A5-394D-4AF7-9176-56963B214DFA}"/>
               </a:ext>
             </a:extLst>
           </p:cNvPr>
@@ -16695,7 +16753,7 @@
           <p:cNvPr id="10" name="TextBox 10">
             <a:extLst xmlns:a="http://schemas.openxmlformats.org/drawingml/2006/main">
               <a:ext uri="{FF2B5EF4-FFF2-40B4-BE49-F238E27FC236}">
-                <a16:creationId xmlns:a16="http://schemas.microsoft.com/office/drawing/2014/main" id="{93954470-806D-449C-BE78-694230089E99}"/>
+                <a16:creationId xmlns:a16="http://schemas.microsoft.com/office/drawing/2014/main" id="{CB718B3D-B98B-4E3D-9BC7-5164E7D0AF84}"/>
               </a:ext>
             </a:extLst>
           </p:cNvPr>
@@ -16745,7 +16803,7 @@
           <p:cNvPr id="11" name="Rectangle 11">
             <a:extLst xmlns:a="http://schemas.openxmlformats.org/drawingml/2006/main">
               <a:ext uri="{FF2B5EF4-FFF2-40B4-BE49-F238E27FC236}">
-                <a16:creationId xmlns:a16="http://schemas.microsoft.com/office/drawing/2014/main" id="{FBC59A54-3429-4CAE-8C44-1B98EC3FA76E}"/>
+                <a16:creationId xmlns:a16="http://schemas.microsoft.com/office/drawing/2014/main" id="{1DD35FDA-0662-4435-BB29-EAB81E7CB303}"/>
               </a:ext>
             </a:extLst>
           </p:cNvPr>
@@ -16777,7 +16835,7 @@
           <p:cNvPr id="12" name="Rectangle 12">
             <a:extLst xmlns:a="http://schemas.openxmlformats.org/drawingml/2006/main">
               <a:ext uri="{FF2B5EF4-FFF2-40B4-BE49-F238E27FC236}">
-                <a16:creationId xmlns:a16="http://schemas.microsoft.com/office/drawing/2014/main" id="{33B99F3A-F1B3-42A8-9B6A-28674FAB619C}"/>
+                <a16:creationId xmlns:a16="http://schemas.microsoft.com/office/drawing/2014/main" id="{07E0C3BB-397B-4E4F-A34E-43C798F862C5}"/>
               </a:ext>
             </a:extLst>
           </p:cNvPr>
@@ -16809,7 +16867,7 @@
           <p:cNvPr id="13" name="TextBox 13">
             <a:extLst xmlns:a="http://schemas.openxmlformats.org/drawingml/2006/main">
               <a:ext uri="{FF2B5EF4-FFF2-40B4-BE49-F238E27FC236}">
-                <a16:creationId xmlns:a16="http://schemas.microsoft.com/office/drawing/2014/main" id="{4530CFC4-9C49-4989-BBC2-AF909D931D9D}"/>
+                <a16:creationId xmlns:a16="http://schemas.microsoft.com/office/drawing/2014/main" id="{7FC719B8-70B2-4B85-8707-2337A25DD32A}"/>
               </a:ext>
             </a:extLst>
           </p:cNvPr>
@@ -16859,7 +16917,7 @@
           <p:cNvPr id="14" name="TextBox 14">
             <a:extLst xmlns:a="http://schemas.openxmlformats.org/drawingml/2006/main">
               <a:ext uri="{FF2B5EF4-FFF2-40B4-BE49-F238E27FC236}">
-                <a16:creationId xmlns:a16="http://schemas.microsoft.com/office/drawing/2014/main" id="{72E1158C-514A-41AF-A614-46C4B3D54F9D}"/>
+                <a16:creationId xmlns:a16="http://schemas.microsoft.com/office/drawing/2014/main" id="{C55D2E92-3B3D-4D52-B224-BDFCD284537E}"/>
               </a:ext>
             </a:extLst>
           </p:cNvPr>
@@ -16909,7 +16967,7 @@
           <p:cNvPr id="16" name="Rectangle 16">
             <a:extLst xmlns:a="http://schemas.openxmlformats.org/drawingml/2006/main">
               <a:ext uri="{FF2B5EF4-FFF2-40B4-BE49-F238E27FC236}">
-                <a16:creationId xmlns:a16="http://schemas.microsoft.com/office/drawing/2014/main" id="{A20DC5BA-434E-4B74-9CF4-CB3E617C8068}"/>
+                <a16:creationId xmlns:a16="http://schemas.microsoft.com/office/drawing/2014/main" id="{17F9DE91-FA47-4E9E-A315-3AC417FC08B2}"/>
               </a:ext>
             </a:extLst>
           </p:cNvPr>
@@ -16941,7 +16999,7 @@
           <p:cNvPr id="17" name="Rectangle 17">
             <a:extLst xmlns:a="http://schemas.openxmlformats.org/drawingml/2006/main">
               <a:ext uri="{FF2B5EF4-FFF2-40B4-BE49-F238E27FC236}">
-                <a16:creationId xmlns:a16="http://schemas.microsoft.com/office/drawing/2014/main" id="{75BAF3EE-DA87-4F6B-BD88-773F5C0C7E13}"/>
+                <a16:creationId xmlns:a16="http://schemas.microsoft.com/office/drawing/2014/main" id="{A585E7D1-D62C-4544-B178-94F2CA5F72B4}"/>
               </a:ext>
             </a:extLst>
           </p:cNvPr>
@@ -16973,7 +17031,7 @@
           <p:cNvPr id="18" name="TextBox 18">
             <a:extLst xmlns:a="http://schemas.openxmlformats.org/drawingml/2006/main">
               <a:ext uri="{FF2B5EF4-FFF2-40B4-BE49-F238E27FC236}">
-                <a16:creationId xmlns:a16="http://schemas.microsoft.com/office/drawing/2014/main" id="{640E5E81-8A47-4159-8809-A656B56E135D}"/>
+                <a16:creationId xmlns:a16="http://schemas.microsoft.com/office/drawing/2014/main" id="{D9281203-873D-4376-8098-86B9CBEFA74F}"/>
               </a:ext>
             </a:extLst>
           </p:cNvPr>
@@ -17023,7 +17081,7 @@
           <p:cNvPr id="19" name="TextBox 19">
             <a:extLst xmlns:a="http://schemas.openxmlformats.org/drawingml/2006/main">
               <a:ext uri="{FF2B5EF4-FFF2-40B4-BE49-F238E27FC236}">
-                <a16:creationId xmlns:a16="http://schemas.microsoft.com/office/drawing/2014/main" id="{198C746C-9BEB-4113-B1C5-9A560119A4A7}"/>
+                <a16:creationId xmlns:a16="http://schemas.microsoft.com/office/drawing/2014/main" id="{B8257D25-C64E-4132-8EE0-01BD6112E9CE}"/>
               </a:ext>
             </a:extLst>
           </p:cNvPr>
@@ -17073,7 +17131,7 @@
           <p:cNvPr id="21" name="Rectangle 21">
             <a:extLst xmlns:a="http://schemas.openxmlformats.org/drawingml/2006/main">
               <a:ext uri="{FF2B5EF4-FFF2-40B4-BE49-F238E27FC236}">
-                <a16:creationId xmlns:a16="http://schemas.microsoft.com/office/drawing/2014/main" id="{34CF9A66-2531-4D8D-AA96-B4EC063A07E1}"/>
+                <a16:creationId xmlns:a16="http://schemas.microsoft.com/office/drawing/2014/main" id="{E6E3E4E8-8C12-4AE4-A14F-32DB13D957ED}"/>
               </a:ext>
             </a:extLst>
           </p:cNvPr>
@@ -17105,7 +17163,7 @@
           <p:cNvPr id="22" name="Line 22">
             <a:extLst xmlns:a="http://schemas.openxmlformats.org/drawingml/2006/main">
               <a:ext uri="{FF2B5EF4-FFF2-40B4-BE49-F238E27FC236}">
-                <a16:creationId xmlns:a16="http://schemas.microsoft.com/office/drawing/2014/main" id="{EB8B7B9A-4C88-4474-812B-1D4F7F0E4073}"/>
+                <a16:creationId xmlns:a16="http://schemas.microsoft.com/office/drawing/2014/main" id="{86574D7C-7301-41F6-B16D-4E6D42CD1A25}"/>
               </a:ext>
             </a:extLst>
           </p:cNvPr>
@@ -17145,7 +17203,7 @@
           <p:cNvPr id="23" name="TextBox 23">
             <a:extLst xmlns:a="http://schemas.openxmlformats.org/drawingml/2006/main">
               <a:ext uri="{FF2B5EF4-FFF2-40B4-BE49-F238E27FC236}">
-                <a16:creationId xmlns:a16="http://schemas.microsoft.com/office/drawing/2014/main" id="{D7D07293-CD39-4976-B46A-1C913DDD7D51}"/>
+                <a16:creationId xmlns:a16="http://schemas.microsoft.com/office/drawing/2014/main" id="{2887B550-D122-42F0-83B9-06C528028A4A}"/>
               </a:ext>
             </a:extLst>
           </p:cNvPr>
@@ -17195,7 +17253,7 @@
           <p:cNvPr id="26" name="TextBox 26">
             <a:extLst xmlns:a="http://schemas.openxmlformats.org/drawingml/2006/main">
               <a:ext uri="{FF2B5EF4-FFF2-40B4-BE49-F238E27FC236}">
-                <a16:creationId xmlns:a16="http://schemas.microsoft.com/office/drawing/2014/main" id="{901D1EFC-1C2D-43EB-834C-E2AEEED5E6B5}"/>
+                <a16:creationId xmlns:a16="http://schemas.microsoft.com/office/drawing/2014/main" id="{788A0498-642F-4120-801F-D7D1A37F6658}"/>
               </a:ext>
             </a:extLst>
           </p:cNvPr>
@@ -17245,7 +17303,7 @@
           <p:cNvPr id="27" name="TextBox 27">
             <a:extLst xmlns:a="http://schemas.openxmlformats.org/drawingml/2006/main">
               <a:ext uri="{FF2B5EF4-FFF2-40B4-BE49-F238E27FC236}">
-                <a16:creationId xmlns:a16="http://schemas.microsoft.com/office/drawing/2014/main" id="{01EC6006-9C3A-4B30-B3C8-1F63E833228E}"/>
+                <a16:creationId xmlns:a16="http://schemas.microsoft.com/office/drawing/2014/main" id="{A790A979-A1A7-42FC-A14D-ADBFA9C8071A}"/>
               </a:ext>
             </a:extLst>
           </p:cNvPr>
@@ -17295,7 +17353,7 @@
           <p:cNvPr id="28" name="TextBox 28">
             <a:extLst xmlns:a="http://schemas.openxmlformats.org/drawingml/2006/main">
               <a:ext uri="{FF2B5EF4-FFF2-40B4-BE49-F238E27FC236}">
-                <a16:creationId xmlns:a16="http://schemas.microsoft.com/office/drawing/2014/main" id="{239F1FCD-D35C-4825-A89C-7C79833B810E}"/>
+                <a16:creationId xmlns:a16="http://schemas.microsoft.com/office/drawing/2014/main" id="{52CB3B08-4409-4071-B4C4-A26F32237898}"/>
               </a:ext>
             </a:extLst>
           </p:cNvPr>
@@ -17345,7 +17403,7 @@
           <p:cNvPr id="29" name="TextBox 29">
             <a:extLst xmlns:a="http://schemas.openxmlformats.org/drawingml/2006/main">
               <a:ext uri="{FF2B5EF4-FFF2-40B4-BE49-F238E27FC236}">
-                <a16:creationId xmlns:a16="http://schemas.microsoft.com/office/drawing/2014/main" id="{EAC01224-2862-4C47-92F4-52FD1B688D68}"/>
+                <a16:creationId xmlns:a16="http://schemas.microsoft.com/office/drawing/2014/main" id="{38B2A577-D2B7-4829-80A9-03E4320F2694}"/>
               </a:ext>
             </a:extLst>
           </p:cNvPr>
@@ -17395,7 +17453,7 @@
           <p:cNvPr id="30" name="TextBox 30">
             <a:extLst xmlns:a="http://schemas.openxmlformats.org/drawingml/2006/main">
               <a:ext uri="{FF2B5EF4-FFF2-40B4-BE49-F238E27FC236}">
-                <a16:creationId xmlns:a16="http://schemas.microsoft.com/office/drawing/2014/main" id="{D8391BAB-347F-4EFA-B8F3-C9F420298DFC}"/>
+                <a16:creationId xmlns:a16="http://schemas.microsoft.com/office/drawing/2014/main" id="{628C240E-A8DF-4272-9A85-5010C065B35F}"/>
               </a:ext>
             </a:extLst>
           </p:cNvPr>
@@ -17445,7 +17503,7 @@
           <p:cNvPr id="31" name="TextBox 31">
             <a:extLst xmlns:a="http://schemas.openxmlformats.org/drawingml/2006/main">
               <a:ext uri="{FF2B5EF4-FFF2-40B4-BE49-F238E27FC236}">
-                <a16:creationId xmlns:a16="http://schemas.microsoft.com/office/drawing/2014/main" id="{3F603118-F8E9-41DE-AB79-D36C051CD088}"/>
+                <a16:creationId xmlns:a16="http://schemas.microsoft.com/office/drawing/2014/main" id="{1426998B-85DB-4749-81CF-D3BE15FBE184}"/>
               </a:ext>
             </a:extLst>
           </p:cNvPr>
@@ -17495,7 +17553,7 @@
           <p:cNvPr id="33" name="TextBox 33">
             <a:extLst xmlns:a="http://schemas.openxmlformats.org/drawingml/2006/main">
               <a:ext uri="{FF2B5EF4-FFF2-40B4-BE49-F238E27FC236}">
-                <a16:creationId xmlns:a16="http://schemas.microsoft.com/office/drawing/2014/main" id="{51CD2DEE-7C6F-4959-88BB-DE3D731E2E04}"/>
+                <a16:creationId xmlns:a16="http://schemas.microsoft.com/office/drawing/2014/main" id="{85485137-B305-476E-BF21-C9C10CBD3D2F}"/>
               </a:ext>
             </a:extLst>
           </p:cNvPr>
@@ -17545,7 +17603,7 @@
           <p:cNvPr id="34" name="Freeform 34">
             <a:extLst xmlns:a="http://schemas.openxmlformats.org/drawingml/2006/main">
               <a:ext uri="{FF2B5EF4-FFF2-40B4-BE49-F238E27FC236}">
-                <a16:creationId xmlns:a16="http://schemas.microsoft.com/office/drawing/2014/main" id="{45338D65-D02B-4E0D-A051-19498EC98CB2}"/>
+                <a16:creationId xmlns:a16="http://schemas.microsoft.com/office/drawing/2014/main" id="{CC5C34A6-5222-4E6F-A358-70ADBBD26AE5}"/>
               </a:ext>
             </a:extLst>
           </p:cNvPr>
@@ -17602,7 +17660,7 @@
           <p:cNvPr id="35" name="Freeform 35">
             <a:extLst xmlns:a="http://schemas.openxmlformats.org/drawingml/2006/main">
               <a:ext uri="{FF2B5EF4-FFF2-40B4-BE49-F238E27FC236}">
-                <a16:creationId xmlns:a16="http://schemas.microsoft.com/office/drawing/2014/main" id="{BEDCEA0E-D77C-4060-9FB0-0BC3CFDD82AC}"/>
+                <a16:creationId xmlns:a16="http://schemas.microsoft.com/office/drawing/2014/main" id="{F3398A09-0E0D-460D-9005-678E40717B35}"/>
               </a:ext>
             </a:extLst>
           </p:cNvPr>
@@ -17645,7 +17703,7 @@
           <p:cNvPr id="37" name="TextBox 37">
             <a:extLst xmlns:a="http://schemas.openxmlformats.org/drawingml/2006/main">
               <a:ext uri="{FF2B5EF4-FFF2-40B4-BE49-F238E27FC236}">
-                <a16:creationId xmlns:a16="http://schemas.microsoft.com/office/drawing/2014/main" id="{58AEA92F-7E17-4182-A3C3-E021CCEA7DFA}"/>
+                <a16:creationId xmlns:a16="http://schemas.microsoft.com/office/drawing/2014/main" id="{072303FE-A845-4620-9F44-AD7E118864E6}"/>
               </a:ext>
             </a:extLst>
           </p:cNvPr>
@@ -17695,7 +17753,7 @@
           <p:cNvPr id="38" name="Freeform 38">
             <a:extLst xmlns:a="http://schemas.openxmlformats.org/drawingml/2006/main">
               <a:ext uri="{FF2B5EF4-FFF2-40B4-BE49-F238E27FC236}">
-                <a16:creationId xmlns:a16="http://schemas.microsoft.com/office/drawing/2014/main" id="{7E676BDD-ECE5-4611-8CAE-8CA42B7A9731}"/>
+                <a16:creationId xmlns:a16="http://schemas.microsoft.com/office/drawing/2014/main" id="{F9A608B5-4755-4526-95AE-B04D42449AAE}"/>
               </a:ext>
             </a:extLst>
           </p:cNvPr>
@@ -17752,7 +17810,7 @@
           <p:cNvPr id="39" name="Freeform 39">
             <a:extLst xmlns:a="http://schemas.openxmlformats.org/drawingml/2006/main">
               <a:ext uri="{FF2B5EF4-FFF2-40B4-BE49-F238E27FC236}">
-                <a16:creationId xmlns:a16="http://schemas.microsoft.com/office/drawing/2014/main" id="{A4FEB3AD-D4C6-4626-AD06-C5CC4CA8C725}"/>
+                <a16:creationId xmlns:a16="http://schemas.microsoft.com/office/drawing/2014/main" id="{796B9CAA-C6FC-414E-8F09-E929402C2935}"/>
               </a:ext>
             </a:extLst>
           </p:cNvPr>
@@ -17795,7 +17853,7 @@
           <p:cNvPr id="41" name="TextBox 41">
             <a:extLst xmlns:a="http://schemas.openxmlformats.org/drawingml/2006/main">
               <a:ext uri="{FF2B5EF4-FFF2-40B4-BE49-F238E27FC236}">
-                <a16:creationId xmlns:a16="http://schemas.microsoft.com/office/drawing/2014/main" id="{D04128F4-B783-4A17-BBD9-4EC74A1EA14B}"/>
+                <a16:creationId xmlns:a16="http://schemas.microsoft.com/office/drawing/2014/main" id="{DFCEA631-E679-43F5-8835-E678323377C7}"/>
               </a:ext>
             </a:extLst>
           </p:cNvPr>
@@ -17845,7 +17903,7 @@
           <p:cNvPr id="42" name="Freeform 42">
             <a:extLst xmlns:a="http://schemas.openxmlformats.org/drawingml/2006/main">
               <a:ext uri="{FF2B5EF4-FFF2-40B4-BE49-F238E27FC236}">
-                <a16:creationId xmlns:a16="http://schemas.microsoft.com/office/drawing/2014/main" id="{B34BC5C4-B4B8-4C47-A885-EA6F79F72B39}"/>
+                <a16:creationId xmlns:a16="http://schemas.microsoft.com/office/drawing/2014/main" id="{225AD661-F828-4FF2-803A-DE554EBBF413}"/>
               </a:ext>
             </a:extLst>
           </p:cNvPr>
@@ -17902,7 +17960,7 @@
           <p:cNvPr id="43" name="Freeform 43">
             <a:extLst xmlns:a="http://schemas.openxmlformats.org/drawingml/2006/main">
               <a:ext uri="{FF2B5EF4-FFF2-40B4-BE49-F238E27FC236}">
-                <a16:creationId xmlns:a16="http://schemas.microsoft.com/office/drawing/2014/main" id="{F583D7CD-47B5-4FFB-8111-02D8601AF569}"/>
+                <a16:creationId xmlns:a16="http://schemas.microsoft.com/office/drawing/2014/main" id="{80A7B4F8-E7BD-41CF-A2B5-77B8DE85693B}"/>
               </a:ext>
             </a:extLst>
           </p:cNvPr>
@@ -17945,7 +18003,7 @@
           <p:cNvPr id="45" name="TextBox 45">
             <a:extLst xmlns:a="http://schemas.openxmlformats.org/drawingml/2006/main">
               <a:ext uri="{FF2B5EF4-FFF2-40B4-BE49-F238E27FC236}">
-                <a16:creationId xmlns:a16="http://schemas.microsoft.com/office/drawing/2014/main" id="{B4E16B93-27B4-4925-AA7F-E45FB1F99DAE}"/>
+                <a16:creationId xmlns:a16="http://schemas.microsoft.com/office/drawing/2014/main" id="{DE3EF82B-6F38-4168-BE5A-552C569D1797}"/>
               </a:ext>
             </a:extLst>
           </p:cNvPr>
@@ -17995,7 +18053,7 @@
           <p:cNvPr id="47" name="Rectangle 47">
             <a:extLst xmlns:a="http://schemas.openxmlformats.org/drawingml/2006/main">
               <a:ext uri="{FF2B5EF4-FFF2-40B4-BE49-F238E27FC236}">
-                <a16:creationId xmlns:a16="http://schemas.microsoft.com/office/drawing/2014/main" id="{F0A6E264-7C64-4437-8A15-912940B26CE1}"/>
+                <a16:creationId xmlns:a16="http://schemas.microsoft.com/office/drawing/2014/main" id="{59BD803C-ECF4-4AFF-B05F-B3F35B053546}"/>
               </a:ext>
             </a:extLst>
           </p:cNvPr>
@@ -18027,7 +18085,7 @@
           <p:cNvPr id="48" name="TextBox 48">
             <a:extLst xmlns:a="http://schemas.openxmlformats.org/drawingml/2006/main">
               <a:ext uri="{FF2B5EF4-FFF2-40B4-BE49-F238E27FC236}">
-                <a16:creationId xmlns:a16="http://schemas.microsoft.com/office/drawing/2014/main" id="{11C501CC-019F-4813-AA9E-CF42276E44FB}"/>
+                <a16:creationId xmlns:a16="http://schemas.microsoft.com/office/drawing/2014/main" id="{99130022-6EB4-484A-8E94-0C189C6D68F7}"/>
               </a:ext>
             </a:extLst>
           </p:cNvPr>
@@ -18077,7 +18135,7 @@
           <p:cNvPr id="49" name="TextBox 49">
             <a:extLst xmlns:a="http://schemas.openxmlformats.org/drawingml/2006/main">
               <a:ext uri="{FF2B5EF4-FFF2-40B4-BE49-F238E27FC236}">
-                <a16:creationId xmlns:a16="http://schemas.microsoft.com/office/drawing/2014/main" id="{6720DB26-0A92-48B4-B2CA-DDA1FD86BE8C}"/>
+                <a16:creationId xmlns:a16="http://schemas.microsoft.com/office/drawing/2014/main" id="{67E09BC5-589C-4B36-8F0F-642429192A5C}"/>
               </a:ext>
             </a:extLst>
           </p:cNvPr>
@@ -18127,7 +18185,7 @@
           <p:cNvPr id="50" name="TextBox 50">
             <a:extLst xmlns:a="http://schemas.openxmlformats.org/drawingml/2006/main">
               <a:ext uri="{FF2B5EF4-FFF2-40B4-BE49-F238E27FC236}">
-                <a16:creationId xmlns:a16="http://schemas.microsoft.com/office/drawing/2014/main" id="{A8674846-EF2A-445A-BC76-E5C39D0A63FC}"/>
+                <a16:creationId xmlns:a16="http://schemas.microsoft.com/office/drawing/2014/main" id="{EBAD9EC1-4AEF-425D-A587-BCC4AA8AEAFF}"/>
               </a:ext>
             </a:extLst>
           </p:cNvPr>
@@ -18175,7 +18233,7 @@
     </p:spTree>
     <p:extLst>
       <p:ext uri="{BB962C8B-B14F-4D97-AF65-F5344CB8AC3E}">
-        <p14:creationId xmlns:p14="http://schemas.microsoft.com/office/powerpoint/2010/main" val="1652994152"/>
+        <p14:creationId xmlns:p14="http://schemas.microsoft.com/office/powerpoint/2010/main" val="97600219"/>
       </p:ext>
     </p:extLst>
   </p:cSld>
@@ -18206,7 +18264,7 @@
           <p:cNvPr id="2" name="TextBox 2">
             <a:extLst xmlns:a="http://schemas.openxmlformats.org/drawingml/2006/main">
               <a:ext uri="{FF2B5EF4-FFF2-40B4-BE49-F238E27FC236}">
-                <a16:creationId xmlns:a16="http://schemas.microsoft.com/office/drawing/2014/main" id="{88DDF696-FF89-4C97-A02B-7159DE0DA07E}"/>
+                <a16:creationId xmlns:a16="http://schemas.microsoft.com/office/drawing/2014/main" id="{392557FE-A8A4-4FEC-8CDB-592BE8FEFB5D}"/>
               </a:ext>
             </a:extLst>
           </p:cNvPr>
@@ -18256,7 +18314,7 @@
           <p:cNvPr id="3" name="TextBox 3">
             <a:extLst xmlns:a="http://schemas.openxmlformats.org/drawingml/2006/main">
               <a:ext uri="{FF2B5EF4-FFF2-40B4-BE49-F238E27FC236}">
-                <a16:creationId xmlns:a16="http://schemas.microsoft.com/office/drawing/2014/main" id="{07D10B0D-61AD-442C-897C-CD6664927056}"/>
+                <a16:creationId xmlns:a16="http://schemas.microsoft.com/office/drawing/2014/main" id="{7D8C382D-8607-438B-A46F-480CD9487D07}"/>
               </a:ext>
             </a:extLst>
           </p:cNvPr>
@@ -18306,7 +18364,7 @@
           <p:cNvPr id="4" name="Rectangle 4">
             <a:extLst xmlns:a="http://schemas.openxmlformats.org/drawingml/2006/main">
               <a:ext uri="{FF2B5EF4-FFF2-40B4-BE49-F238E27FC236}">
-                <a16:creationId xmlns:a16="http://schemas.microsoft.com/office/drawing/2014/main" id="{053ABCD2-0E33-4FCF-92BB-0DA92C63B789}"/>
+                <a16:creationId xmlns:a16="http://schemas.microsoft.com/office/drawing/2014/main" id="{7DD3D955-68BC-4E19-8237-2466A37AA89B}"/>
               </a:ext>
             </a:extLst>
           </p:cNvPr>
@@ -18340,7 +18398,7 @@
           <p:cNvPr id="5" name="Rectangle 5">
             <a:extLst xmlns:a="http://schemas.openxmlformats.org/drawingml/2006/main">
               <a:ext uri="{FF2B5EF4-FFF2-40B4-BE49-F238E27FC236}">
-                <a16:creationId xmlns:a16="http://schemas.microsoft.com/office/drawing/2014/main" id="{AA05F335-0169-44C8-84BF-EE1A6157368B}"/>
+                <a16:creationId xmlns:a16="http://schemas.microsoft.com/office/drawing/2014/main" id="{4F35BEB7-FD0F-469E-9B95-FF5BC777EABC}"/>
               </a:ext>
             </a:extLst>
           </p:cNvPr>
@@ -18372,7 +18430,7 @@
           <p:cNvPr id="6" name="Ellipse 6">
             <a:extLst xmlns:a="http://schemas.openxmlformats.org/drawingml/2006/main">
               <a:ext uri="{FF2B5EF4-FFF2-40B4-BE49-F238E27FC236}">
-                <a16:creationId xmlns:a16="http://schemas.microsoft.com/office/drawing/2014/main" id="{979FFDC5-1972-4D02-8160-5F3005CC4DAE}"/>
+                <a16:creationId xmlns:a16="http://schemas.microsoft.com/office/drawing/2014/main" id="{C7689B68-86C9-4981-AA70-1149F0E253E9}"/>
               </a:ext>
             </a:extLst>
           </p:cNvPr>
@@ -18402,7 +18460,7 @@
           <p:cNvPr id="7" name="Ellipse 7">
             <a:extLst xmlns:a="http://schemas.openxmlformats.org/drawingml/2006/main">
               <a:ext uri="{FF2B5EF4-FFF2-40B4-BE49-F238E27FC236}">
-                <a16:creationId xmlns:a16="http://schemas.microsoft.com/office/drawing/2014/main" id="{0682449A-CE43-433B-BC79-1CF11DA7C31F}"/>
+                <a16:creationId xmlns:a16="http://schemas.microsoft.com/office/drawing/2014/main" id="{3F8E3768-857A-484D-9552-9A253396AF82}"/>
               </a:ext>
             </a:extLst>
           </p:cNvPr>
@@ -18432,7 +18490,7 @@
           <p:cNvPr id="8" name="Ellipse 8">
             <a:extLst xmlns:a="http://schemas.openxmlformats.org/drawingml/2006/main">
               <a:ext uri="{FF2B5EF4-FFF2-40B4-BE49-F238E27FC236}">
-                <a16:creationId xmlns:a16="http://schemas.microsoft.com/office/drawing/2014/main" id="{0ED014A1-2971-48F5-82E7-25068665753E}"/>
+                <a16:creationId xmlns:a16="http://schemas.microsoft.com/office/drawing/2014/main" id="{854AABA4-F559-46B5-9D35-4993AA9FC129}"/>
               </a:ext>
             </a:extLst>
           </p:cNvPr>
@@ -18466,7 +18524,7 @@
           <p:nvPr/>
         </p:nvPicPr>
         <p:blipFill>
-          <a:blip xmlns:r="http://schemas.openxmlformats.org/officeDocument/2006/relationships" xmlns:a="http://schemas.openxmlformats.org/drawingml/2006/main" r:embed="Rc544cf4839e94ac1"/>
+          <a:blip xmlns:r="http://schemas.openxmlformats.org/officeDocument/2006/relationships" xmlns:a="http://schemas.openxmlformats.org/drawingml/2006/main" r:embed="Rda2ff5c8f8ae4bdf"/>
           <a:stretch xmlns:a="http://schemas.openxmlformats.org/drawingml/2006/main">
             <a:fillRect l="0" t="0" r="0" b="0"/>
           </a:stretch>
@@ -18486,7 +18544,7 @@
           <p:cNvPr id="11" name="Rectangle 11">
             <a:extLst xmlns:a="http://schemas.openxmlformats.org/drawingml/2006/main">
               <a:ext uri="{FF2B5EF4-FFF2-40B4-BE49-F238E27FC236}">
-                <a16:creationId xmlns:a16="http://schemas.microsoft.com/office/drawing/2014/main" id="{F0C262F3-A1FE-48B1-9059-9B137DCE3B55}"/>
+                <a16:creationId xmlns:a16="http://schemas.microsoft.com/office/drawing/2014/main" id="{543F03B8-FB2F-4017-AEEF-D4FA237923D9}"/>
               </a:ext>
             </a:extLst>
           </p:cNvPr>
@@ -18520,7 +18578,7 @@
           <p:cNvPr id="12" name="Rectangle 12">
             <a:extLst xmlns:a="http://schemas.openxmlformats.org/drawingml/2006/main">
               <a:ext uri="{FF2B5EF4-FFF2-40B4-BE49-F238E27FC236}">
-                <a16:creationId xmlns:a16="http://schemas.microsoft.com/office/drawing/2014/main" id="{64550A6D-3B55-4D3A-A0A5-198229A24471}"/>
+                <a16:creationId xmlns:a16="http://schemas.microsoft.com/office/drawing/2014/main" id="{9F5AAF7A-744B-4840-A606-74B0612CC48C}"/>
               </a:ext>
             </a:extLst>
           </p:cNvPr>
@@ -18552,7 +18610,7 @@
           <p:cNvPr id="13" name="Ellipse 13">
             <a:extLst xmlns:a="http://schemas.openxmlformats.org/drawingml/2006/main">
               <a:ext uri="{FF2B5EF4-FFF2-40B4-BE49-F238E27FC236}">
-                <a16:creationId xmlns:a16="http://schemas.microsoft.com/office/drawing/2014/main" id="{BB3D0D3E-E43B-4484-8D16-8FBD122EBBD7}"/>
+                <a16:creationId xmlns:a16="http://schemas.microsoft.com/office/drawing/2014/main" id="{0C19F8F6-E030-41D3-B4E3-428D379EE34D}"/>
               </a:ext>
             </a:extLst>
           </p:cNvPr>
@@ -18582,7 +18640,7 @@
           <p:cNvPr id="14" name="Ellipse 14">
             <a:extLst xmlns:a="http://schemas.openxmlformats.org/drawingml/2006/main">
               <a:ext uri="{FF2B5EF4-FFF2-40B4-BE49-F238E27FC236}">
-                <a16:creationId xmlns:a16="http://schemas.microsoft.com/office/drawing/2014/main" id="{EC3F4A7E-976F-4469-A7B7-AC06AA731897}"/>
+                <a16:creationId xmlns:a16="http://schemas.microsoft.com/office/drawing/2014/main" id="{14DB6198-F801-428C-8CDC-2A4E254A0B9C}"/>
               </a:ext>
             </a:extLst>
           </p:cNvPr>
@@ -18612,7 +18670,7 @@
           <p:cNvPr id="15" name="Ellipse 15">
             <a:extLst xmlns:a="http://schemas.openxmlformats.org/drawingml/2006/main">
               <a:ext uri="{FF2B5EF4-FFF2-40B4-BE49-F238E27FC236}">
-                <a16:creationId xmlns:a16="http://schemas.microsoft.com/office/drawing/2014/main" id="{69215715-1268-463A-9AFB-D0B86277B2CB}"/>
+                <a16:creationId xmlns:a16="http://schemas.microsoft.com/office/drawing/2014/main" id="{4AB5173B-4258-4F31-8B52-DF90CA247C05}"/>
               </a:ext>
             </a:extLst>
           </p:cNvPr>
@@ -18646,7 +18704,7 @@
           <p:nvPr/>
         </p:nvPicPr>
         <p:blipFill>
-          <a:blip xmlns:r="http://schemas.openxmlformats.org/officeDocument/2006/relationships" xmlns:a="http://schemas.openxmlformats.org/drawingml/2006/main" r:embed="R3cbcaf964e934b93"/>
+          <a:blip xmlns:r="http://schemas.openxmlformats.org/officeDocument/2006/relationships" xmlns:a="http://schemas.openxmlformats.org/drawingml/2006/main" r:embed="R36f4b21b115e456f"/>
           <a:stretch xmlns:a="http://schemas.openxmlformats.org/drawingml/2006/main">
             <a:fillRect l="0" t="0" r="0" b="0"/>
           </a:stretch>
@@ -18666,7 +18724,7 @@
           <p:cNvPr id="18" name="Ellipse 18">
             <a:extLst xmlns:a="http://schemas.openxmlformats.org/drawingml/2006/main">
               <a:ext uri="{FF2B5EF4-FFF2-40B4-BE49-F238E27FC236}">
-                <a16:creationId xmlns:a16="http://schemas.microsoft.com/office/drawing/2014/main" id="{CF8FC183-3D55-42E2-BDFD-1708AD0E5B8D}"/>
+                <a16:creationId xmlns:a16="http://schemas.microsoft.com/office/drawing/2014/main" id="{7C6C0F92-3222-4677-B121-7F430EE1C4C9}"/>
               </a:ext>
             </a:extLst>
           </p:cNvPr>
@@ -18696,7 +18754,7 @@
           <p:cNvPr id="19" name="TextBox 19">
             <a:extLst xmlns:a="http://schemas.openxmlformats.org/drawingml/2006/main">
               <a:ext uri="{FF2B5EF4-FFF2-40B4-BE49-F238E27FC236}">
-                <a16:creationId xmlns:a16="http://schemas.microsoft.com/office/drawing/2014/main" id="{F38F61A4-E4FE-4353-80F7-831BE14F43C2}"/>
+                <a16:creationId xmlns:a16="http://schemas.microsoft.com/office/drawing/2014/main" id="{58F39ED1-5336-47CB-8FEB-54939A32B89E}"/>
               </a:ext>
             </a:extLst>
           </p:cNvPr>
@@ -18746,7 +18804,7 @@
           <p:cNvPr id="20" name="TextBox 20">
             <a:extLst xmlns:a="http://schemas.openxmlformats.org/drawingml/2006/main">
               <a:ext uri="{FF2B5EF4-FFF2-40B4-BE49-F238E27FC236}">
-                <a16:creationId xmlns:a16="http://schemas.microsoft.com/office/drawing/2014/main" id="{8ED286BE-2ECA-48B3-B947-8AC34A49DC1D}"/>
+                <a16:creationId xmlns:a16="http://schemas.microsoft.com/office/drawing/2014/main" id="{EE2476B9-0F4E-4D36-81AA-3EDCB951FAFE}"/>
               </a:ext>
             </a:extLst>
           </p:cNvPr>
@@ -18796,7 +18854,7 @@
           <p:cNvPr id="21" name="Freeform 21">
             <a:extLst xmlns:a="http://schemas.openxmlformats.org/drawingml/2006/main">
               <a:ext uri="{FF2B5EF4-FFF2-40B4-BE49-F238E27FC236}">
-                <a16:creationId xmlns:a16="http://schemas.microsoft.com/office/drawing/2014/main" id="{D943DBBF-0A2D-4CD0-972D-97AB355A0E4F}"/>
+                <a16:creationId xmlns:a16="http://schemas.microsoft.com/office/drawing/2014/main" id="{DDFD2841-6313-4A9A-A3AA-836DC2813C94}"/>
               </a:ext>
             </a:extLst>
           </p:cNvPr>
@@ -18839,7 +18897,7 @@
           <p:cNvPr id="22" name="Ellipse 22">
             <a:extLst xmlns:a="http://schemas.openxmlformats.org/drawingml/2006/main">
               <a:ext uri="{FF2B5EF4-FFF2-40B4-BE49-F238E27FC236}">
-                <a16:creationId xmlns:a16="http://schemas.microsoft.com/office/drawing/2014/main" id="{52DE137F-25F7-409E-A259-8F6740BB16ED}"/>
+                <a16:creationId xmlns:a16="http://schemas.microsoft.com/office/drawing/2014/main" id="{73B9399B-1911-41BD-BEE3-0C3175E8C505}"/>
               </a:ext>
             </a:extLst>
           </p:cNvPr>
@@ -18869,7 +18927,7 @@
           <p:cNvPr id="23" name="TextBox 23">
             <a:extLst xmlns:a="http://schemas.openxmlformats.org/drawingml/2006/main">
               <a:ext uri="{FF2B5EF4-FFF2-40B4-BE49-F238E27FC236}">
-                <a16:creationId xmlns:a16="http://schemas.microsoft.com/office/drawing/2014/main" id="{860F7A16-D87D-40CC-A9CD-F086E5687D9F}"/>
+                <a16:creationId xmlns:a16="http://schemas.microsoft.com/office/drawing/2014/main" id="{0A3A695A-6DFC-4B32-B7BA-D3FB04C8F55F}"/>
               </a:ext>
             </a:extLst>
           </p:cNvPr>
@@ -18919,7 +18977,7 @@
           <p:cNvPr id="24" name="TextBox 24">
             <a:extLst xmlns:a="http://schemas.openxmlformats.org/drawingml/2006/main">
               <a:ext uri="{FF2B5EF4-FFF2-40B4-BE49-F238E27FC236}">
-                <a16:creationId xmlns:a16="http://schemas.microsoft.com/office/drawing/2014/main" id="{A1EBBDE6-BB74-4DE5-BDDD-E32F39DCC721}"/>
+                <a16:creationId xmlns:a16="http://schemas.microsoft.com/office/drawing/2014/main" id="{1278901A-5539-4D8B-8BDB-28C88419C2DA}"/>
               </a:ext>
             </a:extLst>
           </p:cNvPr>
@@ -18969,7 +19027,7 @@
           <p:cNvPr id="25" name="Ellipse 25">
             <a:extLst xmlns:a="http://schemas.openxmlformats.org/drawingml/2006/main">
               <a:ext uri="{FF2B5EF4-FFF2-40B4-BE49-F238E27FC236}">
-                <a16:creationId xmlns:a16="http://schemas.microsoft.com/office/drawing/2014/main" id="{FD54991C-A2F3-46E5-9C57-7C2AF5E13DBA}"/>
+                <a16:creationId xmlns:a16="http://schemas.microsoft.com/office/drawing/2014/main" id="{DD55EFC5-0D9C-4816-A4BA-3CCA88258831}"/>
               </a:ext>
             </a:extLst>
           </p:cNvPr>
@@ -18999,7 +19057,7 @@
           <p:cNvPr id="26" name="TextBox 26">
             <a:extLst xmlns:a="http://schemas.openxmlformats.org/drawingml/2006/main">
               <a:ext uri="{FF2B5EF4-FFF2-40B4-BE49-F238E27FC236}">
-                <a16:creationId xmlns:a16="http://schemas.microsoft.com/office/drawing/2014/main" id="{DAB4C8A3-7789-4722-BBF2-F017D370E39F}"/>
+                <a16:creationId xmlns:a16="http://schemas.microsoft.com/office/drawing/2014/main" id="{CD61E0DD-3CA0-4C8F-AD5E-D970E89BF5D8}"/>
               </a:ext>
             </a:extLst>
           </p:cNvPr>
@@ -19049,7 +19107,7 @@
           <p:cNvPr id="27" name="TextBox 27">
             <a:extLst xmlns:a="http://schemas.openxmlformats.org/drawingml/2006/main">
               <a:ext uri="{FF2B5EF4-FFF2-40B4-BE49-F238E27FC236}">
-                <a16:creationId xmlns:a16="http://schemas.microsoft.com/office/drawing/2014/main" id="{66201E61-9503-4350-BD7E-0301C33A6F52}"/>
+                <a16:creationId xmlns:a16="http://schemas.microsoft.com/office/drawing/2014/main" id="{4B366CD8-934E-4058-B689-9302333F0CF3}"/>
               </a:ext>
             </a:extLst>
           </p:cNvPr>
@@ -19099,7 +19157,7 @@
           <p:cNvPr id="29" name="Rectangle 29">
             <a:extLst xmlns:a="http://schemas.openxmlformats.org/drawingml/2006/main">
               <a:ext uri="{FF2B5EF4-FFF2-40B4-BE49-F238E27FC236}">
-                <a16:creationId xmlns:a16="http://schemas.microsoft.com/office/drawing/2014/main" id="{799D1F9C-2B52-4EE3-9A0C-1058068AA22D}"/>
+                <a16:creationId xmlns:a16="http://schemas.microsoft.com/office/drawing/2014/main" id="{8AC9AF55-BEB9-4650-970B-23B775D6518D}"/>
               </a:ext>
             </a:extLst>
           </p:cNvPr>
@@ -19131,7 +19189,7 @@
           <p:cNvPr id="30" name="TextBox 30">
             <a:extLst xmlns:a="http://schemas.openxmlformats.org/drawingml/2006/main">
               <a:ext uri="{FF2B5EF4-FFF2-40B4-BE49-F238E27FC236}">
-                <a16:creationId xmlns:a16="http://schemas.microsoft.com/office/drawing/2014/main" id="{2167FA66-F8E9-49AC-B9B3-1EB30D61B886}"/>
+                <a16:creationId xmlns:a16="http://schemas.microsoft.com/office/drawing/2014/main" id="{00C4557E-AF1C-4EE2-820F-8870F5FB65D6}"/>
               </a:ext>
             </a:extLst>
           </p:cNvPr>
@@ -19181,7 +19239,7 @@
           <p:cNvPr id="31" name="TextBox 31">
             <a:extLst xmlns:a="http://schemas.openxmlformats.org/drawingml/2006/main">
               <a:ext uri="{FF2B5EF4-FFF2-40B4-BE49-F238E27FC236}">
-                <a16:creationId xmlns:a16="http://schemas.microsoft.com/office/drawing/2014/main" id="{83B4B6F5-5FF3-4911-B9E9-6C78682B97AB}"/>
+                <a16:creationId xmlns:a16="http://schemas.microsoft.com/office/drawing/2014/main" id="{839C9595-4236-4045-8DD4-7330CA3A79F3}"/>
               </a:ext>
             </a:extLst>
           </p:cNvPr>
@@ -19229,7 +19287,7 @@
     </p:spTree>
     <p:extLst>
       <p:ext uri="{BB962C8B-B14F-4D97-AF65-F5344CB8AC3E}">
-        <p14:creationId xmlns:p14="http://schemas.microsoft.com/office/powerpoint/2010/main" val="8623324"/>
+        <p14:creationId xmlns:p14="http://schemas.microsoft.com/office/powerpoint/2010/main" val="27296648"/>
       </p:ext>
     </p:extLst>
   </p:cSld>
@@ -19260,7 +19318,7 @@
           <p:cNvPr id="2" name="TextBox 2">
             <a:extLst xmlns:a="http://schemas.openxmlformats.org/drawingml/2006/main">
               <a:ext uri="{FF2B5EF4-FFF2-40B4-BE49-F238E27FC236}">
-                <a16:creationId xmlns:a16="http://schemas.microsoft.com/office/drawing/2014/main" id="{03B61207-5259-424E-A797-9C5D37C4C87A}"/>
+                <a16:creationId xmlns:a16="http://schemas.microsoft.com/office/drawing/2014/main" id="{939C3583-0287-4B4D-A502-D73E2A70BFA1}"/>
               </a:ext>
             </a:extLst>
           </p:cNvPr>
@@ -19310,7 +19368,7 @@
           <p:cNvPr id="3" name="TextBox 3">
             <a:extLst xmlns:a="http://schemas.openxmlformats.org/drawingml/2006/main">
               <a:ext uri="{FF2B5EF4-FFF2-40B4-BE49-F238E27FC236}">
-                <a16:creationId xmlns:a16="http://schemas.microsoft.com/office/drawing/2014/main" id="{315B0F26-4919-4E06-B0C3-4D3AE97593B8}"/>
+                <a16:creationId xmlns:a16="http://schemas.microsoft.com/office/drawing/2014/main" id="{9E1F3936-852A-4536-8F2C-02223889EFF7}"/>
               </a:ext>
             </a:extLst>
           </p:cNvPr>
@@ -19360,7 +19418,7 @@
           <p:cNvPr id="4" name="Ellipse 4">
             <a:extLst xmlns:a="http://schemas.openxmlformats.org/drawingml/2006/main">
               <a:ext uri="{FF2B5EF4-FFF2-40B4-BE49-F238E27FC236}">
-                <a16:creationId xmlns:a16="http://schemas.microsoft.com/office/drawing/2014/main" id="{B379DC9B-FC4D-48F3-9599-59462DF81F79}"/>
+                <a16:creationId xmlns:a16="http://schemas.microsoft.com/office/drawing/2014/main" id="{40EEBA90-DE48-444F-BB4B-A03BA2944433}"/>
               </a:ext>
             </a:extLst>
           </p:cNvPr>
@@ -19390,7 +19448,7 @@
           <p:cNvPr id="5" name="Freeform 5">
             <a:extLst xmlns:a="http://schemas.openxmlformats.org/drawingml/2006/main">
               <a:ext uri="{FF2B5EF4-FFF2-40B4-BE49-F238E27FC236}">
-                <a16:creationId xmlns:a16="http://schemas.microsoft.com/office/drawing/2014/main" id="{C0A74B2D-AEBC-4E72-B6D2-292153590541}"/>
+                <a16:creationId xmlns:a16="http://schemas.microsoft.com/office/drawing/2014/main" id="{64BAFDC7-DD4C-460A-9EE3-7AF4F2DF335A}"/>
               </a:ext>
             </a:extLst>
           </p:cNvPr>
@@ -19454,7 +19512,7 @@
           <p:cNvPr id="6" name="Ellipse 6">
             <a:extLst xmlns:a="http://schemas.openxmlformats.org/drawingml/2006/main">
               <a:ext uri="{FF2B5EF4-FFF2-40B4-BE49-F238E27FC236}">
-                <a16:creationId xmlns:a16="http://schemas.microsoft.com/office/drawing/2014/main" id="{9170A8B6-2AD3-4AB5-B69F-827ED3DD9546}"/>
+                <a16:creationId xmlns:a16="http://schemas.microsoft.com/office/drawing/2014/main" id="{59C030E0-3E62-4227-818B-FACAF4CAFF33}"/>
               </a:ext>
             </a:extLst>
           </p:cNvPr>
@@ -19484,7 +19542,7 @@
           <p:cNvPr id="7" name="Freeform 7">
             <a:extLst xmlns:a="http://schemas.openxmlformats.org/drawingml/2006/main">
               <a:ext uri="{FF2B5EF4-FFF2-40B4-BE49-F238E27FC236}">
-                <a16:creationId xmlns:a16="http://schemas.microsoft.com/office/drawing/2014/main" id="{99384969-A4C8-4FD1-80E5-4EE69A78A716}"/>
+                <a16:creationId xmlns:a16="http://schemas.microsoft.com/office/drawing/2014/main" id="{5F643FAC-18AF-4958-97A6-70F5EE34968A}"/>
               </a:ext>
             </a:extLst>
           </p:cNvPr>
@@ -19553,7 +19611,7 @@
           <p:cNvPr id="8" name="Freeform 8">
             <a:extLst xmlns:a="http://schemas.openxmlformats.org/drawingml/2006/main">
               <a:ext uri="{FF2B5EF4-FFF2-40B4-BE49-F238E27FC236}">
-                <a16:creationId xmlns:a16="http://schemas.microsoft.com/office/drawing/2014/main" id="{30905AE1-37ED-47DB-9885-EF6C1E262358}"/>
+                <a16:creationId xmlns:a16="http://schemas.microsoft.com/office/drawing/2014/main" id="{1500C3D4-E1F5-484C-B470-1D22DBC28C3B}"/>
               </a:ext>
             </a:extLst>
           </p:cNvPr>
@@ -19593,7 +19651,7 @@
           <p:cNvPr id="9" name="Freeform 9">
             <a:extLst xmlns:a="http://schemas.openxmlformats.org/drawingml/2006/main">
               <a:ext uri="{FF2B5EF4-FFF2-40B4-BE49-F238E27FC236}">
-                <a16:creationId xmlns:a16="http://schemas.microsoft.com/office/drawing/2014/main" id="{3117B00E-DA90-4413-B24D-41BAFA1C2B67}"/>
+                <a16:creationId xmlns:a16="http://schemas.microsoft.com/office/drawing/2014/main" id="{716C3FA1-E276-4ABA-AB35-71A390241AA6}"/>
               </a:ext>
             </a:extLst>
           </p:cNvPr>
@@ -19633,7 +19691,7 @@
           <p:cNvPr id="10" name="Freeform 10">
             <a:extLst xmlns:a="http://schemas.openxmlformats.org/drawingml/2006/main">
               <a:ext uri="{FF2B5EF4-FFF2-40B4-BE49-F238E27FC236}">
-                <a16:creationId xmlns:a16="http://schemas.microsoft.com/office/drawing/2014/main" id="{1CA22FBF-C93E-46E8-B57D-11CFAFD12839}"/>
+                <a16:creationId xmlns:a16="http://schemas.microsoft.com/office/drawing/2014/main" id="{B2F3BCA2-027A-4E77-8FC3-CCB03C9C67D9}"/>
               </a:ext>
             </a:extLst>
           </p:cNvPr>
@@ -19673,7 +19731,7 @@
           <p:cNvPr id="11" name="Freeform 11">
             <a:extLst xmlns:a="http://schemas.openxmlformats.org/drawingml/2006/main">
               <a:ext uri="{FF2B5EF4-FFF2-40B4-BE49-F238E27FC236}">
-                <a16:creationId xmlns:a16="http://schemas.microsoft.com/office/drawing/2014/main" id="{98733872-9A71-454A-94B6-3D99F52916C7}"/>
+                <a16:creationId xmlns:a16="http://schemas.microsoft.com/office/drawing/2014/main" id="{4C823FBB-EAA2-45F1-93A5-B785C8710167}"/>
               </a:ext>
             </a:extLst>
           </p:cNvPr>
@@ -19713,7 +19771,7 @@
           <p:cNvPr id="12" name="Freeform 12">
             <a:extLst xmlns:a="http://schemas.openxmlformats.org/drawingml/2006/main">
               <a:ext uri="{FF2B5EF4-FFF2-40B4-BE49-F238E27FC236}">
-                <a16:creationId xmlns:a16="http://schemas.microsoft.com/office/drawing/2014/main" id="{71E0F737-8196-4C43-B57B-6FFF0A73AB5F}"/>
+                <a16:creationId xmlns:a16="http://schemas.microsoft.com/office/drawing/2014/main" id="{1A13D4FC-A8D1-4325-9C7D-39DB0635D952}"/>
               </a:ext>
             </a:extLst>
           </p:cNvPr>
@@ -19753,7 +19811,7 @@
           <p:cNvPr id="13" name="Freeform 13">
             <a:extLst xmlns:a="http://schemas.openxmlformats.org/drawingml/2006/main">
               <a:ext uri="{FF2B5EF4-FFF2-40B4-BE49-F238E27FC236}">
-                <a16:creationId xmlns:a16="http://schemas.microsoft.com/office/drawing/2014/main" id="{356D63A1-6728-4B6A-8E9B-80AE0382E86C}"/>
+                <a16:creationId xmlns:a16="http://schemas.microsoft.com/office/drawing/2014/main" id="{9BAE11E3-EE3A-45AB-99C4-9CC011650445}"/>
               </a:ext>
             </a:extLst>
           </p:cNvPr>
@@ -19793,7 +19851,7 @@
           <p:cNvPr id="14" name="Freeform 14">
             <a:extLst xmlns:a="http://schemas.openxmlformats.org/drawingml/2006/main">
               <a:ext uri="{FF2B5EF4-FFF2-40B4-BE49-F238E27FC236}">
-                <a16:creationId xmlns:a16="http://schemas.microsoft.com/office/drawing/2014/main" id="{9F9F48BC-80F0-4FBB-B85E-19A3D322167E}"/>
+                <a16:creationId xmlns:a16="http://schemas.microsoft.com/office/drawing/2014/main" id="{1BBCC938-805A-439E-8997-36990628487C}"/>
               </a:ext>
             </a:extLst>
           </p:cNvPr>
@@ -19833,7 +19891,7 @@
           <p:cNvPr id="15" name="Freeform 15">
             <a:extLst xmlns:a="http://schemas.openxmlformats.org/drawingml/2006/main">
               <a:ext uri="{FF2B5EF4-FFF2-40B4-BE49-F238E27FC236}">
-                <a16:creationId xmlns:a16="http://schemas.microsoft.com/office/drawing/2014/main" id="{071F8022-A2C0-4C6B-8E36-59797754E813}"/>
+                <a16:creationId xmlns:a16="http://schemas.microsoft.com/office/drawing/2014/main" id="{32343008-1AA9-4F56-AEA7-6521F9DFFE8E}"/>
               </a:ext>
             </a:extLst>
           </p:cNvPr>
@@ -19873,7 +19931,7 @@
           <p:cNvPr id="17" name="TextBox 17">
             <a:extLst xmlns:a="http://schemas.openxmlformats.org/drawingml/2006/main">
               <a:ext uri="{FF2B5EF4-FFF2-40B4-BE49-F238E27FC236}">
-                <a16:creationId xmlns:a16="http://schemas.microsoft.com/office/drawing/2014/main" id="{F2FE61FC-ADC4-40BF-9064-3C3F15E2C487}"/>
+                <a16:creationId xmlns:a16="http://schemas.microsoft.com/office/drawing/2014/main" id="{FA51B51A-3CCD-4421-AABE-FDA779B0C25B}"/>
               </a:ext>
             </a:extLst>
           </p:cNvPr>
@@ -19923,7 +19981,7 @@
           <p:cNvPr id="18" name="TextBox 18">
             <a:extLst xmlns:a="http://schemas.openxmlformats.org/drawingml/2006/main">
               <a:ext uri="{FF2B5EF4-FFF2-40B4-BE49-F238E27FC236}">
-                <a16:creationId xmlns:a16="http://schemas.microsoft.com/office/drawing/2014/main" id="{982196DB-B299-4D6E-826C-5329C1D566F1}"/>
+                <a16:creationId xmlns:a16="http://schemas.microsoft.com/office/drawing/2014/main" id="{93FD6B98-B64A-4F33-987B-EE04F3205F16}"/>
               </a:ext>
             </a:extLst>
           </p:cNvPr>
@@ -19973,7 +20031,7 @@
           <p:cNvPr id="19" name="Ellipse 19">
             <a:extLst xmlns:a="http://schemas.openxmlformats.org/drawingml/2006/main">
               <a:ext uri="{FF2B5EF4-FFF2-40B4-BE49-F238E27FC236}">
-                <a16:creationId xmlns:a16="http://schemas.microsoft.com/office/drawing/2014/main" id="{001BD454-34AA-484E-9A39-2C735D7995DB}"/>
+                <a16:creationId xmlns:a16="http://schemas.microsoft.com/office/drawing/2014/main" id="{8E4CAD1A-F527-4CE4-8A9F-2FB10289C8DC}"/>
               </a:ext>
             </a:extLst>
           </p:cNvPr>
@@ -20005,7 +20063,7 @@
           <p:cNvPr id="20" name="Freeform 20">
             <a:extLst xmlns:a="http://schemas.openxmlformats.org/drawingml/2006/main">
               <a:ext uri="{FF2B5EF4-FFF2-40B4-BE49-F238E27FC236}">
-                <a16:creationId xmlns:a16="http://schemas.microsoft.com/office/drawing/2014/main" id="{2BBDC682-7A18-4462-9129-4AEE5054E537}"/>
+                <a16:creationId xmlns:a16="http://schemas.microsoft.com/office/drawing/2014/main" id="{E5B4FADB-A669-478E-89E1-452BA5E9320A}"/>
               </a:ext>
             </a:extLst>
           </p:cNvPr>
@@ -20074,7 +20132,7 @@
           <p:cNvPr id="21" name="Freeform 21">
             <a:extLst xmlns:a="http://schemas.openxmlformats.org/drawingml/2006/main">
               <a:ext uri="{FF2B5EF4-FFF2-40B4-BE49-F238E27FC236}">
-                <a16:creationId xmlns:a16="http://schemas.microsoft.com/office/drawing/2014/main" id="{8D17E981-6F59-449D-A641-74C50FC60D01}"/>
+                <a16:creationId xmlns:a16="http://schemas.microsoft.com/office/drawing/2014/main" id="{C4F65659-819B-45C1-9B5D-24321AF0BE7E}"/>
               </a:ext>
             </a:extLst>
           </p:cNvPr>
@@ -20117,7 +20175,7 @@
           <p:cNvPr id="23" name="TextBox 23">
             <a:extLst xmlns:a="http://schemas.openxmlformats.org/drawingml/2006/main">
               <a:ext uri="{FF2B5EF4-FFF2-40B4-BE49-F238E27FC236}">
-                <a16:creationId xmlns:a16="http://schemas.microsoft.com/office/drawing/2014/main" id="{9724B66F-B443-41AA-9249-AD6637770C35}"/>
+                <a16:creationId xmlns:a16="http://schemas.microsoft.com/office/drawing/2014/main" id="{8636F0F9-F9BE-4D23-B6FE-7A5D4BC56787}"/>
               </a:ext>
             </a:extLst>
           </p:cNvPr>
@@ -20167,7 +20225,7 @@
           <p:cNvPr id="25" name="Ellipse 25">
             <a:extLst xmlns:a="http://schemas.openxmlformats.org/drawingml/2006/main">
               <a:ext uri="{FF2B5EF4-FFF2-40B4-BE49-F238E27FC236}">
-                <a16:creationId xmlns:a16="http://schemas.microsoft.com/office/drawing/2014/main" id="{82CCB3AF-8973-4239-A98E-3B4B8837CAC6}"/>
+                <a16:creationId xmlns:a16="http://schemas.microsoft.com/office/drawing/2014/main" id="{72C94C7E-2052-4FE1-87B8-B39E37265F0B}"/>
               </a:ext>
             </a:extLst>
           </p:cNvPr>
@@ -20199,7 +20257,7 @@
           <p:cNvPr id="26" name="Freeform 26">
             <a:extLst xmlns:a="http://schemas.openxmlformats.org/drawingml/2006/main">
               <a:ext uri="{FF2B5EF4-FFF2-40B4-BE49-F238E27FC236}">
-                <a16:creationId xmlns:a16="http://schemas.microsoft.com/office/drawing/2014/main" id="{FD98CDA5-B795-476F-B500-FD450054056C}"/>
+                <a16:creationId xmlns:a16="http://schemas.microsoft.com/office/drawing/2014/main" id="{95D63B18-1CAF-43D7-8AE2-2FD7C2899615}"/>
               </a:ext>
             </a:extLst>
           </p:cNvPr>
@@ -20239,7 +20297,7 @@
           <p:cNvPr id="27" name="Freeform 27">
             <a:extLst xmlns:a="http://schemas.openxmlformats.org/drawingml/2006/main">
               <a:ext uri="{FF2B5EF4-FFF2-40B4-BE49-F238E27FC236}">
-                <a16:creationId xmlns:a16="http://schemas.microsoft.com/office/drawing/2014/main" id="{C6B25491-A354-46E1-8DB3-126B25B54D2F}"/>
+                <a16:creationId xmlns:a16="http://schemas.microsoft.com/office/drawing/2014/main" id="{BEA54D64-9F5B-43BA-B236-E7ECDA8ECFF2}"/>
               </a:ext>
             </a:extLst>
           </p:cNvPr>
@@ -20315,7 +20373,7 @@
           <p:cNvPr id="28" name="Freeform 28">
             <a:extLst xmlns:a="http://schemas.openxmlformats.org/drawingml/2006/main">
               <a:ext uri="{FF2B5EF4-FFF2-40B4-BE49-F238E27FC236}">
-                <a16:creationId xmlns:a16="http://schemas.microsoft.com/office/drawing/2014/main" id="{E0845A7A-E51E-4829-92E7-A4D75DF01763}"/>
+                <a16:creationId xmlns:a16="http://schemas.microsoft.com/office/drawing/2014/main" id="{07E228CF-2C7F-4A71-B2A4-29FA17DD0DF1}"/>
               </a:ext>
             </a:extLst>
           </p:cNvPr>
@@ -20355,7 +20413,7 @@
           <p:cNvPr id="30" name="TextBox 30">
             <a:extLst xmlns:a="http://schemas.openxmlformats.org/drawingml/2006/main">
               <a:ext uri="{FF2B5EF4-FFF2-40B4-BE49-F238E27FC236}">
-                <a16:creationId xmlns:a16="http://schemas.microsoft.com/office/drawing/2014/main" id="{064A0F33-EADA-4030-9878-FDE7299D5167}"/>
+                <a16:creationId xmlns:a16="http://schemas.microsoft.com/office/drawing/2014/main" id="{E08F3C63-B92B-4E7E-9FA8-3A0D03B3CB8F}"/>
               </a:ext>
             </a:extLst>
           </p:cNvPr>
@@ -20405,7 +20463,7 @@
           <p:cNvPr id="32" name="Ellipse 32">
             <a:extLst xmlns:a="http://schemas.openxmlformats.org/drawingml/2006/main">
               <a:ext uri="{FF2B5EF4-FFF2-40B4-BE49-F238E27FC236}">
-                <a16:creationId xmlns:a16="http://schemas.microsoft.com/office/drawing/2014/main" id="{872FC786-15F6-47AE-BF32-D94450E68353}"/>
+                <a16:creationId xmlns:a16="http://schemas.microsoft.com/office/drawing/2014/main" id="{FDA97320-4A9A-48BE-BA55-2CFFE5194733}"/>
               </a:ext>
             </a:extLst>
           </p:cNvPr>
@@ -20437,7 +20495,7 @@
           <p:cNvPr id="33" name="Freeform 33">
             <a:extLst xmlns:a="http://schemas.openxmlformats.org/drawingml/2006/main">
               <a:ext uri="{FF2B5EF4-FFF2-40B4-BE49-F238E27FC236}">
-                <a16:creationId xmlns:a16="http://schemas.microsoft.com/office/drawing/2014/main" id="{F7F6899B-35F9-4B17-B2A6-1921D18E47BA}"/>
+                <a16:creationId xmlns:a16="http://schemas.microsoft.com/office/drawing/2014/main" id="{59AFA5DF-ECB5-4496-A8EF-475996133E21}"/>
               </a:ext>
             </a:extLst>
           </p:cNvPr>
@@ -20506,7 +20564,7 @@
           <p:cNvPr id="34" name="Freeform 34">
             <a:extLst xmlns:a="http://schemas.openxmlformats.org/drawingml/2006/main">
               <a:ext uri="{FF2B5EF4-FFF2-40B4-BE49-F238E27FC236}">
-                <a16:creationId xmlns:a16="http://schemas.microsoft.com/office/drawing/2014/main" id="{C36783A0-9E89-437C-AC45-50D14AA06389}"/>
+                <a16:creationId xmlns:a16="http://schemas.microsoft.com/office/drawing/2014/main" id="{67AD7637-4430-4CDA-B141-82619F53E90F}"/>
               </a:ext>
             </a:extLst>
           </p:cNvPr>
@@ -20575,7 +20633,7 @@
           <p:cNvPr id="35" name="Freeform 35">
             <a:extLst xmlns:a="http://schemas.openxmlformats.org/drawingml/2006/main">
               <a:ext uri="{FF2B5EF4-FFF2-40B4-BE49-F238E27FC236}">
-                <a16:creationId xmlns:a16="http://schemas.microsoft.com/office/drawing/2014/main" id="{14C27848-4357-4292-8FB9-C7576961B3D9}"/>
+                <a16:creationId xmlns:a16="http://schemas.microsoft.com/office/drawing/2014/main" id="{499EA75E-689F-4712-A66C-E5C093C5112C}"/>
               </a:ext>
             </a:extLst>
           </p:cNvPr>
@@ -20644,7 +20702,7 @@
           <p:cNvPr id="36" name="Freeform 36">
             <a:extLst xmlns:a="http://schemas.openxmlformats.org/drawingml/2006/main">
               <a:ext uri="{FF2B5EF4-FFF2-40B4-BE49-F238E27FC236}">
-                <a16:creationId xmlns:a16="http://schemas.microsoft.com/office/drawing/2014/main" id="{81401186-FD01-461E-B3A7-7712FE616DB3}"/>
+                <a16:creationId xmlns:a16="http://schemas.microsoft.com/office/drawing/2014/main" id="{D62B5EC7-4C16-4A88-8ABF-57C82122A0FD}"/>
               </a:ext>
             </a:extLst>
           </p:cNvPr>
@@ -20684,7 +20742,7 @@
           <p:cNvPr id="38" name="TextBox 38">
             <a:extLst xmlns:a="http://schemas.openxmlformats.org/drawingml/2006/main">
               <a:ext uri="{FF2B5EF4-FFF2-40B4-BE49-F238E27FC236}">
-                <a16:creationId xmlns:a16="http://schemas.microsoft.com/office/drawing/2014/main" id="{C8EFA424-E182-4B04-AC04-61FA0C70245C}"/>
+                <a16:creationId xmlns:a16="http://schemas.microsoft.com/office/drawing/2014/main" id="{FD6457DE-F2C2-4321-AD47-1AFB9883999A}"/>
               </a:ext>
             </a:extLst>
           </p:cNvPr>
@@ -20734,7 +20792,7 @@
           <p:cNvPr id="40" name="Ellipse 40">
             <a:extLst xmlns:a="http://schemas.openxmlformats.org/drawingml/2006/main">
               <a:ext uri="{FF2B5EF4-FFF2-40B4-BE49-F238E27FC236}">
-                <a16:creationId xmlns:a16="http://schemas.microsoft.com/office/drawing/2014/main" id="{31B57D1E-F146-481A-B770-8DEC33F90907}"/>
+                <a16:creationId xmlns:a16="http://schemas.microsoft.com/office/drawing/2014/main" id="{B1E2814B-FFC4-4D5D-A85B-4FA3E1B436A2}"/>
               </a:ext>
             </a:extLst>
           </p:cNvPr>
@@ -20766,7 +20824,7 @@
           <p:cNvPr id="41" name="Freeform 41">
             <a:extLst xmlns:a="http://schemas.openxmlformats.org/drawingml/2006/main">
               <a:ext uri="{FF2B5EF4-FFF2-40B4-BE49-F238E27FC236}">
-                <a16:creationId xmlns:a16="http://schemas.microsoft.com/office/drawing/2014/main" id="{DD76C6E7-9B2E-4CA6-BAE8-B780CFD931F4}"/>
+                <a16:creationId xmlns:a16="http://schemas.microsoft.com/office/drawing/2014/main" id="{CB80B653-641C-4AEC-8464-0AB4A7C8721E}"/>
               </a:ext>
             </a:extLst>
           </p:cNvPr>
@@ -20816,7 +20874,7 @@
           <p:cNvPr id="42" name="Freeform 42">
             <a:extLst xmlns:a="http://schemas.openxmlformats.org/drawingml/2006/main">
               <a:ext uri="{FF2B5EF4-FFF2-40B4-BE49-F238E27FC236}">
-                <a16:creationId xmlns:a16="http://schemas.microsoft.com/office/drawing/2014/main" id="{2AB1B193-7EF6-40EF-9B80-C31F19E87C21}"/>
+                <a16:creationId xmlns:a16="http://schemas.microsoft.com/office/drawing/2014/main" id="{2CEB5E74-3679-47EA-A0C2-4C5E583D5750}"/>
               </a:ext>
             </a:extLst>
           </p:cNvPr>
@@ -20861,7 +20919,7 @@
           <p:cNvPr id="43" name="Freeform 43">
             <a:extLst xmlns:a="http://schemas.openxmlformats.org/drawingml/2006/main">
               <a:ext uri="{FF2B5EF4-FFF2-40B4-BE49-F238E27FC236}">
-                <a16:creationId xmlns:a16="http://schemas.microsoft.com/office/drawing/2014/main" id="{758F7798-A539-4B89-8783-98BC03CEBC78}"/>
+                <a16:creationId xmlns:a16="http://schemas.microsoft.com/office/drawing/2014/main" id="{9A30CE5D-F2DA-448C-A097-03A04636A634}"/>
               </a:ext>
             </a:extLst>
           </p:cNvPr>
@@ -20928,7 +20986,7 @@
           <p:cNvPr id="44" name="Freeform 44">
             <a:extLst xmlns:a="http://schemas.openxmlformats.org/drawingml/2006/main">
               <a:ext uri="{FF2B5EF4-FFF2-40B4-BE49-F238E27FC236}">
-                <a16:creationId xmlns:a16="http://schemas.microsoft.com/office/drawing/2014/main" id="{C9289E4E-6731-49EE-AF3F-6CA1014FD351}"/>
+                <a16:creationId xmlns:a16="http://schemas.microsoft.com/office/drawing/2014/main" id="{D522D663-D1D1-4AD8-9D14-D08D7FD8A6BF}"/>
               </a:ext>
             </a:extLst>
           </p:cNvPr>
@@ -20968,7 +21026,7 @@
           <p:cNvPr id="46" name="TextBox 46">
             <a:extLst xmlns:a="http://schemas.openxmlformats.org/drawingml/2006/main">
               <a:ext uri="{FF2B5EF4-FFF2-40B4-BE49-F238E27FC236}">
-                <a16:creationId xmlns:a16="http://schemas.microsoft.com/office/drawing/2014/main" id="{ADD7A045-3E8D-4327-B891-054493B9498B}"/>
+                <a16:creationId xmlns:a16="http://schemas.microsoft.com/office/drawing/2014/main" id="{EE6E71EF-50F9-4D7A-B34D-2A491DB7A785}"/>
               </a:ext>
             </a:extLst>
           </p:cNvPr>
@@ -21018,7 +21076,7 @@
           <p:cNvPr id="48" name="Ellipse 48">
             <a:extLst xmlns:a="http://schemas.openxmlformats.org/drawingml/2006/main">
               <a:ext uri="{FF2B5EF4-FFF2-40B4-BE49-F238E27FC236}">
-                <a16:creationId xmlns:a16="http://schemas.microsoft.com/office/drawing/2014/main" id="{9049C5FA-584D-496F-BF78-D9FF8ADDDCA9}"/>
+                <a16:creationId xmlns:a16="http://schemas.microsoft.com/office/drawing/2014/main" id="{C15E113E-8646-49F8-808A-29F1B92BB38D}"/>
               </a:ext>
             </a:extLst>
           </p:cNvPr>
@@ -21050,7 +21108,7 @@
           <p:cNvPr id="49" name="Freeform 49">
             <a:extLst xmlns:a="http://schemas.openxmlformats.org/drawingml/2006/main">
               <a:ext uri="{FF2B5EF4-FFF2-40B4-BE49-F238E27FC236}">
-                <a16:creationId xmlns:a16="http://schemas.microsoft.com/office/drawing/2014/main" id="{7ADDB0FA-C344-460E-9B6A-909A70237838}"/>
+                <a16:creationId xmlns:a16="http://schemas.microsoft.com/office/drawing/2014/main" id="{1C092B74-7735-42FB-AB58-BF2C8ECBAE80}"/>
               </a:ext>
             </a:extLst>
           </p:cNvPr>
@@ -21107,7 +21165,7 @@
           <p:cNvPr id="50" name="Freeform 50">
             <a:extLst xmlns:a="http://schemas.openxmlformats.org/drawingml/2006/main">
               <a:ext uri="{FF2B5EF4-FFF2-40B4-BE49-F238E27FC236}">
-                <a16:creationId xmlns:a16="http://schemas.microsoft.com/office/drawing/2014/main" id="{15E86050-EDF8-49B4-A4CD-A2E64DF2DA3F}"/>
+                <a16:creationId xmlns:a16="http://schemas.microsoft.com/office/drawing/2014/main" id="{7B791BBC-DA57-48FC-93AF-F920ED02494E}"/>
               </a:ext>
             </a:extLst>
           </p:cNvPr>
@@ -21160,7 +21218,7 @@
           <p:cNvPr id="51" name="Freeform 51">
             <a:extLst xmlns:a="http://schemas.openxmlformats.org/drawingml/2006/main">
               <a:ext uri="{FF2B5EF4-FFF2-40B4-BE49-F238E27FC236}">
-                <a16:creationId xmlns:a16="http://schemas.microsoft.com/office/drawing/2014/main" id="{FE566FE5-4C69-45FD-B479-901AE34F309C}"/>
+                <a16:creationId xmlns:a16="http://schemas.microsoft.com/office/drawing/2014/main" id="{DC79837C-4030-492D-BD33-E832D694812C}"/>
               </a:ext>
             </a:extLst>
           </p:cNvPr>
@@ -21213,7 +21271,7 @@
           <p:cNvPr id="53" name="TextBox 53">
             <a:extLst xmlns:a="http://schemas.openxmlformats.org/drawingml/2006/main">
               <a:ext uri="{FF2B5EF4-FFF2-40B4-BE49-F238E27FC236}">
-                <a16:creationId xmlns:a16="http://schemas.microsoft.com/office/drawing/2014/main" id="{CBEA9CB5-1B59-488B-BBCD-D57EB7AEED63}"/>
+                <a16:creationId xmlns:a16="http://schemas.microsoft.com/office/drawing/2014/main" id="{0376543A-2404-49E7-8B16-8F1DCEB306B8}"/>
               </a:ext>
             </a:extLst>
           </p:cNvPr>
@@ -21263,7 +21321,7 @@
           <p:cNvPr id="56" name="Rectangle 56">
             <a:extLst xmlns:a="http://schemas.openxmlformats.org/drawingml/2006/main">
               <a:ext uri="{FF2B5EF4-FFF2-40B4-BE49-F238E27FC236}">
-                <a16:creationId xmlns:a16="http://schemas.microsoft.com/office/drawing/2014/main" id="{F42C8662-0D54-46F5-AB78-695E5FF7DFC1}"/>
+                <a16:creationId xmlns:a16="http://schemas.microsoft.com/office/drawing/2014/main" id="{AC7DB073-031D-4A2D-811A-BF6A80BF73A7}"/>
               </a:ext>
             </a:extLst>
           </p:cNvPr>
@@ -21297,7 +21355,7 @@
           <p:cNvPr id="57" name="TextBox 57">
             <a:extLst xmlns:a="http://schemas.openxmlformats.org/drawingml/2006/main">
               <a:ext uri="{FF2B5EF4-FFF2-40B4-BE49-F238E27FC236}">
-                <a16:creationId xmlns:a16="http://schemas.microsoft.com/office/drawing/2014/main" id="{6E7CB604-8C1E-478B-97AC-281C5015B3EA}"/>
+                <a16:creationId xmlns:a16="http://schemas.microsoft.com/office/drawing/2014/main" id="{68A455E8-A4FB-4F92-9110-9CA6ED85918E}"/>
               </a:ext>
             </a:extLst>
           </p:cNvPr>
@@ -21347,7 +21405,7 @@
           <p:cNvPr id="58" name="Freeform 58">
             <a:extLst xmlns:a="http://schemas.openxmlformats.org/drawingml/2006/main">
               <a:ext uri="{FF2B5EF4-FFF2-40B4-BE49-F238E27FC236}">
-                <a16:creationId xmlns:a16="http://schemas.microsoft.com/office/drawing/2014/main" id="{729BB7CE-AD21-41A8-B533-FE9C0767A17E}"/>
+                <a16:creationId xmlns:a16="http://schemas.microsoft.com/office/drawing/2014/main" id="{846CBA1F-1F3C-4194-B9B8-184F5E4AE29B}"/>
               </a:ext>
             </a:extLst>
           </p:cNvPr>
@@ -21394,7 +21452,7 @@
           <p:cNvPr id="59" name="Ellipse 59">
             <a:extLst xmlns:a="http://schemas.openxmlformats.org/drawingml/2006/main">
               <a:ext uri="{FF2B5EF4-FFF2-40B4-BE49-F238E27FC236}">
-                <a16:creationId xmlns:a16="http://schemas.microsoft.com/office/drawing/2014/main" id="{23203893-176E-44A4-9EF5-DE9D219D4572}"/>
+                <a16:creationId xmlns:a16="http://schemas.microsoft.com/office/drawing/2014/main" id="{63EE1B93-A65C-4968-BE47-4D226B5E59B2}"/>
               </a:ext>
             </a:extLst>
           </p:cNvPr>
@@ -21426,7 +21484,7 @@
           <p:cNvPr id="60" name="TextBox 60">
             <a:extLst xmlns:a="http://schemas.openxmlformats.org/drawingml/2006/main">
               <a:ext uri="{FF2B5EF4-FFF2-40B4-BE49-F238E27FC236}">
-                <a16:creationId xmlns:a16="http://schemas.microsoft.com/office/drawing/2014/main" id="{87176904-BEEF-4334-87E8-EF1C48944DEF}"/>
+                <a16:creationId xmlns:a16="http://schemas.microsoft.com/office/drawing/2014/main" id="{774156BF-0179-460B-9F48-74AEEE477FE2}"/>
               </a:ext>
             </a:extLst>
           </p:cNvPr>
@@ -21476,7 +21534,7 @@
           <p:cNvPr id="61" name="TextBox 61">
             <a:extLst xmlns:a="http://schemas.openxmlformats.org/drawingml/2006/main">
               <a:ext uri="{FF2B5EF4-FFF2-40B4-BE49-F238E27FC236}">
-                <a16:creationId xmlns:a16="http://schemas.microsoft.com/office/drawing/2014/main" id="{B651D57E-3805-4D0C-B1B2-2390160F49E8}"/>
+                <a16:creationId xmlns:a16="http://schemas.microsoft.com/office/drawing/2014/main" id="{94D0E6B3-9B2B-4E5A-BF7A-90E6AC60E421}"/>
               </a:ext>
             </a:extLst>
           </p:cNvPr>
@@ -21526,7 +21584,7 @@
           <p:cNvPr id="62" name="Ellipse 62">
             <a:extLst xmlns:a="http://schemas.openxmlformats.org/drawingml/2006/main">
               <a:ext uri="{FF2B5EF4-FFF2-40B4-BE49-F238E27FC236}">
-                <a16:creationId xmlns:a16="http://schemas.microsoft.com/office/drawing/2014/main" id="{C5A7D326-3E16-43BC-85D6-2A39E94A08A1}"/>
+                <a16:creationId xmlns:a16="http://schemas.microsoft.com/office/drawing/2014/main" id="{920AC79A-4669-4328-AC40-8D9213EC1066}"/>
               </a:ext>
             </a:extLst>
           </p:cNvPr>
@@ -21558,7 +21616,7 @@
           <p:cNvPr id="63" name="TextBox 63">
             <a:extLst xmlns:a="http://schemas.openxmlformats.org/drawingml/2006/main">
               <a:ext uri="{FF2B5EF4-FFF2-40B4-BE49-F238E27FC236}">
-                <a16:creationId xmlns:a16="http://schemas.microsoft.com/office/drawing/2014/main" id="{0A8B65C5-B3A8-489F-938D-1BD97D2F1DD7}"/>
+                <a16:creationId xmlns:a16="http://schemas.microsoft.com/office/drawing/2014/main" id="{2980DB91-BB58-43F4-AB02-389955757C6B}"/>
               </a:ext>
             </a:extLst>
           </p:cNvPr>
@@ -21608,7 +21666,7 @@
           <p:cNvPr id="64" name="TextBox 64">
             <a:extLst xmlns:a="http://schemas.openxmlformats.org/drawingml/2006/main">
               <a:ext uri="{FF2B5EF4-FFF2-40B4-BE49-F238E27FC236}">
-                <a16:creationId xmlns:a16="http://schemas.microsoft.com/office/drawing/2014/main" id="{6F676A15-A34F-4D90-B2F3-83C50007D6CF}"/>
+                <a16:creationId xmlns:a16="http://schemas.microsoft.com/office/drawing/2014/main" id="{C3287806-37C3-430C-ADB4-245847654EEE}"/>
               </a:ext>
             </a:extLst>
           </p:cNvPr>
@@ -21658,7 +21716,7 @@
           <p:cNvPr id="65" name="Ellipse 65">
             <a:extLst xmlns:a="http://schemas.openxmlformats.org/drawingml/2006/main">
               <a:ext uri="{FF2B5EF4-FFF2-40B4-BE49-F238E27FC236}">
-                <a16:creationId xmlns:a16="http://schemas.microsoft.com/office/drawing/2014/main" id="{CF057C96-8CF5-4BBF-9E25-DE7064069822}"/>
+                <a16:creationId xmlns:a16="http://schemas.microsoft.com/office/drawing/2014/main" id="{1F7F6DC2-A44C-4668-895E-73E1D05FEABD}"/>
               </a:ext>
             </a:extLst>
           </p:cNvPr>
@@ -21690,7 +21748,7 @@
           <p:cNvPr id="66" name="TextBox 66">
             <a:extLst xmlns:a="http://schemas.openxmlformats.org/drawingml/2006/main">
               <a:ext uri="{FF2B5EF4-FFF2-40B4-BE49-F238E27FC236}">
-                <a16:creationId xmlns:a16="http://schemas.microsoft.com/office/drawing/2014/main" id="{EDDDEB3D-252C-439A-8B5D-C02BA771DA03}"/>
+                <a16:creationId xmlns:a16="http://schemas.microsoft.com/office/drawing/2014/main" id="{3B34EA3D-74E7-4C4C-9C0C-AB88D99D3859}"/>
               </a:ext>
             </a:extLst>
           </p:cNvPr>
@@ -21740,7 +21798,7 @@
           <p:cNvPr id="67" name="TextBox 67">
             <a:extLst xmlns:a="http://schemas.openxmlformats.org/drawingml/2006/main">
               <a:ext uri="{FF2B5EF4-FFF2-40B4-BE49-F238E27FC236}">
-                <a16:creationId xmlns:a16="http://schemas.microsoft.com/office/drawing/2014/main" id="{48F24830-5E90-40B9-B93E-A554E8F21AAF}"/>
+                <a16:creationId xmlns:a16="http://schemas.microsoft.com/office/drawing/2014/main" id="{24BE60A0-0F8C-4748-8DC4-6DE338C3C566}"/>
               </a:ext>
             </a:extLst>
           </p:cNvPr>
@@ -21790,7 +21848,7 @@
           <p:cNvPr id="68" name="Ellipse 68">
             <a:extLst xmlns:a="http://schemas.openxmlformats.org/drawingml/2006/main">
               <a:ext uri="{FF2B5EF4-FFF2-40B4-BE49-F238E27FC236}">
-                <a16:creationId xmlns:a16="http://schemas.microsoft.com/office/drawing/2014/main" id="{F849EF8B-40FC-4B78-86FD-07DBA24B43BD}"/>
+                <a16:creationId xmlns:a16="http://schemas.microsoft.com/office/drawing/2014/main" id="{E3671EDF-D391-4BB3-838F-F4FDA7E2EA22}"/>
               </a:ext>
             </a:extLst>
           </p:cNvPr>
@@ -21820,7 +21878,7 @@
           <p:cNvPr id="69" name="TextBox 69">
             <a:extLst xmlns:a="http://schemas.openxmlformats.org/drawingml/2006/main">
               <a:ext uri="{FF2B5EF4-FFF2-40B4-BE49-F238E27FC236}">
-                <a16:creationId xmlns:a16="http://schemas.microsoft.com/office/drawing/2014/main" id="{0035604D-4400-462F-A533-447D69C1FAEA}"/>
+                <a16:creationId xmlns:a16="http://schemas.microsoft.com/office/drawing/2014/main" id="{4602B472-EEDB-470B-B43D-24A39D5E082A}"/>
               </a:ext>
             </a:extLst>
           </p:cNvPr>
@@ -21870,7 +21928,7 @@
           <p:cNvPr id="70" name="TextBox 70">
             <a:extLst xmlns:a="http://schemas.openxmlformats.org/drawingml/2006/main">
               <a:ext uri="{FF2B5EF4-FFF2-40B4-BE49-F238E27FC236}">
-                <a16:creationId xmlns:a16="http://schemas.microsoft.com/office/drawing/2014/main" id="{F393329A-DDB2-4F5D-924D-B60B5DDC1986}"/>
+                <a16:creationId xmlns:a16="http://schemas.microsoft.com/office/drawing/2014/main" id="{D47B7E59-B72A-4404-9BAB-0CA74A2076CF}"/>
               </a:ext>
             </a:extLst>
           </p:cNvPr>
@@ -21920,7 +21978,7 @@
           <p:cNvPr id="72" name="TextBox 72">
             <a:extLst xmlns:a="http://schemas.openxmlformats.org/drawingml/2006/main">
               <a:ext uri="{FF2B5EF4-FFF2-40B4-BE49-F238E27FC236}">
-                <a16:creationId xmlns:a16="http://schemas.microsoft.com/office/drawing/2014/main" id="{27B7DA77-0A56-4724-A39A-D14529E184F1}"/>
+                <a16:creationId xmlns:a16="http://schemas.microsoft.com/office/drawing/2014/main" id="{C2CC705B-9B10-457A-B910-FD215B6872B4}"/>
               </a:ext>
             </a:extLst>
           </p:cNvPr>
@@ -21970,7 +22028,7 @@
           <p:cNvPr id="73" name="TextBox 73">
             <a:extLst xmlns:a="http://schemas.openxmlformats.org/drawingml/2006/main">
               <a:ext uri="{FF2B5EF4-FFF2-40B4-BE49-F238E27FC236}">
-                <a16:creationId xmlns:a16="http://schemas.microsoft.com/office/drawing/2014/main" id="{85F31E0B-2488-4302-BB98-546A3AAB8FD0}"/>
+                <a16:creationId xmlns:a16="http://schemas.microsoft.com/office/drawing/2014/main" id="{DD4839E5-4246-45D0-9AE7-0613E5095EDE}"/>
               </a:ext>
             </a:extLst>
           </p:cNvPr>
@@ -22020,7 +22078,7 @@
           <p:cNvPr id="74" name="TextBox 74">
             <a:extLst xmlns:a="http://schemas.openxmlformats.org/drawingml/2006/main">
               <a:ext uri="{FF2B5EF4-FFF2-40B4-BE49-F238E27FC236}">
-                <a16:creationId xmlns:a16="http://schemas.microsoft.com/office/drawing/2014/main" id="{4E1AB0D2-92F4-4B92-9E8F-87F3C12D95C8}"/>
+                <a16:creationId xmlns:a16="http://schemas.microsoft.com/office/drawing/2014/main" id="{945F65B2-E0AD-4D4A-B938-302A99B94005}"/>
               </a:ext>
             </a:extLst>
           </p:cNvPr>
@@ -22070,7 +22128,7 @@
           <p:cNvPr id="75" name="TextBox 75">
             <a:extLst xmlns:a="http://schemas.openxmlformats.org/drawingml/2006/main">
               <a:ext uri="{FF2B5EF4-FFF2-40B4-BE49-F238E27FC236}">
-                <a16:creationId xmlns:a16="http://schemas.microsoft.com/office/drawing/2014/main" id="{4C20D985-DABC-4FFD-AE6D-0A8C6205B342}"/>
+                <a16:creationId xmlns:a16="http://schemas.microsoft.com/office/drawing/2014/main" id="{2049221F-CC5E-4412-8A0A-2C89FC8AC675}"/>
               </a:ext>
             </a:extLst>
           </p:cNvPr>
@@ -22118,7 +22176,7 @@
     </p:spTree>
     <p:extLst>
       <p:ext uri="{BB962C8B-B14F-4D97-AF65-F5344CB8AC3E}">
-        <p14:creationId xmlns:p14="http://schemas.microsoft.com/office/powerpoint/2010/main" val="487159805"/>
+        <p14:creationId xmlns:p14="http://schemas.microsoft.com/office/powerpoint/2010/main" val="1734088645"/>
       </p:ext>
     </p:extLst>
   </p:cSld>
